--- a/1-Final/新增 Microsoft PowerPoint 簡報 (5) [自動儲存].pptx
+++ b/1-Final/新增 Microsoft PowerPoint 簡報 (5) [自動儲存].pptx
@@ -5,15 +5,17 @@
     <p:sldMasterId id="2147483648" r:id="rId1"/>
   </p:sldMasterIdLst>
   <p:sldIdLst>
-    <p:sldId id="256" r:id="rId2"/>
-    <p:sldId id="257" r:id="rId3"/>
-    <p:sldId id="258" r:id="rId4"/>
-    <p:sldId id="260" r:id="rId5"/>
-    <p:sldId id="261" r:id="rId6"/>
-    <p:sldId id="262" r:id="rId7"/>
-    <p:sldId id="263" r:id="rId8"/>
-    <p:sldId id="264" r:id="rId9"/>
-    <p:sldId id="265" r:id="rId10"/>
+    <p:sldId id="266" r:id="rId2"/>
+    <p:sldId id="267" r:id="rId3"/>
+    <p:sldId id="269" r:id="rId4"/>
+    <p:sldId id="257" r:id="rId5"/>
+    <p:sldId id="258" r:id="rId6"/>
+    <p:sldId id="260" r:id="rId7"/>
+    <p:sldId id="261" r:id="rId8"/>
+    <p:sldId id="262" r:id="rId9"/>
+    <p:sldId id="263" r:id="rId10"/>
+    <p:sldId id="264" r:id="rId11"/>
+    <p:sldId id="265" r:id="rId12"/>
   </p:sldIdLst>
   <p:sldSz cx="6858000" cy="9144000" type="screen4x3"/>
   <p:notesSz cx="6858000" cy="9144000"/>
@@ -169,10 +171,9 @@
           <a:lstStyle/>
           <a:p>
             <a:r>
-              <a:rPr lang="zh-TW" altLang="en-US" smtClean="0"/>
+              <a:rPr lang="zh-TW" altLang="en-US"/>
               <a:t>按一下以編輯母片標題樣式</a:t>
             </a:r>
-            <a:endParaRPr lang="zh-TW" altLang="en-US"/>
           </a:p>
         </p:txBody>
       </p:sp>
@@ -288,10 +289,9 @@
           </a:lstStyle>
           <a:p>
             <a:r>
-              <a:rPr lang="zh-TW" altLang="en-US" smtClean="0"/>
+              <a:rPr lang="zh-TW" altLang="en-US"/>
               <a:t>按一下以編輯母片副標題樣式</a:t>
             </a:r>
-            <a:endParaRPr lang="zh-TW" altLang="en-US"/>
           </a:p>
         </p:txBody>
       </p:sp>
@@ -312,7 +312,7 @@
           <a:p>
             <a:fld id="{5BBEAD13-0566-4C6C-97E7-55F17F24B09F}" type="datetimeFigureOut">
               <a:rPr lang="zh-TW" altLang="en-US" smtClean="0"/>
-              <a:t>2026/2/19</a:t>
+              <a:t>2026/2/24</a:t>
             </a:fld>
             <a:endParaRPr lang="zh-TW" altLang="en-US"/>
           </a:p>
@@ -401,10 +401,9 @@
           <a:lstStyle/>
           <a:p>
             <a:r>
-              <a:rPr lang="zh-TW" altLang="en-US" smtClean="0"/>
+              <a:rPr lang="zh-TW" altLang="en-US"/>
               <a:t>按一下以編輯母片標題樣式</a:t>
             </a:r>
-            <a:endParaRPr lang="zh-TW" altLang="en-US"/>
           </a:p>
         </p:txBody>
       </p:sp>
@@ -425,38 +424,37 @@
           <a:p>
             <a:pPr lvl="0"/>
             <a:r>
-              <a:rPr lang="zh-TW" altLang="en-US" smtClean="0"/>
+              <a:rPr lang="zh-TW" altLang="en-US"/>
               <a:t>按一下以編輯母片文字樣式</a:t>
             </a:r>
           </a:p>
           <a:p>
             <a:pPr lvl="1"/>
             <a:r>
-              <a:rPr lang="zh-TW" altLang="en-US" smtClean="0"/>
+              <a:rPr lang="zh-TW" altLang="en-US"/>
               <a:t>第二層</a:t>
             </a:r>
           </a:p>
           <a:p>
             <a:pPr lvl="2"/>
             <a:r>
-              <a:rPr lang="zh-TW" altLang="en-US" smtClean="0"/>
+              <a:rPr lang="zh-TW" altLang="en-US"/>
               <a:t>第三層</a:t>
             </a:r>
           </a:p>
           <a:p>
             <a:pPr lvl="3"/>
             <a:r>
-              <a:rPr lang="zh-TW" altLang="en-US" smtClean="0"/>
+              <a:rPr lang="zh-TW" altLang="en-US"/>
               <a:t>第四層</a:t>
             </a:r>
           </a:p>
           <a:p>
             <a:pPr lvl="4"/>
             <a:r>
-              <a:rPr lang="zh-TW" altLang="en-US" smtClean="0"/>
+              <a:rPr lang="zh-TW" altLang="en-US"/>
               <a:t>第五層</a:t>
             </a:r>
-            <a:endParaRPr lang="zh-TW" altLang="en-US"/>
           </a:p>
         </p:txBody>
       </p:sp>
@@ -477,7 +475,7 @@
           <a:p>
             <a:fld id="{5BBEAD13-0566-4C6C-97E7-55F17F24B09F}" type="datetimeFigureOut">
               <a:rPr lang="zh-TW" altLang="en-US" smtClean="0"/>
-              <a:t>2026/2/19</a:t>
+              <a:t>2026/2/24</a:t>
             </a:fld>
             <a:endParaRPr lang="zh-TW" altLang="en-US"/>
           </a:p>
@@ -571,10 +569,9 @@
           <a:lstStyle/>
           <a:p>
             <a:r>
-              <a:rPr lang="zh-TW" altLang="en-US" smtClean="0"/>
+              <a:rPr lang="zh-TW" altLang="en-US"/>
               <a:t>按一下以編輯母片標題樣式</a:t>
             </a:r>
-            <a:endParaRPr lang="zh-TW" altLang="en-US"/>
           </a:p>
         </p:txBody>
       </p:sp>
@@ -600,38 +597,37 @@
           <a:p>
             <a:pPr lvl="0"/>
             <a:r>
-              <a:rPr lang="zh-TW" altLang="en-US" smtClean="0"/>
+              <a:rPr lang="zh-TW" altLang="en-US"/>
               <a:t>按一下以編輯母片文字樣式</a:t>
             </a:r>
           </a:p>
           <a:p>
             <a:pPr lvl="1"/>
             <a:r>
-              <a:rPr lang="zh-TW" altLang="en-US" smtClean="0"/>
+              <a:rPr lang="zh-TW" altLang="en-US"/>
               <a:t>第二層</a:t>
             </a:r>
           </a:p>
           <a:p>
             <a:pPr lvl="2"/>
             <a:r>
-              <a:rPr lang="zh-TW" altLang="en-US" smtClean="0"/>
+              <a:rPr lang="zh-TW" altLang="en-US"/>
               <a:t>第三層</a:t>
             </a:r>
           </a:p>
           <a:p>
             <a:pPr lvl="3"/>
             <a:r>
-              <a:rPr lang="zh-TW" altLang="en-US" smtClean="0"/>
+              <a:rPr lang="zh-TW" altLang="en-US"/>
               <a:t>第四層</a:t>
             </a:r>
           </a:p>
           <a:p>
             <a:pPr lvl="4"/>
             <a:r>
-              <a:rPr lang="zh-TW" altLang="en-US" smtClean="0"/>
+              <a:rPr lang="zh-TW" altLang="en-US"/>
               <a:t>第五層</a:t>
             </a:r>
-            <a:endParaRPr lang="zh-TW" altLang="en-US"/>
           </a:p>
         </p:txBody>
       </p:sp>
@@ -652,7 +648,7 @@
           <a:p>
             <a:fld id="{5BBEAD13-0566-4C6C-97E7-55F17F24B09F}" type="datetimeFigureOut">
               <a:rPr lang="zh-TW" altLang="en-US" smtClean="0"/>
-              <a:t>2026/2/19</a:t>
+              <a:t>2026/2/24</a:t>
             </a:fld>
             <a:endParaRPr lang="zh-TW" altLang="en-US"/>
           </a:p>
@@ -741,10 +737,9 @@
           <a:lstStyle/>
           <a:p>
             <a:r>
-              <a:rPr lang="zh-TW" altLang="en-US" smtClean="0"/>
+              <a:rPr lang="zh-TW" altLang="en-US"/>
               <a:t>按一下以編輯母片標題樣式</a:t>
             </a:r>
-            <a:endParaRPr lang="zh-TW" altLang="en-US"/>
           </a:p>
         </p:txBody>
       </p:sp>
@@ -765,38 +760,37 @@
           <a:p>
             <a:pPr lvl="0"/>
             <a:r>
-              <a:rPr lang="zh-TW" altLang="en-US" smtClean="0"/>
+              <a:rPr lang="zh-TW" altLang="en-US"/>
               <a:t>按一下以編輯母片文字樣式</a:t>
             </a:r>
           </a:p>
           <a:p>
             <a:pPr lvl="1"/>
             <a:r>
-              <a:rPr lang="zh-TW" altLang="en-US" smtClean="0"/>
+              <a:rPr lang="zh-TW" altLang="en-US"/>
               <a:t>第二層</a:t>
             </a:r>
           </a:p>
           <a:p>
             <a:pPr lvl="2"/>
             <a:r>
-              <a:rPr lang="zh-TW" altLang="en-US" smtClean="0"/>
+              <a:rPr lang="zh-TW" altLang="en-US"/>
               <a:t>第三層</a:t>
             </a:r>
           </a:p>
           <a:p>
             <a:pPr lvl="3"/>
             <a:r>
-              <a:rPr lang="zh-TW" altLang="en-US" smtClean="0"/>
+              <a:rPr lang="zh-TW" altLang="en-US"/>
               <a:t>第四層</a:t>
             </a:r>
           </a:p>
           <a:p>
             <a:pPr lvl="4"/>
             <a:r>
-              <a:rPr lang="zh-TW" altLang="en-US" smtClean="0"/>
+              <a:rPr lang="zh-TW" altLang="en-US"/>
               <a:t>第五層</a:t>
             </a:r>
-            <a:endParaRPr lang="zh-TW" altLang="en-US"/>
           </a:p>
         </p:txBody>
       </p:sp>
@@ -817,7 +811,7 @@
           <a:p>
             <a:fld id="{5BBEAD13-0566-4C6C-97E7-55F17F24B09F}" type="datetimeFigureOut">
               <a:rPr lang="zh-TW" altLang="en-US" smtClean="0"/>
-              <a:t>2026/2/19</a:t>
+              <a:t>2026/2/24</a:t>
             </a:fld>
             <a:endParaRPr lang="zh-TW" altLang="en-US"/>
           </a:p>
@@ -915,10 +909,9 @@
           </a:lstStyle>
           <a:p>
             <a:r>
-              <a:rPr lang="zh-TW" altLang="en-US" smtClean="0"/>
+              <a:rPr lang="zh-TW" altLang="en-US"/>
               <a:t>按一下以編輯母片標題樣式</a:t>
             </a:r>
-            <a:endParaRPr lang="zh-TW" altLang="en-US"/>
           </a:p>
         </p:txBody>
       </p:sp>
@@ -1035,7 +1028,7 @@
           <a:p>
             <a:pPr lvl="0"/>
             <a:r>
-              <a:rPr lang="zh-TW" altLang="en-US" smtClean="0"/>
+              <a:rPr lang="zh-TW" altLang="en-US"/>
               <a:t>按一下以編輯母片文字樣式</a:t>
             </a:r>
           </a:p>
@@ -1058,7 +1051,7 @@
           <a:p>
             <a:fld id="{5BBEAD13-0566-4C6C-97E7-55F17F24B09F}" type="datetimeFigureOut">
               <a:rPr lang="zh-TW" altLang="en-US" smtClean="0"/>
-              <a:t>2026/2/19</a:t>
+              <a:t>2026/2/24</a:t>
             </a:fld>
             <a:endParaRPr lang="zh-TW" altLang="en-US"/>
           </a:p>
@@ -1147,10 +1140,9 @@
           <a:lstStyle/>
           <a:p>
             <a:r>
-              <a:rPr lang="zh-TW" altLang="en-US" smtClean="0"/>
+              <a:rPr lang="zh-TW" altLang="en-US"/>
               <a:t>按一下以編輯母片標題樣式</a:t>
             </a:r>
-            <a:endParaRPr lang="zh-TW" altLang="en-US"/>
           </a:p>
         </p:txBody>
       </p:sp>
@@ -1204,38 +1196,37 @@
           <a:p>
             <a:pPr lvl="0"/>
             <a:r>
-              <a:rPr lang="zh-TW" altLang="en-US" smtClean="0"/>
+              <a:rPr lang="zh-TW" altLang="en-US"/>
               <a:t>按一下以編輯母片文字樣式</a:t>
             </a:r>
           </a:p>
           <a:p>
             <a:pPr lvl="1"/>
             <a:r>
-              <a:rPr lang="zh-TW" altLang="en-US" smtClean="0"/>
+              <a:rPr lang="zh-TW" altLang="en-US"/>
               <a:t>第二層</a:t>
             </a:r>
           </a:p>
           <a:p>
             <a:pPr lvl="2"/>
             <a:r>
-              <a:rPr lang="zh-TW" altLang="en-US" smtClean="0"/>
+              <a:rPr lang="zh-TW" altLang="en-US"/>
               <a:t>第三層</a:t>
             </a:r>
           </a:p>
           <a:p>
             <a:pPr lvl="3"/>
             <a:r>
-              <a:rPr lang="zh-TW" altLang="en-US" smtClean="0"/>
+              <a:rPr lang="zh-TW" altLang="en-US"/>
               <a:t>第四層</a:t>
             </a:r>
           </a:p>
           <a:p>
             <a:pPr lvl="4"/>
             <a:r>
-              <a:rPr lang="zh-TW" altLang="en-US" smtClean="0"/>
+              <a:rPr lang="zh-TW" altLang="en-US"/>
               <a:t>第五層</a:t>
             </a:r>
-            <a:endParaRPr lang="zh-TW" altLang="en-US"/>
           </a:p>
         </p:txBody>
       </p:sp>
@@ -1289,38 +1280,37 @@
           <a:p>
             <a:pPr lvl="0"/>
             <a:r>
-              <a:rPr lang="zh-TW" altLang="en-US" smtClean="0"/>
+              <a:rPr lang="zh-TW" altLang="en-US"/>
               <a:t>按一下以編輯母片文字樣式</a:t>
             </a:r>
           </a:p>
           <a:p>
             <a:pPr lvl="1"/>
             <a:r>
-              <a:rPr lang="zh-TW" altLang="en-US" smtClean="0"/>
+              <a:rPr lang="zh-TW" altLang="en-US"/>
               <a:t>第二層</a:t>
             </a:r>
           </a:p>
           <a:p>
             <a:pPr lvl="2"/>
             <a:r>
-              <a:rPr lang="zh-TW" altLang="en-US" smtClean="0"/>
+              <a:rPr lang="zh-TW" altLang="en-US"/>
               <a:t>第三層</a:t>
             </a:r>
           </a:p>
           <a:p>
             <a:pPr lvl="3"/>
             <a:r>
-              <a:rPr lang="zh-TW" altLang="en-US" smtClean="0"/>
+              <a:rPr lang="zh-TW" altLang="en-US"/>
               <a:t>第四層</a:t>
             </a:r>
           </a:p>
           <a:p>
             <a:pPr lvl="4"/>
             <a:r>
-              <a:rPr lang="zh-TW" altLang="en-US" smtClean="0"/>
+              <a:rPr lang="zh-TW" altLang="en-US"/>
               <a:t>第五層</a:t>
             </a:r>
-            <a:endParaRPr lang="zh-TW" altLang="en-US"/>
           </a:p>
         </p:txBody>
       </p:sp>
@@ -1341,7 +1331,7 @@
           <a:p>
             <a:fld id="{5BBEAD13-0566-4C6C-97E7-55F17F24B09F}" type="datetimeFigureOut">
               <a:rPr lang="zh-TW" altLang="en-US" smtClean="0"/>
-              <a:t>2026/2/19</a:t>
+              <a:t>2026/2/24</a:t>
             </a:fld>
             <a:endParaRPr lang="zh-TW" altLang="en-US"/>
           </a:p>
@@ -1434,10 +1424,9 @@
           </a:lstStyle>
           <a:p>
             <a:r>
-              <a:rPr lang="zh-TW" altLang="en-US" smtClean="0"/>
+              <a:rPr lang="zh-TW" altLang="en-US"/>
               <a:t>按一下以編輯母片標題樣式</a:t>
             </a:r>
-            <a:endParaRPr lang="zh-TW" altLang="en-US"/>
           </a:p>
         </p:txBody>
       </p:sp>
@@ -1500,7 +1489,7 @@
           <a:p>
             <a:pPr lvl="0"/>
             <a:r>
-              <a:rPr lang="zh-TW" altLang="en-US" smtClean="0"/>
+              <a:rPr lang="zh-TW" altLang="en-US"/>
               <a:t>按一下以編輯母片文字樣式</a:t>
             </a:r>
           </a:p>
@@ -1556,38 +1545,37 @@
           <a:p>
             <a:pPr lvl="0"/>
             <a:r>
-              <a:rPr lang="zh-TW" altLang="en-US" smtClean="0"/>
+              <a:rPr lang="zh-TW" altLang="en-US"/>
               <a:t>按一下以編輯母片文字樣式</a:t>
             </a:r>
           </a:p>
           <a:p>
             <a:pPr lvl="1"/>
             <a:r>
-              <a:rPr lang="zh-TW" altLang="en-US" smtClean="0"/>
+              <a:rPr lang="zh-TW" altLang="en-US"/>
               <a:t>第二層</a:t>
             </a:r>
           </a:p>
           <a:p>
             <a:pPr lvl="2"/>
             <a:r>
-              <a:rPr lang="zh-TW" altLang="en-US" smtClean="0"/>
+              <a:rPr lang="zh-TW" altLang="en-US"/>
               <a:t>第三層</a:t>
             </a:r>
           </a:p>
           <a:p>
             <a:pPr lvl="3"/>
             <a:r>
-              <a:rPr lang="zh-TW" altLang="en-US" smtClean="0"/>
+              <a:rPr lang="zh-TW" altLang="en-US"/>
               <a:t>第四層</a:t>
             </a:r>
           </a:p>
           <a:p>
             <a:pPr lvl="4"/>
             <a:r>
-              <a:rPr lang="zh-TW" altLang="en-US" smtClean="0"/>
+              <a:rPr lang="zh-TW" altLang="en-US"/>
               <a:t>第五層</a:t>
             </a:r>
-            <a:endParaRPr lang="zh-TW" altLang="en-US"/>
           </a:p>
         </p:txBody>
       </p:sp>
@@ -1650,7 +1638,7 @@
           <a:p>
             <a:pPr lvl="0"/>
             <a:r>
-              <a:rPr lang="zh-TW" altLang="en-US" smtClean="0"/>
+              <a:rPr lang="zh-TW" altLang="en-US"/>
               <a:t>按一下以編輯母片文字樣式</a:t>
             </a:r>
           </a:p>
@@ -1706,38 +1694,37 @@
           <a:p>
             <a:pPr lvl="0"/>
             <a:r>
-              <a:rPr lang="zh-TW" altLang="en-US" smtClean="0"/>
+              <a:rPr lang="zh-TW" altLang="en-US"/>
               <a:t>按一下以編輯母片文字樣式</a:t>
             </a:r>
           </a:p>
           <a:p>
             <a:pPr lvl="1"/>
             <a:r>
-              <a:rPr lang="zh-TW" altLang="en-US" smtClean="0"/>
+              <a:rPr lang="zh-TW" altLang="en-US"/>
               <a:t>第二層</a:t>
             </a:r>
           </a:p>
           <a:p>
             <a:pPr lvl="2"/>
             <a:r>
-              <a:rPr lang="zh-TW" altLang="en-US" smtClean="0"/>
+              <a:rPr lang="zh-TW" altLang="en-US"/>
               <a:t>第三層</a:t>
             </a:r>
           </a:p>
           <a:p>
             <a:pPr lvl="3"/>
             <a:r>
-              <a:rPr lang="zh-TW" altLang="en-US" smtClean="0"/>
+              <a:rPr lang="zh-TW" altLang="en-US"/>
               <a:t>第四層</a:t>
             </a:r>
           </a:p>
           <a:p>
             <a:pPr lvl="4"/>
             <a:r>
-              <a:rPr lang="zh-TW" altLang="en-US" smtClean="0"/>
+              <a:rPr lang="zh-TW" altLang="en-US"/>
               <a:t>第五層</a:t>
             </a:r>
-            <a:endParaRPr lang="zh-TW" altLang="en-US"/>
           </a:p>
         </p:txBody>
       </p:sp>
@@ -1758,7 +1745,7 @@
           <a:p>
             <a:fld id="{5BBEAD13-0566-4C6C-97E7-55F17F24B09F}" type="datetimeFigureOut">
               <a:rPr lang="zh-TW" altLang="en-US" smtClean="0"/>
-              <a:t>2026/2/19</a:t>
+              <a:t>2026/2/24</a:t>
             </a:fld>
             <a:endParaRPr lang="zh-TW" altLang="en-US"/>
           </a:p>
@@ -1847,10 +1834,9 @@
           <a:lstStyle/>
           <a:p>
             <a:r>
-              <a:rPr lang="zh-TW" altLang="en-US" smtClean="0"/>
+              <a:rPr lang="zh-TW" altLang="en-US"/>
               <a:t>按一下以編輯母片標題樣式</a:t>
             </a:r>
-            <a:endParaRPr lang="zh-TW" altLang="en-US"/>
           </a:p>
         </p:txBody>
       </p:sp>
@@ -1871,7 +1857,7 @@
           <a:p>
             <a:fld id="{5BBEAD13-0566-4C6C-97E7-55F17F24B09F}" type="datetimeFigureOut">
               <a:rPr lang="zh-TW" altLang="en-US" smtClean="0"/>
-              <a:t>2026/2/19</a:t>
+              <a:t>2026/2/24</a:t>
             </a:fld>
             <a:endParaRPr lang="zh-TW" altLang="en-US"/>
           </a:p>
@@ -1961,7 +1947,7 @@
           <a:p>
             <a:fld id="{5BBEAD13-0566-4C6C-97E7-55F17F24B09F}" type="datetimeFigureOut">
               <a:rPr lang="zh-TW" altLang="en-US" smtClean="0"/>
-              <a:t>2026/2/19</a:t>
+              <a:t>2026/2/24</a:t>
             </a:fld>
             <a:endParaRPr lang="zh-TW" altLang="en-US"/>
           </a:p>
@@ -2059,10 +2045,9 @@
           </a:lstStyle>
           <a:p>
             <a:r>
-              <a:rPr lang="zh-TW" altLang="en-US" smtClean="0"/>
+              <a:rPr lang="zh-TW" altLang="en-US"/>
               <a:t>按一下以編輯母片標題樣式</a:t>
             </a:r>
-            <a:endParaRPr lang="zh-TW" altLang="en-US"/>
           </a:p>
         </p:txBody>
       </p:sp>
@@ -2116,38 +2101,37 @@
           <a:p>
             <a:pPr lvl="0"/>
             <a:r>
-              <a:rPr lang="zh-TW" altLang="en-US" smtClean="0"/>
+              <a:rPr lang="zh-TW" altLang="en-US"/>
               <a:t>按一下以編輯母片文字樣式</a:t>
             </a:r>
           </a:p>
           <a:p>
             <a:pPr lvl="1"/>
             <a:r>
-              <a:rPr lang="zh-TW" altLang="en-US" smtClean="0"/>
+              <a:rPr lang="zh-TW" altLang="en-US"/>
               <a:t>第二層</a:t>
             </a:r>
           </a:p>
           <a:p>
             <a:pPr lvl="2"/>
             <a:r>
-              <a:rPr lang="zh-TW" altLang="en-US" smtClean="0"/>
+              <a:rPr lang="zh-TW" altLang="en-US"/>
               <a:t>第三層</a:t>
             </a:r>
           </a:p>
           <a:p>
             <a:pPr lvl="3"/>
             <a:r>
-              <a:rPr lang="zh-TW" altLang="en-US" smtClean="0"/>
+              <a:rPr lang="zh-TW" altLang="en-US"/>
               <a:t>第四層</a:t>
             </a:r>
           </a:p>
           <a:p>
             <a:pPr lvl="4"/>
             <a:r>
-              <a:rPr lang="zh-TW" altLang="en-US" smtClean="0"/>
+              <a:rPr lang="zh-TW" altLang="en-US"/>
               <a:t>第五層</a:t>
             </a:r>
-            <a:endParaRPr lang="zh-TW" altLang="en-US"/>
           </a:p>
         </p:txBody>
       </p:sp>
@@ -2210,7 +2194,7 @@
           <a:p>
             <a:pPr lvl="0"/>
             <a:r>
-              <a:rPr lang="zh-TW" altLang="en-US" smtClean="0"/>
+              <a:rPr lang="zh-TW" altLang="en-US"/>
               <a:t>按一下以編輯母片文字樣式</a:t>
             </a:r>
           </a:p>
@@ -2233,7 +2217,7 @@
           <a:p>
             <a:fld id="{5BBEAD13-0566-4C6C-97E7-55F17F24B09F}" type="datetimeFigureOut">
               <a:rPr lang="zh-TW" altLang="en-US" smtClean="0"/>
-              <a:t>2026/2/19</a:t>
+              <a:t>2026/2/24</a:t>
             </a:fld>
             <a:endParaRPr lang="zh-TW" altLang="en-US"/>
           </a:p>
@@ -2331,10 +2315,9 @@
           </a:lstStyle>
           <a:p>
             <a:r>
-              <a:rPr lang="zh-TW" altLang="en-US" smtClean="0"/>
+              <a:rPr lang="zh-TW" altLang="en-US"/>
               <a:t>按一下以編輯母片標題樣式</a:t>
             </a:r>
-            <a:endParaRPr lang="zh-TW" altLang="en-US"/>
           </a:p>
         </p:txBody>
       </p:sp>
@@ -2458,7 +2441,7 @@
           <a:p>
             <a:pPr lvl="0"/>
             <a:r>
-              <a:rPr lang="zh-TW" altLang="en-US" smtClean="0"/>
+              <a:rPr lang="zh-TW" altLang="en-US"/>
               <a:t>按一下以編輯母片文字樣式</a:t>
             </a:r>
           </a:p>
@@ -2481,7 +2464,7 @@
           <a:p>
             <a:fld id="{5BBEAD13-0566-4C6C-97E7-55F17F24B09F}" type="datetimeFigureOut">
               <a:rPr lang="zh-TW" altLang="en-US" smtClean="0"/>
-              <a:t>2026/2/19</a:t>
+              <a:t>2026/2/24</a:t>
             </a:fld>
             <a:endParaRPr lang="zh-TW" altLang="en-US"/>
           </a:p>
@@ -2585,10 +2568,9 @@
           <a:lstStyle/>
           <a:p>
             <a:r>
-              <a:rPr lang="zh-TW" altLang="en-US" smtClean="0"/>
+              <a:rPr lang="zh-TW" altLang="en-US"/>
               <a:t>按一下以編輯母片標題樣式</a:t>
             </a:r>
-            <a:endParaRPr lang="zh-TW" altLang="en-US"/>
           </a:p>
         </p:txBody>
       </p:sp>
@@ -2619,38 +2601,37 @@
           <a:p>
             <a:pPr lvl="0"/>
             <a:r>
-              <a:rPr lang="zh-TW" altLang="en-US" smtClean="0"/>
+              <a:rPr lang="zh-TW" altLang="en-US"/>
               <a:t>按一下以編輯母片文字樣式</a:t>
             </a:r>
           </a:p>
           <a:p>
             <a:pPr lvl="1"/>
             <a:r>
-              <a:rPr lang="zh-TW" altLang="en-US" smtClean="0"/>
+              <a:rPr lang="zh-TW" altLang="en-US"/>
               <a:t>第二層</a:t>
             </a:r>
           </a:p>
           <a:p>
             <a:pPr lvl="2"/>
             <a:r>
-              <a:rPr lang="zh-TW" altLang="en-US" smtClean="0"/>
+              <a:rPr lang="zh-TW" altLang="en-US"/>
               <a:t>第三層</a:t>
             </a:r>
           </a:p>
           <a:p>
             <a:pPr lvl="3"/>
             <a:r>
-              <a:rPr lang="zh-TW" altLang="en-US" smtClean="0"/>
+              <a:rPr lang="zh-TW" altLang="en-US"/>
               <a:t>第四層</a:t>
             </a:r>
           </a:p>
           <a:p>
             <a:pPr lvl="4"/>
             <a:r>
-              <a:rPr lang="zh-TW" altLang="en-US" smtClean="0"/>
+              <a:rPr lang="zh-TW" altLang="en-US"/>
               <a:t>第五層</a:t>
             </a:r>
-            <a:endParaRPr lang="zh-TW" altLang="en-US"/>
           </a:p>
         </p:txBody>
       </p:sp>
@@ -2689,7 +2670,7 @@
           <a:p>
             <a:fld id="{5BBEAD13-0566-4C6C-97E7-55F17F24B09F}" type="datetimeFigureOut">
               <a:rPr lang="zh-TW" altLang="en-US" smtClean="0"/>
-              <a:t>2026/2/19</a:t>
+              <a:t>2026/2/24</a:t>
             </a:fld>
             <a:endParaRPr lang="zh-TW" altLang="en-US"/>
           </a:p>
@@ -3059,244 +3040,22 @@
           <a:chExt cx="0" cy="0"/>
         </a:xfrm>
       </p:grpSpPr>
-      <p:pic>
-        <p:nvPicPr>
-          <p:cNvPr id="42" name="圖片 41"/>
-          <p:cNvPicPr>
-            <a:picLocks noChangeAspect="1"/>
-          </p:cNvPicPr>
-          <p:nvPr/>
-        </p:nvPicPr>
-        <p:blipFill>
-          <a:blip r:embed="rId2">
+      <p:sp>
+        <p:nvSpPr>
+          <p:cNvPr id="4" name="文字方塊 3">
             <a:extLst>
-              <a:ext uri="{28A0092B-C50C-407E-A947-70E740481C1C}">
-                <a14:useLocalDpi xmlns:a14="http://schemas.microsoft.com/office/drawing/2010/main" val="0"/>
+              <a:ext uri="{FF2B5EF4-FFF2-40B4-BE49-F238E27FC236}">
+                <a16:creationId xmlns:a16="http://schemas.microsoft.com/office/drawing/2014/main" id="{7FCD40F2-9077-1A99-8F71-7B84A1B2A76A}"/>
               </a:ext>
             </a:extLst>
-          </a:blip>
-          <a:stretch>
-            <a:fillRect/>
-          </a:stretch>
-        </p:blipFill>
-        <p:spPr>
-          <a:xfrm>
-            <a:off x="2207342" y="5863700"/>
-            <a:ext cx="831960" cy="543321"/>
-          </a:xfrm>
-          <a:prstGeom prst="rect">
-            <a:avLst/>
-          </a:prstGeom>
-        </p:spPr>
-      </p:pic>
-      <p:pic>
-        <p:nvPicPr>
-          <p:cNvPr id="9" name="圖片 8"/>
-          <p:cNvPicPr>
-            <a:picLocks noChangeAspect="1"/>
-          </p:cNvPicPr>
-          <p:nvPr/>
-        </p:nvPicPr>
-        <p:blipFill>
-          <a:blip r:embed="rId3">
-            <a:extLst>
-              <a:ext uri="{28A0092B-C50C-407E-A947-70E740481C1C}">
-                <a14:useLocalDpi xmlns:a14="http://schemas.microsoft.com/office/drawing/2010/main" val="0"/>
-              </a:ext>
-            </a:extLst>
-          </a:blip>
-          <a:stretch>
-            <a:fillRect/>
-          </a:stretch>
-        </p:blipFill>
-        <p:spPr>
-          <a:xfrm>
-            <a:off x="268399" y="2817649"/>
-            <a:ext cx="1868442" cy="3679394"/>
-          </a:xfrm>
-          <a:prstGeom prst="rect">
-            <a:avLst/>
-          </a:prstGeom>
-        </p:spPr>
-      </p:pic>
-      <p:sp>
-        <p:nvSpPr>
-          <p:cNvPr id="5" name="文字方塊 4"/>
+          </p:cNvPr>
           <p:cNvSpPr txBox="1"/>
           <p:nvPr/>
         </p:nvSpPr>
         <p:spPr>
           <a:xfrm>
-            <a:off x="102393" y="2199734"/>
-            <a:ext cx="1859805" cy="300082"/>
-          </a:xfrm>
-          <a:prstGeom prst="rect">
-            <a:avLst/>
-          </a:prstGeom>
-          <a:solidFill>
-            <a:srgbClr val="FFFF00"/>
-          </a:solidFill>
-        </p:spPr>
-        <p:txBody>
-          <a:bodyPr wrap="none" rtlCol="0">
-            <a:spAutoFit/>
-          </a:bodyPr>
-          <a:lstStyle/>
-          <a:p>
-            <a:r>
-              <a:rPr lang="zh-TW" altLang="en-US" sz="1350" b="1" dirty="0">
-                <a:solidFill>
-                  <a:srgbClr val="FF0000"/>
-                </a:solidFill>
-              </a:rPr>
-              <a:t>本機 </a:t>
-            </a:r>
-            <a:r>
-              <a:rPr lang="en-US" altLang="zh-TW" sz="1350" b="1" dirty="0" err="1">
-                <a:solidFill>
-                  <a:srgbClr val="FF0000"/>
-                </a:solidFill>
-              </a:rPr>
-              <a:t>Phonmain</a:t>
-            </a:r>
-            <a:r>
-              <a:rPr lang="en-US" altLang="zh-TW" sz="1350" b="1" dirty="0">
-                <a:solidFill>
-                  <a:srgbClr val="FF0000"/>
-                </a:solidFill>
-              </a:rPr>
-              <a:t> </a:t>
-            </a:r>
-            <a:r>
-              <a:rPr lang="zh-TW" altLang="en-US" sz="1350" b="1" dirty="0">
-                <a:solidFill>
-                  <a:srgbClr val="FF0000"/>
-                </a:solidFill>
-              </a:rPr>
-              <a:t>根目錄</a:t>
-            </a:r>
-          </a:p>
-        </p:txBody>
-      </p:sp>
-      <p:cxnSp>
-        <p:nvCxnSpPr>
-          <p:cNvPr id="8" name="肘形接點 7"/>
-          <p:cNvCxnSpPr/>
-          <p:nvPr/>
-        </p:nvCxnSpPr>
-        <p:spPr>
-          <a:xfrm flipV="1">
-            <a:off x="1136505" y="2557879"/>
-            <a:ext cx="887524" cy="451090"/>
-          </a:xfrm>
-          <a:prstGeom prst="bentConnector3">
-            <a:avLst/>
-          </a:prstGeom>
-          <a:ln>
-            <a:solidFill>
-              <a:srgbClr val="FF0000"/>
-            </a:solidFill>
-            <a:headEnd type="none" w="med" len="med"/>
-            <a:tailEnd type="triangle" w="med" len="med"/>
-          </a:ln>
-        </p:spPr>
-        <p:style>
-          <a:lnRef idx="1">
-            <a:schemeClr val="accent1"/>
-          </a:lnRef>
-          <a:fillRef idx="0">
-            <a:schemeClr val="accent1"/>
-          </a:fillRef>
-          <a:effectRef idx="0">
-            <a:schemeClr val="accent1"/>
-          </a:effectRef>
-          <a:fontRef idx="minor">
-            <a:schemeClr val="tx1"/>
-          </a:fontRef>
-        </p:style>
-      </p:cxnSp>
-      <p:cxnSp>
-        <p:nvCxnSpPr>
-          <p:cNvPr id="15" name="直線單箭頭接點 14"/>
-          <p:cNvCxnSpPr/>
-          <p:nvPr/>
-        </p:nvCxnSpPr>
-        <p:spPr>
-          <a:xfrm>
-            <a:off x="1010354" y="3299890"/>
-            <a:ext cx="947864" cy="6725"/>
-          </a:xfrm>
-          <a:prstGeom prst="straightConnector1">
-            <a:avLst/>
-          </a:prstGeom>
-          <a:ln>
-            <a:solidFill>
-              <a:srgbClr val="FF0000"/>
-            </a:solidFill>
-            <a:tailEnd type="triangle"/>
-          </a:ln>
-        </p:spPr>
-        <p:style>
-          <a:lnRef idx="1">
-            <a:schemeClr val="accent1"/>
-          </a:lnRef>
-          <a:fillRef idx="0">
-            <a:schemeClr val="accent1"/>
-          </a:fillRef>
-          <a:effectRef idx="0">
-            <a:schemeClr val="accent1"/>
-          </a:effectRef>
-          <a:fontRef idx="minor">
-            <a:schemeClr val="tx1"/>
-          </a:fontRef>
-        </p:style>
-      </p:cxnSp>
-      <p:cxnSp>
-        <p:nvCxnSpPr>
-          <p:cNvPr id="18" name="直線單箭頭接點 17"/>
-          <p:cNvCxnSpPr/>
-          <p:nvPr/>
-        </p:nvCxnSpPr>
-        <p:spPr>
-          <a:xfrm>
-            <a:off x="1118366" y="3886444"/>
-            <a:ext cx="432048" cy="0"/>
-          </a:xfrm>
-          <a:prstGeom prst="straightConnector1">
-            <a:avLst/>
-          </a:prstGeom>
-          <a:ln>
-            <a:solidFill>
-              <a:srgbClr val="FF0000"/>
-            </a:solidFill>
-            <a:tailEnd type="triangle"/>
-          </a:ln>
-        </p:spPr>
-        <p:style>
-          <a:lnRef idx="1">
-            <a:schemeClr val="accent1"/>
-          </a:lnRef>
-          <a:fillRef idx="0">
-            <a:schemeClr val="accent1"/>
-          </a:fillRef>
-          <a:effectRef idx="0">
-            <a:schemeClr val="accent1"/>
-          </a:effectRef>
-          <a:fontRef idx="minor">
-            <a:schemeClr val="tx1"/>
-          </a:fontRef>
-        </p:style>
-      </p:cxnSp>
-      <p:sp>
-        <p:nvSpPr>
-          <p:cNvPr id="19" name="文字方塊 18"/>
-          <p:cNvSpPr txBox="1"/>
-          <p:nvPr/>
-        </p:nvSpPr>
-        <p:spPr>
-          <a:xfrm>
-            <a:off x="1538790" y="3724697"/>
-            <a:ext cx="453970" cy="300082"/>
+            <a:off x="1" y="179512"/>
+            <a:ext cx="6858000" cy="8710077"/>
           </a:xfrm>
           <a:prstGeom prst="rect">
             <a:avLst/>
@@ -3304,460 +3063,1116 @@
           <a:noFill/>
         </p:spPr>
         <p:txBody>
-          <a:bodyPr wrap="none" rtlCol="0">
+          <a:bodyPr wrap="square" rtlCol="0">
             <a:spAutoFit/>
           </a:bodyPr>
           <a:lstStyle/>
           <a:p>
             <a:r>
-              <a:rPr lang="en-US" altLang="zh-TW" sz="1350" b="1" dirty="0"/>
+              <a:rPr lang="zh-TW" altLang="en-US" sz="1400" b="1" dirty="0"/>
+              <a:t>團購網主要需求如下：</a:t>
+            </a:r>
+            <a:endParaRPr lang="en-US" altLang="zh-TW" sz="1400" b="1" dirty="0"/>
+          </a:p>
+          <a:p>
+            <a:pPr marL="342900" indent="-342900">
+              <a:buAutoNum type="arabicParenR"/>
+            </a:pPr>
+            <a:r>
+              <a:rPr lang="zh-TW" altLang="en-US" sz="1400" b="1" dirty="0"/>
+              <a:t>人數約</a:t>
+            </a:r>
+            <a:r>
+              <a:rPr lang="en-US" altLang="zh-TW" sz="1400" b="1" dirty="0"/>
+              <a:t>100</a:t>
+            </a:r>
+            <a:r>
+              <a:rPr lang="zh-TW" altLang="en-US" sz="1400" b="1" dirty="0"/>
+              <a:t>人</a:t>
+            </a:r>
+            <a:endParaRPr lang="en-US" altLang="zh-TW" sz="1400" b="1" dirty="0"/>
+          </a:p>
+          <a:p>
+            <a:pPr marL="342900" indent="-342900">
+              <a:buAutoNum type="arabicParenR"/>
+            </a:pPr>
+            <a:r>
+              <a:rPr lang="zh-TW" altLang="en-US" sz="1400" b="1" dirty="0"/>
+              <a:t>可視化手機操作</a:t>
+            </a:r>
+            <a:r>
+              <a:rPr lang="en-US" altLang="zh-TW" sz="1400" b="1" dirty="0"/>
+              <a:t>(</a:t>
+            </a:r>
+            <a:r>
+              <a:rPr lang="zh-TW" altLang="en-US" sz="1400" b="1" dirty="0"/>
+              <a:t>訂貨及管理操作</a:t>
+            </a:r>
+            <a:r>
+              <a:rPr lang="en-US" altLang="zh-TW" sz="1400" b="1" dirty="0"/>
+              <a:t>)</a:t>
+            </a:r>
+          </a:p>
+          <a:p>
+            <a:pPr marL="342900" indent="-342900">
+              <a:buAutoNum type="arabicParenR"/>
+            </a:pPr>
+            <a:r>
+              <a:rPr lang="zh-TW" altLang="en-US" sz="1400" b="1" dirty="0"/>
+              <a:t>買家部份</a:t>
+            </a:r>
+            <a:r>
+              <a:rPr lang="en-US" altLang="zh-TW" sz="1400" b="1" dirty="0"/>
+              <a:t>: (</a:t>
+            </a:r>
+            <a:r>
+              <a:rPr lang="zh-TW" altLang="en-US" sz="1400" b="1" dirty="0"/>
+              <a:t>於</a:t>
+            </a:r>
+            <a:r>
+              <a:rPr lang="en-US" altLang="zh-TW" sz="1400" b="1" dirty="0"/>
+              <a:t>line</a:t>
+            </a:r>
+            <a:r>
+              <a:rPr lang="zh-TW" altLang="en-US" sz="1400" b="1" dirty="0"/>
+              <a:t>選單的</a:t>
+            </a:r>
+            <a:r>
+              <a:rPr lang="en-US" altLang="zh-TW" sz="1400" b="1" dirty="0"/>
+              <a:t>3</a:t>
+            </a:r>
+            <a:r>
+              <a:rPr lang="zh-TW" altLang="en-US" sz="1400" b="1" dirty="0"/>
+              <a:t>個入口頁面</a:t>
+            </a:r>
+            <a:r>
+              <a:rPr lang="en-US" altLang="zh-TW" sz="1400" b="1" dirty="0"/>
+              <a:t>)</a:t>
+            </a:r>
+          </a:p>
+          <a:p>
+            <a:r>
+              <a:rPr lang="en-US" altLang="zh-TW" sz="1400" b="1" dirty="0"/>
+              <a:t>        (a) </a:t>
+            </a:r>
+            <a:r>
+              <a:rPr lang="zh-TW" altLang="en-US" sz="1400" b="1" dirty="0"/>
+              <a:t>我要下單 </a:t>
+            </a:r>
+            <a:endParaRPr lang="en-US" altLang="zh-TW" sz="1400" b="1" dirty="0"/>
+          </a:p>
+          <a:p>
+            <a:r>
+              <a:rPr lang="en-US" altLang="zh-TW" sz="1400" b="1" dirty="0"/>
+              <a:t>             </a:t>
+            </a:r>
+            <a:r>
+              <a:rPr lang="zh-TW" altLang="en-US" sz="1400" b="1" dirty="0"/>
+              <a:t>顯示商品清單縮圖</a:t>
+            </a:r>
+            <a:r>
+              <a:rPr lang="en-US" altLang="zh-TW" sz="1400" b="1" dirty="0"/>
+              <a:t>,</a:t>
+            </a:r>
+            <a:r>
+              <a:rPr lang="zh-TW" altLang="en-US" sz="1400" b="1" dirty="0"/>
+              <a:t>點選購買商品後進入詳細商品頁</a:t>
+            </a:r>
+            <a:r>
+              <a:rPr lang="en-US" altLang="zh-TW" sz="1400" b="1" dirty="0"/>
+              <a:t>,</a:t>
+            </a:r>
+            <a:r>
+              <a:rPr lang="zh-TW" altLang="en-US" sz="1400" b="1" dirty="0"/>
+              <a:t>下方放</a:t>
+            </a:r>
+            <a:r>
+              <a:rPr lang="en-US" altLang="zh-TW" sz="1400" b="1" dirty="0"/>
+              <a:t>”</a:t>
+            </a:r>
+            <a:r>
+              <a:rPr lang="zh-TW" altLang="en-US" sz="1400" b="1" dirty="0"/>
+              <a:t>購買按鈕</a:t>
+            </a:r>
+            <a:r>
+              <a:rPr lang="en-US" altLang="zh-TW" sz="1400" b="1" dirty="0"/>
+              <a:t>”</a:t>
+            </a:r>
+          </a:p>
+          <a:p>
+            <a:r>
+              <a:rPr lang="en-US" altLang="zh-TW" sz="1400" b="1" dirty="0"/>
+              <a:t>        (b) </a:t>
+            </a:r>
+            <a:r>
+              <a:rPr lang="zh-TW" altLang="en-US" sz="1400" b="1" dirty="0"/>
+              <a:t>我的訂單</a:t>
+            </a:r>
+            <a:r>
+              <a:rPr lang="en-US" altLang="zh-TW" sz="1400" b="1" dirty="0"/>
               <a:t>/</a:t>
             </a:r>
-            <a:r>
-              <a:rPr lang="en-US" altLang="zh-TW" sz="1350" b="1" dirty="0" err="1"/>
-              <a:t>liff</a:t>
-            </a:r>
-            <a:endParaRPr lang="zh-TW" altLang="en-US" sz="1350" b="1" dirty="0"/>
+          </a:p>
+          <a:p>
+            <a:r>
+              <a:rPr lang="en-US" altLang="zh-TW" sz="1400" b="1" dirty="0"/>
+              <a:t>         </a:t>
+            </a:r>
+            <a:r>
+              <a:rPr lang="zh-TW" altLang="en-US" sz="1400" b="1" dirty="0"/>
+              <a:t>查詢</a:t>
+            </a:r>
+            <a:r>
+              <a:rPr lang="en-US" altLang="zh-TW" sz="1400" b="1" dirty="0"/>
+              <a:t>: </a:t>
+            </a:r>
+            <a:r>
+              <a:rPr lang="zh-TW" altLang="en-US" sz="1400" b="1" dirty="0"/>
+              <a:t>顯示查詢買家個人已訂未到貨列表</a:t>
+            </a:r>
+            <a:endParaRPr lang="en-US" altLang="zh-TW" sz="1400" b="1" dirty="0"/>
+          </a:p>
+          <a:p>
+            <a:r>
+              <a:rPr lang="zh-TW" altLang="en-US" sz="1400" b="1" dirty="0"/>
+              <a:t>         修改</a:t>
+            </a:r>
+            <a:r>
+              <a:rPr lang="en-US" altLang="zh-TW" sz="1400" b="1" dirty="0"/>
+              <a:t>:</a:t>
+            </a:r>
+            <a:r>
+              <a:rPr lang="zh-TW" altLang="en-US" sz="1400" b="1" dirty="0"/>
+              <a:t>管理者未結單時都可刪除</a:t>
+            </a:r>
+            <a:r>
+              <a:rPr lang="en-US" altLang="zh-TW" sz="1400" b="1" dirty="0"/>
+              <a:t>(</a:t>
+            </a:r>
+            <a:r>
+              <a:rPr lang="zh-TW" altLang="en-US" sz="1400" b="1" dirty="0"/>
+              <a:t>重訂</a:t>
+            </a:r>
+            <a:r>
+              <a:rPr lang="en-US" altLang="zh-TW" sz="1400" b="1" dirty="0"/>
+              <a:t>)</a:t>
+            </a:r>
+            <a:r>
+              <a:rPr lang="zh-TW" altLang="en-US" sz="1400" b="1" dirty="0"/>
+              <a:t>訂單</a:t>
+            </a:r>
+            <a:r>
+              <a:rPr lang="en-US" altLang="zh-TW" sz="1400" b="1" dirty="0"/>
+              <a:t>,</a:t>
+            </a:r>
+            <a:r>
+              <a:rPr lang="zh-TW" altLang="en-US" sz="1400" b="1" dirty="0"/>
+              <a:t>結單後不可修改</a:t>
+            </a:r>
+            <a:r>
+              <a:rPr lang="en-US" altLang="zh-TW" sz="1400" b="1" dirty="0">
+                <a:sym typeface="Wingdings" panose="05000000000000000000" pitchFamily="2" charset="2"/>
+              </a:rPr>
+              <a:t></a:t>
+            </a:r>
+            <a:r>
+              <a:rPr lang="zh-TW" altLang="en-US" sz="1400" b="1" dirty="0">
+                <a:sym typeface="Wingdings" panose="05000000000000000000" pitchFamily="2" charset="2"/>
+              </a:rPr>
+              <a:t>列入已訂未到貨清單</a:t>
+            </a:r>
+            <a:r>
+              <a:rPr lang="en-US" altLang="zh-TW" sz="1400" b="1" dirty="0">
+                <a:sym typeface="Wingdings" panose="05000000000000000000" pitchFamily="2" charset="2"/>
+              </a:rPr>
+              <a:t>)</a:t>
+            </a:r>
+          </a:p>
+          <a:p>
+            <a:r>
+              <a:rPr lang="en-US" altLang="zh-TW" sz="1400" b="1" dirty="0">
+                <a:sym typeface="Wingdings" panose="05000000000000000000" pitchFamily="2" charset="2"/>
+              </a:rPr>
+              <a:t>        (c) </a:t>
+            </a:r>
+            <a:r>
+              <a:rPr lang="zh-TW" altLang="en-US" sz="1400" b="1" dirty="0">
+                <a:sym typeface="Wingdings" panose="05000000000000000000" pitchFamily="2" charset="2"/>
+              </a:rPr>
+              <a:t>現貨出清</a:t>
+            </a:r>
+            <a:endParaRPr lang="en-US" altLang="zh-TW" sz="1400" b="1" dirty="0">
+              <a:sym typeface="Wingdings" panose="05000000000000000000" pitchFamily="2" charset="2"/>
+            </a:endParaRPr>
+          </a:p>
+          <a:p>
+            <a:r>
+              <a:rPr lang="en-US" altLang="zh-TW" sz="1400" b="1" dirty="0"/>
+              <a:t>              </a:t>
+            </a:r>
+            <a:r>
+              <a:rPr lang="zh-TW" altLang="en-US" sz="1400" b="1" dirty="0"/>
+              <a:t>搶購溢多現貨商品</a:t>
+            </a:r>
+            <a:endParaRPr lang="en-US" altLang="zh-TW" sz="1400" b="1" dirty="0"/>
+          </a:p>
+          <a:p>
+            <a:r>
+              <a:rPr lang="en-US" altLang="zh-TW" sz="1400" b="1" dirty="0"/>
+              <a:t>4)    </a:t>
+            </a:r>
+            <a:r>
+              <a:rPr lang="zh-TW" altLang="en-US" sz="1400" b="1" dirty="0"/>
+              <a:t>團主管理部份</a:t>
+            </a:r>
+            <a:r>
+              <a:rPr lang="en-US" altLang="zh-TW" sz="1400" b="1" dirty="0"/>
+              <a:t>:(</a:t>
+            </a:r>
+            <a:r>
+              <a:rPr lang="zh-TW" altLang="en-US" sz="1400" b="1" dirty="0"/>
+              <a:t>於</a:t>
+            </a:r>
+            <a:r>
+              <a:rPr lang="en-US" altLang="zh-TW" sz="1400" b="1" dirty="0"/>
+              <a:t>line</a:t>
+            </a:r>
+            <a:r>
+              <a:rPr lang="zh-TW" altLang="en-US" sz="1400" b="1" dirty="0"/>
+              <a:t>選單第</a:t>
+            </a:r>
+            <a:r>
+              <a:rPr lang="en-US" altLang="zh-TW" sz="1400" b="1" dirty="0"/>
+              <a:t>4</a:t>
+            </a:r>
+            <a:r>
+              <a:rPr lang="zh-TW" altLang="en-US" sz="1400" b="1" dirty="0"/>
+              <a:t>個入口頁面</a:t>
+            </a:r>
+            <a:r>
+              <a:rPr lang="en-US" altLang="zh-TW" sz="1400" b="1" dirty="0"/>
+              <a:t>)</a:t>
+            </a:r>
+          </a:p>
+          <a:p>
+            <a:r>
+              <a:rPr lang="en-US" altLang="zh-TW" sz="1400" b="1" dirty="0"/>
+              <a:t>        (a) </a:t>
+            </a:r>
+            <a:r>
+              <a:rPr lang="zh-TW" altLang="en-US" sz="1400" b="1" dirty="0"/>
+              <a:t>商品管理</a:t>
+            </a:r>
+            <a:r>
+              <a:rPr lang="en-US" altLang="zh-TW" sz="1400" b="1" dirty="0"/>
+              <a:t>(</a:t>
+            </a:r>
+            <a:r>
+              <a:rPr lang="zh-TW" altLang="en-US" sz="1400" b="1" dirty="0"/>
+              <a:t>上架</a:t>
+            </a:r>
+            <a:r>
+              <a:rPr lang="en-US" altLang="zh-TW" sz="1400" b="1" dirty="0"/>
+              <a:t>)</a:t>
+            </a:r>
+          </a:p>
+          <a:p>
+            <a:r>
+              <a:rPr lang="en-US" altLang="zh-TW" sz="1400" b="1" dirty="0"/>
+              <a:t>               1. </a:t>
+            </a:r>
+            <a:r>
+              <a:rPr lang="zh-TW" altLang="en-US" sz="1400" b="1" dirty="0"/>
+              <a:t>新商品</a:t>
+            </a:r>
+            <a:r>
+              <a:rPr lang="en-US" altLang="zh-TW" sz="1400" b="1" dirty="0"/>
+              <a:t>(</a:t>
+            </a:r>
+            <a:r>
+              <a:rPr lang="zh-TW" altLang="en-US" sz="1400" b="1" dirty="0"/>
+              <a:t>含訂價</a:t>
+            </a:r>
+            <a:r>
+              <a:rPr lang="en-US" altLang="zh-TW" sz="1400" b="1" dirty="0"/>
+              <a:t>,</a:t>
+            </a:r>
+            <a:r>
+              <a:rPr lang="zh-TW" altLang="en-US" sz="1400" b="1" dirty="0"/>
+              <a:t>數量</a:t>
+            </a:r>
+            <a:r>
+              <a:rPr lang="en-US" altLang="zh-TW" sz="1400" b="1" dirty="0"/>
+              <a:t>…</a:t>
+            </a:r>
+            <a:r>
+              <a:rPr lang="zh-TW" altLang="en-US" sz="1400" b="1" dirty="0"/>
+              <a:t>各商品結單日</a:t>
+            </a:r>
+            <a:r>
+              <a:rPr lang="en-US" altLang="zh-TW" sz="1400" b="1" dirty="0"/>
+              <a:t>)</a:t>
+            </a:r>
+          </a:p>
+          <a:p>
+            <a:r>
+              <a:rPr lang="en-US" altLang="zh-TW" sz="1400" b="1" dirty="0"/>
+              <a:t>                    </a:t>
+            </a:r>
+            <a:r>
+              <a:rPr lang="zh-TW" altLang="en-US" sz="1400" b="1" dirty="0"/>
+              <a:t>於結單日前</a:t>
+            </a:r>
+            <a:r>
+              <a:rPr lang="en-US" altLang="zh-TW" sz="1400" b="1" dirty="0"/>
+              <a:t>1</a:t>
+            </a:r>
+            <a:r>
+              <a:rPr lang="zh-TW" altLang="en-US" sz="1400" b="1" dirty="0"/>
+              <a:t>天主動推播</a:t>
+            </a:r>
+            <a:r>
+              <a:rPr lang="en-US" altLang="zh-TW" sz="1400" b="1" dirty="0"/>
+              <a:t>(</a:t>
+            </a:r>
+            <a:r>
+              <a:rPr lang="zh-TW" altLang="en-US" sz="1400" b="1" dirty="0"/>
+              <a:t>商品即將結單</a:t>
+            </a:r>
+            <a:r>
+              <a:rPr lang="en-US" altLang="zh-TW" sz="1400" b="1" dirty="0"/>
+              <a:t>,</a:t>
+            </a:r>
+            <a:r>
+              <a:rPr lang="zh-TW" altLang="en-US" sz="1400" b="1" dirty="0"/>
+              <a:t>要訂的請儘快下訂</a:t>
+            </a:r>
+            <a:r>
+              <a:rPr lang="en-US" altLang="zh-TW" sz="1400" b="1" dirty="0"/>
+              <a:t>……)</a:t>
+            </a:r>
+          </a:p>
+          <a:p>
+            <a:r>
+              <a:rPr lang="en-US" altLang="zh-TW" sz="1400" b="1" dirty="0"/>
+              <a:t>               2. </a:t>
+            </a:r>
+            <a:r>
+              <a:rPr lang="zh-TW" altLang="en-US" sz="1400" b="1" dirty="0"/>
+              <a:t>現貨商品 </a:t>
+            </a:r>
+            <a:endParaRPr lang="en-US" altLang="zh-TW" sz="1400" b="1" dirty="0"/>
+          </a:p>
+          <a:p>
+            <a:r>
+              <a:rPr lang="zh-TW" altLang="en-US" sz="1400" b="1" dirty="0"/>
+              <a:t>                    防止同時下單機制</a:t>
+            </a:r>
+            <a:r>
+              <a:rPr lang="en-US" altLang="zh-TW" sz="1400" b="1" dirty="0"/>
+              <a:t>,</a:t>
+            </a:r>
+            <a:r>
+              <a:rPr lang="zh-TW" altLang="en-US" sz="1400" b="1" dirty="0"/>
+              <a:t>先下單</a:t>
+            </a:r>
+            <a:r>
+              <a:rPr lang="en-US" altLang="zh-TW" sz="1400" b="1" dirty="0"/>
+              <a:t>(</a:t>
+            </a:r>
+            <a:r>
+              <a:rPr lang="zh-TW" altLang="en-US" sz="1400" b="1" dirty="0"/>
+              <a:t>先壓按鈕</a:t>
+            </a:r>
+            <a:r>
+              <a:rPr lang="en-US" altLang="zh-TW" sz="1400" b="1" dirty="0"/>
+              <a:t>)</a:t>
+            </a:r>
+            <a:r>
+              <a:rPr lang="zh-TW" altLang="en-US" sz="1400" b="1" dirty="0"/>
+              <a:t>者就刪除該筆商品</a:t>
+            </a:r>
+            <a:r>
+              <a:rPr lang="en-US" altLang="zh-TW" sz="1400" b="1" dirty="0"/>
+              <a:t> </a:t>
+            </a:r>
+          </a:p>
+          <a:p>
+            <a:r>
+              <a:rPr lang="en-US" altLang="zh-TW" sz="1400" b="1" dirty="0"/>
+              <a:t>                    </a:t>
+            </a:r>
+            <a:r>
+              <a:rPr lang="zh-TW" altLang="en-US" sz="1400" b="1" dirty="0"/>
+              <a:t>搶購成功時</a:t>
+            </a:r>
+            <a:r>
+              <a:rPr lang="en-US" altLang="zh-TW" sz="1400" b="1" dirty="0"/>
+              <a:t>,</a:t>
+            </a:r>
+            <a:r>
+              <a:rPr lang="zh-TW" altLang="en-US" sz="1400" b="1" dirty="0"/>
+              <a:t>主動推播該團友已訂</a:t>
+            </a:r>
+            <a:r>
+              <a:rPr lang="en-US" altLang="zh-TW" sz="1400" b="1" dirty="0"/>
+              <a:t>……..</a:t>
+            </a:r>
+          </a:p>
+          <a:p>
+            <a:r>
+              <a:rPr lang="en-US" altLang="zh-TW" sz="1400" b="1" dirty="0"/>
+              <a:t>        (b) </a:t>
+            </a:r>
+            <a:r>
+              <a:rPr lang="zh-TW" altLang="en-US" sz="1400" b="1" dirty="0"/>
+              <a:t>訂單</a:t>
+            </a:r>
+            <a:r>
+              <a:rPr lang="en-US" altLang="zh-TW" sz="1400" b="1" dirty="0"/>
+              <a:t>/</a:t>
+            </a:r>
+            <a:r>
+              <a:rPr lang="zh-TW" altLang="en-US" sz="1400" b="1" dirty="0"/>
+              <a:t>查詢</a:t>
+            </a:r>
+            <a:endParaRPr lang="en-US" altLang="zh-TW" sz="1400" b="1" dirty="0"/>
+          </a:p>
+          <a:p>
+            <a:r>
+              <a:rPr lang="en-US" altLang="zh-TW" sz="1400" b="1" dirty="0"/>
+              <a:t>                 </a:t>
+            </a:r>
+            <a:r>
+              <a:rPr lang="zh-TW" altLang="en-US" sz="1400" b="1" dirty="0"/>
+              <a:t>訂單</a:t>
+            </a:r>
+            <a:r>
+              <a:rPr lang="en-US" altLang="zh-TW" sz="1400" b="1" dirty="0"/>
+              <a:t>:</a:t>
+            </a:r>
+          </a:p>
+          <a:p>
+            <a:r>
+              <a:rPr lang="zh-TW" altLang="en-US" sz="1400" b="1" dirty="0"/>
+              <a:t>                </a:t>
+            </a:r>
+            <a:r>
+              <a:rPr lang="en-US" altLang="zh-TW" sz="1400" b="1" dirty="0"/>
+              <a:t>1. </a:t>
+            </a:r>
+            <a:r>
+              <a:rPr lang="zh-TW" altLang="en-US" sz="1400" b="1" dirty="0"/>
+              <a:t>結單</a:t>
+            </a:r>
+            <a:r>
+              <a:rPr lang="en-US" altLang="zh-TW" sz="1400" b="1" dirty="0"/>
+              <a:t>: </a:t>
+            </a:r>
+            <a:r>
+              <a:rPr lang="zh-TW" altLang="en-US" sz="1400" b="1" dirty="0"/>
+              <a:t>列出目前已過結單日的商品</a:t>
+            </a:r>
+            <a:r>
+              <a:rPr lang="en-US" altLang="zh-TW" sz="1400" b="1" dirty="0"/>
+              <a:t>,</a:t>
+            </a:r>
+            <a:r>
+              <a:rPr lang="zh-TW" altLang="en-US" sz="1400" b="1" dirty="0"/>
+              <a:t>一鍵結單後</a:t>
+            </a:r>
+            <a:r>
+              <a:rPr lang="en-US" altLang="zh-TW" sz="1400" b="1" dirty="0"/>
+              <a:t>,</a:t>
+            </a:r>
+            <a:r>
+              <a:rPr lang="zh-TW" altLang="en-US" sz="1400" b="1" dirty="0"/>
+              <a:t>該商品不能再讓買家訂購</a:t>
+            </a:r>
+            <a:endParaRPr lang="en-US" altLang="zh-TW" sz="1400" b="1" dirty="0"/>
+          </a:p>
+          <a:p>
+            <a:r>
+              <a:rPr lang="en-US" altLang="zh-TW" sz="1400" b="1" dirty="0"/>
+              <a:t>                                (</a:t>
+            </a:r>
+            <a:r>
+              <a:rPr lang="zh-TW" altLang="en-US" sz="1400" b="1" dirty="0"/>
+              <a:t>通常商品結單日不等於團主要結單的日期</a:t>
+            </a:r>
+            <a:r>
+              <a:rPr lang="en-US" altLang="zh-TW" sz="1400" b="1" dirty="0"/>
+              <a:t>)</a:t>
+            </a:r>
+          </a:p>
+          <a:p>
+            <a:r>
+              <a:rPr lang="en-US" altLang="zh-TW" sz="1400" b="1" dirty="0"/>
+              <a:t>                2. </a:t>
+            </a:r>
+            <a:r>
+              <a:rPr lang="zh-TW" altLang="en-US" sz="1400" b="1" dirty="0"/>
+              <a:t>斷貨商品</a:t>
+            </a:r>
+            <a:r>
+              <a:rPr lang="en-US" altLang="zh-TW" sz="1400" b="1" dirty="0"/>
+              <a:t>:</a:t>
+            </a:r>
+            <a:r>
+              <a:rPr lang="zh-TW" altLang="en-US" sz="1400" b="1" dirty="0"/>
+              <a:t> 列出已訂未到貨商品供點選</a:t>
+            </a:r>
+            <a:r>
+              <a:rPr lang="en-US" altLang="zh-TW" sz="1400" b="1" dirty="0"/>
+              <a:t>,</a:t>
+            </a:r>
+            <a:r>
+              <a:rPr lang="zh-TW" altLang="en-US" sz="1400" b="1" dirty="0"/>
+              <a:t>點選後刪除該商品記錄</a:t>
+            </a:r>
+            <a:endParaRPr lang="en-US" altLang="zh-TW" sz="1400" b="1" dirty="0"/>
+          </a:p>
+          <a:p>
+            <a:r>
+              <a:rPr lang="en-US" altLang="zh-TW" sz="1400" b="1" dirty="0"/>
+              <a:t>                                         </a:t>
+            </a:r>
+            <a:r>
+              <a:rPr lang="zh-TW" altLang="en-US" sz="1400" b="1" dirty="0"/>
+              <a:t>主動通知該已訂商品買家</a:t>
+            </a:r>
+            <a:r>
+              <a:rPr lang="en-US" altLang="zh-TW" sz="1400" b="1" dirty="0"/>
+              <a:t>,(</a:t>
+            </a:r>
+            <a:r>
+              <a:rPr lang="zh-TW" altLang="en-US" sz="1400" b="1" dirty="0"/>
+              <a:t>此商品已斷貨</a:t>
+            </a:r>
+            <a:r>
+              <a:rPr lang="en-US" altLang="zh-TW" sz="1400" b="1" dirty="0"/>
+              <a:t>…)</a:t>
+            </a:r>
+          </a:p>
+          <a:p>
+            <a:r>
+              <a:rPr lang="en-US" altLang="zh-TW" sz="1400" b="1" dirty="0"/>
+              <a:t>                 </a:t>
+            </a:r>
+            <a:r>
+              <a:rPr lang="zh-TW" altLang="en-US" sz="1400" b="1" dirty="0"/>
+              <a:t>查詢</a:t>
+            </a:r>
+            <a:r>
+              <a:rPr lang="en-US" altLang="zh-TW" sz="1400" b="1" dirty="0"/>
+              <a:t>:</a:t>
+            </a:r>
+          </a:p>
+          <a:p>
+            <a:r>
+              <a:rPr lang="en-US" altLang="zh-TW" sz="1400" b="1" dirty="0"/>
+              <a:t>                1. </a:t>
+            </a:r>
+            <a:r>
+              <a:rPr lang="zh-TW" altLang="en-US" sz="1400" b="1" dirty="0"/>
+              <a:t>查詢買家訂購資訊</a:t>
+            </a:r>
+            <a:r>
+              <a:rPr lang="en-US" altLang="zh-TW" sz="1400" b="1" dirty="0"/>
+              <a:t>(</a:t>
+            </a:r>
+            <a:r>
+              <a:rPr lang="zh-TW" altLang="en-US" sz="1400" b="1" dirty="0"/>
+              <a:t>可依人名</a:t>
+            </a:r>
+            <a:r>
+              <a:rPr lang="en-US" altLang="zh-TW" sz="1400" b="1" dirty="0"/>
+              <a:t>,</a:t>
+            </a:r>
+            <a:r>
+              <a:rPr lang="zh-TW" altLang="en-US" sz="1400" b="1" dirty="0"/>
+              <a:t>商品</a:t>
+            </a:r>
+            <a:r>
+              <a:rPr lang="en-US" altLang="zh-TW" sz="1400" b="1" dirty="0"/>
+              <a:t>,</a:t>
+            </a:r>
+            <a:r>
+              <a:rPr lang="zh-TW" altLang="en-US" sz="1400" b="1" dirty="0"/>
+              <a:t>查詢</a:t>
+            </a:r>
+            <a:r>
+              <a:rPr lang="en-US" altLang="zh-TW" sz="1400" b="1" dirty="0"/>
+              <a:t>)</a:t>
+            </a:r>
+          </a:p>
+          <a:p>
+            <a:r>
+              <a:rPr lang="en-US" altLang="zh-TW" sz="1400" b="1" dirty="0"/>
+              <a:t>                2. </a:t>
+            </a:r>
+            <a:r>
+              <a:rPr lang="zh-TW" altLang="en-US" sz="1400" b="1" dirty="0"/>
+              <a:t>查詢已訂未到貨資訊</a:t>
+            </a:r>
+            <a:endParaRPr lang="en-US" altLang="zh-TW" sz="1400" b="1" dirty="0"/>
+          </a:p>
+          <a:p>
+            <a:r>
+              <a:rPr lang="en-US" altLang="zh-TW" sz="1400" b="1" dirty="0"/>
+              <a:t>                3. </a:t>
+            </a:r>
+            <a:r>
+              <a:rPr lang="zh-TW" altLang="en-US" sz="1400" b="1" dirty="0"/>
+              <a:t>修改上架商品及未結單商品</a:t>
+            </a:r>
+            <a:endParaRPr lang="en-US" altLang="zh-TW" sz="1400" b="1" dirty="0"/>
+          </a:p>
+          <a:p>
+            <a:r>
+              <a:rPr lang="en-US" altLang="zh-TW" sz="1400" b="1" dirty="0"/>
+              <a:t>           (c) </a:t>
+            </a:r>
+            <a:r>
+              <a:rPr lang="zh-TW" altLang="en-US" sz="1400" b="1" dirty="0"/>
+              <a:t>到貨點貨</a:t>
+            </a:r>
+            <a:endParaRPr lang="en-US" altLang="zh-TW" sz="1400" b="1" dirty="0"/>
+          </a:p>
+          <a:p>
+            <a:r>
+              <a:rPr lang="en-US" altLang="zh-TW" sz="1400" b="1" dirty="0"/>
+              <a:t>              1.</a:t>
+            </a:r>
+            <a:r>
+              <a:rPr lang="zh-TW" altLang="en-US" sz="1400" b="1" dirty="0"/>
+              <a:t>列出已訂未到貨商品供點選</a:t>
+            </a:r>
+            <a:r>
+              <a:rPr lang="en-US" altLang="zh-TW" sz="1400" b="1" dirty="0"/>
+              <a:t>(</a:t>
+            </a:r>
+            <a:r>
+              <a:rPr lang="zh-TW" altLang="en-US" sz="1400" b="1" dirty="0"/>
+              <a:t>含數量</a:t>
+            </a:r>
+            <a:r>
+              <a:rPr lang="en-US" altLang="zh-TW" sz="1400" b="1" dirty="0"/>
+              <a:t>,</a:t>
+            </a:r>
+            <a:r>
+              <a:rPr lang="zh-TW" altLang="en-US" sz="1400" b="1" dirty="0"/>
+              <a:t>尺寸顏色資訊</a:t>
+            </a:r>
+            <a:r>
+              <a:rPr lang="en-US" altLang="zh-TW" sz="1400" b="1" dirty="0"/>
+              <a:t>),</a:t>
+            </a:r>
+            <a:r>
+              <a:rPr lang="zh-TW" altLang="zh-TW" sz="1400" b="1" kern="100" dirty="0">
+                <a:effectLst/>
+                <a:latin typeface="Calibri" panose="020F0502020204030204" pitchFamily="34" charset="0"/>
+                <a:ea typeface="新細明體" panose="02020500000000000000" pitchFamily="18" charset="-120"/>
+                <a:cs typeface="Times New Roman" panose="02020603050405020304" pitchFamily="18" charset="0"/>
+              </a:rPr>
+              <a:t>可逐項勾選完成</a:t>
+            </a:r>
+            <a:endParaRPr lang="zh-TW" altLang="zh-TW" sz="1400" kern="100" dirty="0">
+              <a:effectLst/>
+              <a:latin typeface="Calibri" panose="020F0502020204030204" pitchFamily="34" charset="0"/>
+              <a:ea typeface="新細明體" panose="02020500000000000000" pitchFamily="18" charset="-120"/>
+              <a:cs typeface="Times New Roman" panose="02020603050405020304" pitchFamily="18" charset="0"/>
+            </a:endParaRPr>
+          </a:p>
+          <a:p>
+            <a:r>
+              <a:rPr lang="en-US" altLang="zh-TW" sz="1400" b="1" dirty="0"/>
+              <a:t>              2.</a:t>
+            </a:r>
+            <a:r>
+              <a:rPr lang="zh-TW" altLang="en-US" sz="1400" b="1" dirty="0"/>
+              <a:t>完成到貨商品清點後一鍵清除</a:t>
+            </a:r>
+            <a:r>
+              <a:rPr lang="en-US" altLang="zh-TW" sz="1400" b="1" dirty="0"/>
+              <a:t>(</a:t>
+            </a:r>
+            <a:r>
+              <a:rPr lang="zh-TW" altLang="en-US" sz="1400" b="1" dirty="0"/>
+              <a:t>不再顯示在商品清單</a:t>
+            </a:r>
+            <a:r>
+              <a:rPr lang="en-US" altLang="zh-TW" sz="1400" b="1" dirty="0"/>
+              <a:t>)</a:t>
+            </a:r>
+          </a:p>
+          <a:p>
+            <a:r>
+              <a:rPr lang="en-US" altLang="zh-TW" sz="1400" b="1" dirty="0"/>
+              <a:t>           (d) </a:t>
+            </a:r>
+            <a:r>
+              <a:rPr lang="zh-TW" altLang="en-US" sz="1400" b="1" dirty="0"/>
+              <a:t>發貨</a:t>
+            </a:r>
+            <a:r>
+              <a:rPr lang="en-US" altLang="zh-TW" sz="1400" b="1" dirty="0"/>
+              <a:t> (</a:t>
+            </a:r>
+            <a:r>
+              <a:rPr lang="zh-TW" altLang="en-US" sz="1400" b="1" dirty="0"/>
+              <a:t>列印想要的</a:t>
+            </a:r>
+            <a:r>
+              <a:rPr lang="en-US" altLang="zh-TW" sz="1400" b="1" dirty="0"/>
+              <a:t>PDF</a:t>
+            </a:r>
+            <a:r>
+              <a:rPr lang="zh-TW" altLang="en-US" sz="1400" b="1" dirty="0"/>
+              <a:t>小紙張</a:t>
+            </a:r>
+            <a:r>
+              <a:rPr lang="en-US" altLang="zh-TW" sz="1400" b="1" dirty="0"/>
+              <a:t>)</a:t>
+            </a:r>
+          </a:p>
+          <a:p>
+            <a:r>
+              <a:rPr lang="en-US" altLang="zh-TW" sz="1400" b="1" dirty="0"/>
+              <a:t>              </a:t>
+            </a:r>
+            <a:r>
+              <a:rPr lang="zh-TW" altLang="en-US" sz="1400" b="1" dirty="0"/>
+              <a:t> </a:t>
+            </a:r>
+            <a:r>
+              <a:rPr lang="en-US" altLang="zh-TW" sz="1400" b="1" dirty="0"/>
+              <a:t>1. </a:t>
+            </a:r>
+            <a:r>
+              <a:rPr lang="zh-TW" altLang="en-US" sz="1400" b="1" dirty="0"/>
+              <a:t>勾選要發貨的訂單</a:t>
+            </a:r>
+            <a:endParaRPr lang="en-US" altLang="zh-TW" sz="1400" b="1" dirty="0"/>
+          </a:p>
+          <a:p>
+            <a:r>
+              <a:rPr lang="en-US" altLang="zh-TW" sz="1400" b="1" dirty="0">
+                <a:sym typeface="Wingdings" panose="05000000000000000000" pitchFamily="2" charset="2"/>
+              </a:rPr>
+              <a:t>               2. </a:t>
+            </a:r>
+            <a:r>
+              <a:rPr lang="zh-TW" altLang="en-US" sz="1400" b="1" dirty="0">
+                <a:sym typeface="Wingdings" panose="05000000000000000000" pitchFamily="2" charset="2"/>
+              </a:rPr>
+              <a:t>每個買家一小張 </a:t>
+            </a:r>
+            <a:r>
+              <a:rPr lang="en-US" altLang="zh-TW" sz="1400" b="1" dirty="0">
+                <a:sym typeface="Wingdings" panose="05000000000000000000" pitchFamily="2" charset="2"/>
+              </a:rPr>
+              <a:t>,</a:t>
+            </a:r>
+            <a:r>
+              <a:rPr lang="zh-TW" altLang="en-US" sz="1400" b="1" dirty="0">
+                <a:sym typeface="Wingdings" panose="05000000000000000000" pitchFamily="2" charset="2"/>
+              </a:rPr>
+              <a:t>內容</a:t>
+            </a:r>
+            <a:r>
+              <a:rPr lang="en-US" altLang="zh-TW" sz="1400" b="1" dirty="0">
+                <a:sym typeface="Wingdings" panose="05000000000000000000" pitchFamily="2" charset="2"/>
+              </a:rPr>
+              <a:t>:</a:t>
+            </a:r>
+            <a:r>
+              <a:rPr lang="zh-TW" altLang="en-US" sz="1400" b="1" dirty="0">
+                <a:sym typeface="Wingdings" panose="05000000000000000000" pitchFamily="2" charset="2"/>
+              </a:rPr>
+              <a:t>商品</a:t>
+            </a:r>
+            <a:r>
+              <a:rPr lang="en-US" altLang="zh-TW" sz="1400" b="1" dirty="0">
+                <a:sym typeface="Wingdings" panose="05000000000000000000" pitchFamily="2" charset="2"/>
+              </a:rPr>
+              <a:t>/</a:t>
+            </a:r>
+            <a:r>
+              <a:rPr lang="zh-TW" altLang="en-US" sz="1400" b="1" dirty="0">
+                <a:sym typeface="Wingdings" panose="05000000000000000000" pitchFamily="2" charset="2"/>
+              </a:rPr>
+              <a:t>規格</a:t>
+            </a:r>
+            <a:r>
+              <a:rPr lang="en-US" altLang="zh-TW" sz="1400" b="1" dirty="0">
+                <a:sym typeface="Wingdings" panose="05000000000000000000" pitchFamily="2" charset="2"/>
+              </a:rPr>
+              <a:t>/</a:t>
+            </a:r>
+            <a:r>
+              <a:rPr lang="zh-TW" altLang="en-US" sz="1400" b="1" dirty="0">
+                <a:sym typeface="Wingdings" panose="05000000000000000000" pitchFamily="2" charset="2"/>
+              </a:rPr>
+              <a:t>數量</a:t>
+            </a:r>
+            <a:r>
+              <a:rPr lang="en-US" altLang="zh-TW" sz="1400" b="1" dirty="0">
+                <a:sym typeface="Wingdings" panose="05000000000000000000" pitchFamily="2" charset="2"/>
+              </a:rPr>
+              <a:t>/</a:t>
+            </a:r>
+            <a:r>
+              <a:rPr lang="zh-TW" altLang="en-US" sz="1400" b="1" dirty="0">
+                <a:sym typeface="Wingdings" panose="05000000000000000000" pitchFamily="2" charset="2"/>
+              </a:rPr>
+              <a:t>價格小計</a:t>
+            </a:r>
+            <a:r>
+              <a:rPr lang="en-US" altLang="zh-TW" sz="1400" b="1" dirty="0">
+                <a:sym typeface="Wingdings" panose="05000000000000000000" pitchFamily="2" charset="2"/>
+              </a:rPr>
+              <a:t>(</a:t>
+            </a:r>
+            <a:r>
+              <a:rPr lang="zh-TW" altLang="en-US" sz="1400" b="1" dirty="0">
+                <a:sym typeface="Wingdings" panose="05000000000000000000" pitchFamily="2" charset="2"/>
+              </a:rPr>
+              <a:t>超過</a:t>
+            </a:r>
+            <a:r>
+              <a:rPr lang="en-US" altLang="zh-TW" sz="1400" b="1" dirty="0">
+                <a:sym typeface="Wingdings" panose="05000000000000000000" pitchFamily="2" charset="2"/>
+              </a:rPr>
+              <a:t>2</a:t>
+            </a:r>
+            <a:r>
+              <a:rPr lang="zh-TW" altLang="en-US" sz="1400" b="1" dirty="0">
+                <a:sym typeface="Wingdings" panose="05000000000000000000" pitchFamily="2" charset="2"/>
+              </a:rPr>
+              <a:t>張時</a:t>
+            </a:r>
+            <a:r>
+              <a:rPr lang="en-US" altLang="zh-TW" sz="1400" b="1" dirty="0">
+                <a:sym typeface="Wingdings" panose="05000000000000000000" pitchFamily="2" charset="2"/>
+              </a:rPr>
+              <a:t>)</a:t>
+            </a:r>
+            <a:r>
+              <a:rPr lang="zh-TW" altLang="en-US" sz="1400" b="1" dirty="0">
+                <a:sym typeface="Wingdings" panose="05000000000000000000" pitchFamily="2" charset="2"/>
+              </a:rPr>
+              <a:t>或總計</a:t>
+            </a:r>
+            <a:endParaRPr lang="en-US" altLang="zh-TW" sz="1400" b="1" dirty="0">
+              <a:sym typeface="Wingdings" panose="05000000000000000000" pitchFamily="2" charset="2"/>
+            </a:endParaRPr>
+          </a:p>
+          <a:p>
+            <a:r>
+              <a:rPr lang="en-US" altLang="zh-TW" sz="1400" b="1" dirty="0">
+                <a:sym typeface="Wingdings" panose="05000000000000000000" pitchFamily="2" charset="2"/>
+              </a:rPr>
+              <a:t>         (e) </a:t>
+            </a:r>
+            <a:r>
+              <a:rPr lang="zh-TW" altLang="en-US" sz="1400" b="1" dirty="0">
+                <a:sym typeface="Wingdings" panose="05000000000000000000" pitchFamily="2" charset="2"/>
+              </a:rPr>
+              <a:t>廠商管理</a:t>
+            </a:r>
+            <a:endParaRPr lang="en-US" altLang="zh-TW" sz="1400" b="1" dirty="0">
+              <a:sym typeface="Wingdings" panose="05000000000000000000" pitchFamily="2" charset="2"/>
+            </a:endParaRPr>
+          </a:p>
+          <a:p>
+            <a:r>
+              <a:rPr lang="en-US" altLang="zh-TW" sz="1400" b="1" dirty="0">
+                <a:sym typeface="Wingdings" panose="05000000000000000000" pitchFamily="2" charset="2"/>
+              </a:rPr>
+              <a:t>              1.</a:t>
+            </a:r>
+            <a:r>
+              <a:rPr lang="zh-TW" altLang="en-US" sz="1400" b="1" dirty="0">
+                <a:sym typeface="Wingdings" panose="05000000000000000000" pitchFamily="2" charset="2"/>
+              </a:rPr>
+              <a:t>輸入上架商品成本及實際訂購數量</a:t>
+            </a:r>
+            <a:endParaRPr lang="en-US" altLang="zh-TW" sz="1400" b="1" dirty="0">
+              <a:sym typeface="Wingdings" panose="05000000000000000000" pitchFamily="2" charset="2"/>
+            </a:endParaRPr>
+          </a:p>
+          <a:p>
+            <a:r>
+              <a:rPr lang="en-US" altLang="zh-TW" sz="1400" b="1" dirty="0">
+                <a:sym typeface="Wingdings" panose="05000000000000000000" pitchFamily="2" charset="2"/>
+              </a:rPr>
+              <a:t>              2.</a:t>
+            </a:r>
+            <a:r>
+              <a:rPr lang="zh-TW" altLang="en-US" sz="1400" b="1" dirty="0">
+                <a:sym typeface="Wingdings" panose="05000000000000000000" pitchFamily="2" charset="2"/>
+              </a:rPr>
+              <a:t>查詢已訂未到貨商品列表</a:t>
+            </a:r>
+            <a:endParaRPr lang="en-US" altLang="zh-TW" sz="1400" b="1" dirty="0">
+              <a:sym typeface="Wingdings" panose="05000000000000000000" pitchFamily="2" charset="2"/>
+            </a:endParaRPr>
+          </a:p>
+          <a:p>
+            <a:r>
+              <a:rPr lang="zh-TW" altLang="en-US" sz="1400" b="1" dirty="0">
+                <a:sym typeface="Wingdings" panose="05000000000000000000" pitchFamily="2" charset="2"/>
+              </a:rPr>
+              <a:t>              </a:t>
+            </a:r>
+            <a:r>
+              <a:rPr lang="en-US" altLang="zh-TW" sz="1400" b="1" dirty="0">
+                <a:sym typeface="Wingdings" panose="05000000000000000000" pitchFamily="2" charset="2"/>
+              </a:rPr>
+              <a:t>3. </a:t>
+            </a:r>
+            <a:r>
+              <a:rPr lang="zh-TW" altLang="en-US" sz="1400" b="1" dirty="0">
+                <a:sym typeface="Wingdings" panose="05000000000000000000" pitchFamily="2" charset="2"/>
+              </a:rPr>
+              <a:t>列出</a:t>
+            </a:r>
+            <a:r>
+              <a:rPr lang="en-US" altLang="zh-TW" sz="1400" b="1" dirty="0">
+                <a:sym typeface="Wingdings" panose="05000000000000000000" pitchFamily="2" charset="2"/>
+              </a:rPr>
+              <a:t>PDF </a:t>
+            </a:r>
+            <a:r>
+              <a:rPr lang="zh-TW" altLang="en-US" sz="1400" b="1" dirty="0">
+                <a:sym typeface="Wingdings" panose="05000000000000000000" pitchFamily="2" charset="2"/>
+              </a:rPr>
+              <a:t>已結單商品</a:t>
+            </a:r>
+            <a:r>
+              <a:rPr lang="en-US" altLang="zh-TW" sz="1400" b="1" dirty="0">
+                <a:sym typeface="Wingdings" panose="05000000000000000000" pitchFamily="2" charset="2"/>
+              </a:rPr>
+              <a:t>(</a:t>
+            </a:r>
+            <a:r>
+              <a:rPr lang="zh-TW" altLang="en-US" sz="1400" b="1" dirty="0">
+                <a:sym typeface="Wingdings" panose="05000000000000000000" pitchFamily="2" charset="2"/>
+              </a:rPr>
+              <a:t>價錢</a:t>
+            </a:r>
+            <a:r>
+              <a:rPr lang="en-US" altLang="zh-TW" sz="1400" b="1" dirty="0">
+                <a:sym typeface="Wingdings" panose="05000000000000000000" pitchFamily="2" charset="2"/>
+              </a:rPr>
+              <a:t>,</a:t>
+            </a:r>
+            <a:r>
+              <a:rPr lang="zh-TW" altLang="en-US" sz="1400" b="1" dirty="0">
+                <a:sym typeface="Wingdings" panose="05000000000000000000" pitchFamily="2" charset="2"/>
+              </a:rPr>
+              <a:t>總數量</a:t>
+            </a:r>
+            <a:r>
+              <a:rPr lang="en-US" altLang="zh-TW" sz="1400" b="1" dirty="0">
+                <a:sym typeface="Wingdings" panose="05000000000000000000" pitchFamily="2" charset="2"/>
+              </a:rPr>
+              <a:t>) </a:t>
+            </a:r>
+            <a:r>
+              <a:rPr lang="zh-TW" altLang="en-US" sz="1400" b="1" dirty="0">
+                <a:sym typeface="Wingdings" panose="05000000000000000000" pitchFamily="2" charset="2"/>
+              </a:rPr>
+              <a:t>要依此商品列表向廠商訂貨</a:t>
+            </a:r>
+            <a:endParaRPr lang="en-US" altLang="zh-TW" sz="1400" b="1" dirty="0">
+              <a:sym typeface="Wingdings" panose="05000000000000000000" pitchFamily="2" charset="2"/>
+            </a:endParaRPr>
+          </a:p>
+          <a:p>
+            <a:r>
+              <a:rPr lang="en-US" altLang="zh-TW" sz="1400" b="1" dirty="0">
+                <a:sym typeface="Wingdings" panose="05000000000000000000" pitchFamily="2" charset="2"/>
+              </a:rPr>
+              <a:t>              4.</a:t>
+            </a:r>
+            <a:r>
+              <a:rPr lang="zh-TW" altLang="en-US" sz="1400" b="1" dirty="0">
+                <a:sym typeface="Wingdings" panose="05000000000000000000" pitchFamily="2" charset="2"/>
+              </a:rPr>
+              <a:t>查詢已斷貨商品列表</a:t>
+            </a:r>
+            <a:r>
+              <a:rPr lang="en-US" altLang="zh-TW" sz="1400" b="1" dirty="0">
+                <a:sym typeface="Wingdings" panose="05000000000000000000" pitchFamily="2" charset="2"/>
+              </a:rPr>
+              <a:t>(</a:t>
+            </a:r>
+            <a:r>
+              <a:rPr lang="zh-TW" altLang="en-US" sz="1400" b="1" dirty="0">
+                <a:sym typeface="Wingdings" panose="05000000000000000000" pitchFamily="2" charset="2"/>
+              </a:rPr>
+              <a:t>向廠商結款斷貨商品</a:t>
+            </a:r>
+            <a:r>
+              <a:rPr lang="en-US" altLang="zh-TW" sz="1400" b="1" dirty="0">
+                <a:sym typeface="Wingdings" panose="05000000000000000000" pitchFamily="2" charset="2"/>
+              </a:rPr>
+              <a:t>)</a:t>
+            </a:r>
+          </a:p>
+          <a:p>
+            <a:r>
+              <a:rPr lang="en-US" altLang="zh-TW" sz="1400" b="1" dirty="0">
+                <a:sym typeface="Wingdings" panose="05000000000000000000" pitchFamily="2" charset="2"/>
+              </a:rPr>
+              <a:t>              5.</a:t>
+            </a:r>
+            <a:r>
+              <a:rPr lang="zh-TW" altLang="en-US" sz="1400" b="1" dirty="0">
+                <a:sym typeface="Wingdings" panose="05000000000000000000" pitchFamily="2" charset="2"/>
+              </a:rPr>
+              <a:t>點選已結清斷貨商品</a:t>
+            </a:r>
+            <a:r>
+              <a:rPr lang="en-US" altLang="zh-TW" sz="1400" b="1" dirty="0">
+                <a:sym typeface="Wingdings" panose="05000000000000000000" pitchFamily="2" charset="2"/>
+              </a:rPr>
+              <a:t>,</a:t>
+            </a:r>
+            <a:r>
+              <a:rPr lang="zh-TW" altLang="en-US" sz="1400" b="1" dirty="0">
+                <a:sym typeface="Wingdings" panose="05000000000000000000" pitchFamily="2" charset="2"/>
+              </a:rPr>
+              <a:t>結清後不再列進斷貨商品列表</a:t>
+            </a:r>
+            <a:r>
+              <a:rPr lang="en-US" altLang="zh-TW" sz="1400" b="1" dirty="0">
+                <a:sym typeface="Wingdings" panose="05000000000000000000" pitchFamily="2" charset="2"/>
+              </a:rPr>
+              <a:t>(</a:t>
+            </a:r>
+            <a:r>
+              <a:rPr lang="zh-TW" altLang="en-US" sz="1400" b="1" dirty="0">
+                <a:sym typeface="Wingdings" panose="05000000000000000000" pitchFamily="2" charset="2"/>
+              </a:rPr>
+              <a:t>隱藏</a:t>
+            </a:r>
+            <a:r>
+              <a:rPr lang="en-US" altLang="zh-TW" sz="1400" b="1" dirty="0">
+                <a:sym typeface="Wingdings" panose="05000000000000000000" pitchFamily="2" charset="2"/>
+              </a:rPr>
+              <a:t>)</a:t>
+            </a:r>
+            <a:endParaRPr lang="zh-TW" altLang="en-US" sz="1400" b="1" dirty="0"/>
           </a:p>
         </p:txBody>
       </p:sp>
-      <p:cxnSp>
-        <p:nvCxnSpPr>
-          <p:cNvPr id="28" name="肘形接點 27"/>
-          <p:cNvCxnSpPr/>
-          <p:nvPr/>
-        </p:nvCxnSpPr>
-        <p:spPr>
-          <a:xfrm>
-            <a:off x="1299180" y="4488578"/>
-            <a:ext cx="2176449" cy="1248920"/>
-          </a:xfrm>
-          <a:prstGeom prst="bentConnector3">
-            <a:avLst>
-              <a:gd name="adj1" fmla="val 31994"/>
-            </a:avLst>
-          </a:prstGeom>
-          <a:ln>
-            <a:solidFill>
-              <a:srgbClr val="FF0000"/>
-            </a:solidFill>
-            <a:headEnd type="none" w="med" len="med"/>
-            <a:tailEnd type="triangle" w="med" len="med"/>
-          </a:ln>
-        </p:spPr>
-        <p:style>
-          <a:lnRef idx="1">
-            <a:schemeClr val="accent1"/>
-          </a:lnRef>
-          <a:fillRef idx="0">
-            <a:schemeClr val="accent1"/>
-          </a:fillRef>
-          <a:effectRef idx="0">
-            <a:schemeClr val="accent1"/>
-          </a:effectRef>
-          <a:fontRef idx="minor">
-            <a:schemeClr val="tx1"/>
-          </a:fontRef>
-        </p:style>
-      </p:cxnSp>
-      <p:cxnSp>
-        <p:nvCxnSpPr>
-          <p:cNvPr id="34" name="直線單箭頭接點 33"/>
-          <p:cNvCxnSpPr/>
-          <p:nvPr/>
-        </p:nvCxnSpPr>
-        <p:spPr>
-          <a:xfrm>
-            <a:off x="782706" y="2586585"/>
-            <a:ext cx="0" cy="246511"/>
-          </a:xfrm>
-          <a:prstGeom prst="straightConnector1">
-            <a:avLst/>
-          </a:prstGeom>
-          <a:ln>
-            <a:solidFill>
-              <a:srgbClr val="FF0000"/>
-            </a:solidFill>
-            <a:tailEnd type="triangle"/>
-          </a:ln>
-        </p:spPr>
-        <p:style>
-          <a:lnRef idx="1">
-            <a:schemeClr val="accent1"/>
-          </a:lnRef>
-          <a:fillRef idx="0">
-            <a:schemeClr val="accent1"/>
-          </a:fillRef>
-          <a:effectRef idx="0">
-            <a:schemeClr val="accent1"/>
-          </a:effectRef>
-          <a:fontRef idx="minor">
-            <a:schemeClr val="tx1"/>
-          </a:fontRef>
-        </p:style>
-      </p:cxnSp>
-      <p:cxnSp>
-        <p:nvCxnSpPr>
-          <p:cNvPr id="20" name="直線單箭頭接點 19"/>
-          <p:cNvCxnSpPr/>
-          <p:nvPr/>
-        </p:nvCxnSpPr>
-        <p:spPr>
-          <a:xfrm>
-            <a:off x="1163278" y="4193958"/>
-            <a:ext cx="936363" cy="0"/>
-          </a:xfrm>
-          <a:prstGeom prst="straightConnector1">
-            <a:avLst/>
-          </a:prstGeom>
-          <a:ln>
-            <a:solidFill>
-              <a:srgbClr val="FF0000"/>
-            </a:solidFill>
-            <a:tailEnd type="triangle"/>
-          </a:ln>
-        </p:spPr>
-        <p:style>
-          <a:lnRef idx="1">
-            <a:schemeClr val="accent1"/>
-          </a:lnRef>
-          <a:fillRef idx="0">
-            <a:schemeClr val="accent1"/>
-          </a:fillRef>
-          <a:effectRef idx="0">
-            <a:schemeClr val="accent1"/>
-          </a:effectRef>
-          <a:fontRef idx="minor">
-            <a:schemeClr val="tx1"/>
-          </a:fontRef>
-        </p:style>
-      </p:cxnSp>
-      <p:pic>
-        <p:nvPicPr>
-          <p:cNvPr id="3" name="圖片 2"/>
-          <p:cNvPicPr>
-            <a:picLocks noChangeAspect="1"/>
-          </p:cNvPicPr>
-          <p:nvPr/>
-        </p:nvPicPr>
-        <p:blipFill>
-          <a:blip r:embed="rId4">
-            <a:extLst>
-              <a:ext uri="{28A0092B-C50C-407E-A947-70E740481C1C}">
-                <a14:useLocalDpi xmlns:a14="http://schemas.microsoft.com/office/drawing/2010/main" val="0"/>
-              </a:ext>
-            </a:extLst>
-          </a:blip>
-          <a:stretch>
-            <a:fillRect/>
-          </a:stretch>
-        </p:blipFill>
-        <p:spPr>
-          <a:xfrm>
-            <a:off x="1994895" y="2145332"/>
-            <a:ext cx="939795" cy="662802"/>
-          </a:xfrm>
-          <a:prstGeom prst="rect">
-            <a:avLst/>
-          </a:prstGeom>
-        </p:spPr>
-      </p:pic>
-      <p:pic>
-        <p:nvPicPr>
-          <p:cNvPr id="21" name="圖片 20"/>
-          <p:cNvPicPr>
-            <a:picLocks noChangeAspect="1"/>
-          </p:cNvPicPr>
-          <p:nvPr/>
-        </p:nvPicPr>
-        <p:blipFill>
-          <a:blip r:embed="rId5">
-            <a:extLst>
-              <a:ext uri="{28A0092B-C50C-407E-A947-70E740481C1C}">
-                <a14:useLocalDpi xmlns:a14="http://schemas.microsoft.com/office/drawing/2010/main" val="0"/>
-              </a:ext>
-            </a:extLst>
-          </a:blip>
-          <a:stretch>
-            <a:fillRect/>
-          </a:stretch>
-        </p:blipFill>
-        <p:spPr>
-          <a:xfrm>
-            <a:off x="1958218" y="2910300"/>
-            <a:ext cx="1082706" cy="659466"/>
-          </a:xfrm>
-          <a:prstGeom prst="rect">
-            <a:avLst/>
-          </a:prstGeom>
-        </p:spPr>
-      </p:pic>
-      <p:cxnSp>
-        <p:nvCxnSpPr>
-          <p:cNvPr id="26" name="肘形接點 25"/>
-          <p:cNvCxnSpPr/>
-          <p:nvPr/>
-        </p:nvCxnSpPr>
-        <p:spPr>
-          <a:xfrm flipV="1">
-            <a:off x="1958218" y="2586584"/>
-            <a:ext cx="3093856" cy="1276614"/>
-          </a:xfrm>
-          <a:prstGeom prst="bentConnector3">
-            <a:avLst>
-              <a:gd name="adj1" fmla="val 36806"/>
-            </a:avLst>
-          </a:prstGeom>
-          <a:ln>
-            <a:solidFill>
-              <a:srgbClr val="FF0000"/>
-            </a:solidFill>
-            <a:tailEnd type="triangle"/>
-          </a:ln>
-        </p:spPr>
-        <p:style>
-          <a:lnRef idx="1">
-            <a:schemeClr val="accent1"/>
-          </a:lnRef>
-          <a:fillRef idx="0">
-            <a:schemeClr val="accent1"/>
-          </a:fillRef>
-          <a:effectRef idx="0">
-            <a:schemeClr val="accent1"/>
-          </a:effectRef>
-          <a:fontRef idx="minor">
-            <a:schemeClr val="tx1"/>
-          </a:fontRef>
-        </p:style>
-      </p:cxnSp>
-      <p:cxnSp>
-        <p:nvCxnSpPr>
-          <p:cNvPr id="41" name="肘形接點 40"/>
-          <p:cNvCxnSpPr/>
-          <p:nvPr/>
-        </p:nvCxnSpPr>
-        <p:spPr>
-          <a:xfrm>
-            <a:off x="944724" y="4818151"/>
-            <a:ext cx="1269551" cy="1202541"/>
-          </a:xfrm>
-          <a:prstGeom prst="bentConnector3">
-            <a:avLst>
-              <a:gd name="adj1" fmla="val 63505"/>
-            </a:avLst>
-          </a:prstGeom>
-          <a:ln>
-            <a:solidFill>
-              <a:srgbClr val="FF0000"/>
-            </a:solidFill>
-            <a:tailEnd type="triangle"/>
-          </a:ln>
-        </p:spPr>
-        <p:style>
-          <a:lnRef idx="1">
-            <a:schemeClr val="accent1"/>
-          </a:lnRef>
-          <a:fillRef idx="0">
-            <a:schemeClr val="accent1"/>
-          </a:fillRef>
-          <a:effectRef idx="0">
-            <a:schemeClr val="accent1"/>
-          </a:effectRef>
-          <a:fontRef idx="minor">
-            <a:schemeClr val="tx1"/>
-          </a:fontRef>
-        </p:style>
-      </p:cxnSp>
-      <p:pic>
-        <p:nvPicPr>
-          <p:cNvPr id="33" name="圖片 32"/>
-          <p:cNvPicPr>
-            <a:picLocks noChangeAspect="1"/>
-          </p:cNvPicPr>
-          <p:nvPr/>
-        </p:nvPicPr>
-        <p:blipFill>
-          <a:blip r:embed="rId6">
-            <a:extLst>
-              <a:ext uri="{28A0092B-C50C-407E-A947-70E740481C1C}">
-                <a14:useLocalDpi xmlns:a14="http://schemas.microsoft.com/office/drawing/2010/main" val="0"/>
-              </a:ext>
-            </a:extLst>
-          </a:blip>
-          <a:stretch>
-            <a:fillRect/>
-          </a:stretch>
-        </p:blipFill>
-        <p:spPr>
-          <a:xfrm>
-            <a:off x="267864" y="6441702"/>
-            <a:ext cx="1455508" cy="308744"/>
-          </a:xfrm>
-          <a:prstGeom prst="rect">
-            <a:avLst/>
-          </a:prstGeom>
-        </p:spPr>
-      </p:pic>
-      <p:cxnSp>
-        <p:nvCxnSpPr>
-          <p:cNvPr id="37" name="直線單箭頭接點 36"/>
-          <p:cNvCxnSpPr/>
-          <p:nvPr/>
-        </p:nvCxnSpPr>
-        <p:spPr>
-          <a:xfrm>
-            <a:off x="1667593" y="6620810"/>
-            <a:ext cx="432048" cy="0"/>
-          </a:xfrm>
-          <a:prstGeom prst="straightConnector1">
-            <a:avLst/>
-          </a:prstGeom>
-          <a:ln>
-            <a:solidFill>
-              <a:srgbClr val="FF0000"/>
-            </a:solidFill>
-            <a:tailEnd type="triangle"/>
-          </a:ln>
-        </p:spPr>
-        <p:style>
-          <a:lnRef idx="1">
-            <a:schemeClr val="accent1"/>
-          </a:lnRef>
-          <a:fillRef idx="0">
-            <a:schemeClr val="accent1"/>
-          </a:fillRef>
-          <a:effectRef idx="0">
-            <a:schemeClr val="accent1"/>
-          </a:effectRef>
-          <a:fontRef idx="minor">
-            <a:schemeClr val="tx1"/>
-          </a:fontRef>
-        </p:style>
-      </p:cxnSp>
-      <p:pic>
-        <p:nvPicPr>
-          <p:cNvPr id="35" name="圖片 34"/>
-          <p:cNvPicPr>
-            <a:picLocks noChangeAspect="1"/>
-          </p:cNvPicPr>
-          <p:nvPr/>
-        </p:nvPicPr>
-        <p:blipFill>
-          <a:blip r:embed="rId7">
-            <a:extLst>
-              <a:ext uri="{28A0092B-C50C-407E-A947-70E740481C1C}">
-                <a14:useLocalDpi xmlns:a14="http://schemas.microsoft.com/office/drawing/2010/main" val="0"/>
-              </a:ext>
-            </a:extLst>
-          </a:blip>
-          <a:stretch>
-            <a:fillRect/>
-          </a:stretch>
-        </p:blipFill>
-        <p:spPr>
-          <a:xfrm>
-            <a:off x="2140015" y="6502049"/>
-            <a:ext cx="999578" cy="237523"/>
-          </a:xfrm>
-          <a:prstGeom prst="rect">
-            <a:avLst/>
-          </a:prstGeom>
-        </p:spPr>
-      </p:pic>
-      <p:pic>
-        <p:nvPicPr>
-          <p:cNvPr id="2" name="圖片 1"/>
-          <p:cNvPicPr>
-            <a:picLocks noChangeAspect="1"/>
-          </p:cNvPicPr>
-          <p:nvPr/>
-        </p:nvPicPr>
-        <p:blipFill>
-          <a:blip r:embed="rId8">
-            <a:extLst>
-              <a:ext uri="{28A0092B-C50C-407E-A947-70E740481C1C}">
-                <a14:useLocalDpi xmlns:a14="http://schemas.microsoft.com/office/drawing/2010/main" val="0"/>
-              </a:ext>
-            </a:extLst>
-          </a:blip>
-          <a:stretch>
-            <a:fillRect/>
-          </a:stretch>
-        </p:blipFill>
-        <p:spPr>
-          <a:xfrm>
-            <a:off x="2130382" y="3932378"/>
-            <a:ext cx="1308047" cy="1572968"/>
-          </a:xfrm>
-          <a:prstGeom prst="rect">
-            <a:avLst/>
-          </a:prstGeom>
-        </p:spPr>
-      </p:pic>
-      <p:pic>
-        <p:nvPicPr>
-          <p:cNvPr id="4" name="圖片 3"/>
-          <p:cNvPicPr>
-            <a:picLocks noChangeAspect="1"/>
-          </p:cNvPicPr>
-          <p:nvPr/>
-        </p:nvPicPr>
-        <p:blipFill>
-          <a:blip r:embed="rId9">
-            <a:extLst>
-              <a:ext uri="{28A0092B-C50C-407E-A947-70E740481C1C}">
-                <a14:useLocalDpi xmlns:a14="http://schemas.microsoft.com/office/drawing/2010/main" val="0"/>
-              </a:ext>
-            </a:extLst>
-          </a:blip>
-          <a:stretch>
-            <a:fillRect/>
-          </a:stretch>
-        </p:blipFill>
-        <p:spPr>
-          <a:xfrm>
-            <a:off x="3516004" y="3019486"/>
-            <a:ext cx="1445187" cy="3767230"/>
-          </a:xfrm>
-          <a:prstGeom prst="rect">
-            <a:avLst/>
-          </a:prstGeom>
-        </p:spPr>
-      </p:pic>
-      <p:pic>
-        <p:nvPicPr>
-          <p:cNvPr id="6" name="圖片 5"/>
-          <p:cNvPicPr>
-            <a:picLocks noChangeAspect="1"/>
-          </p:cNvPicPr>
-          <p:nvPr/>
-        </p:nvPicPr>
-        <p:blipFill>
-          <a:blip r:embed="rId10">
-            <a:extLst>
-              <a:ext uri="{28A0092B-C50C-407E-A947-70E740481C1C}">
-                <a14:useLocalDpi xmlns:a14="http://schemas.microsoft.com/office/drawing/2010/main" val="0"/>
-              </a:ext>
-            </a:extLst>
-          </a:blip>
-          <a:stretch>
-            <a:fillRect/>
-          </a:stretch>
-        </p:blipFill>
-        <p:spPr>
-          <a:xfrm>
-            <a:off x="5107434" y="2145332"/>
-            <a:ext cx="1646390" cy="2828009"/>
-          </a:xfrm>
-          <a:prstGeom prst="rect">
-            <a:avLst/>
-          </a:prstGeom>
-        </p:spPr>
-      </p:pic>
     </p:spTree>
     <p:extLst>
       <p:ext uri="{BB962C8B-B14F-4D97-AF65-F5344CB8AC3E}">
-        <p14:creationId xmlns:p14="http://schemas.microsoft.com/office/powerpoint/2010/main" val="112931746"/>
+        <p14:creationId xmlns:p14="http://schemas.microsoft.com/office/powerpoint/2010/main" val="1920626739"/>
       </p:ext>
     </p:extLst>
   </p:cSld>
@@ -3767,1046 +4182,7 @@
 </p:sld>
 </file>
 
-<file path=ppt/slides/slide2.xml><?xml version="1.0" encoding="utf-8"?>
-<p:sld xmlns:a="http://schemas.openxmlformats.org/drawingml/2006/main" xmlns:r="http://schemas.openxmlformats.org/officeDocument/2006/relationships" xmlns:p="http://schemas.openxmlformats.org/presentationml/2006/main">
-  <p:cSld>
-    <p:spTree>
-      <p:nvGrpSpPr>
-        <p:cNvPr id="1" name=""/>
-        <p:cNvGrpSpPr/>
-        <p:nvPr/>
-      </p:nvGrpSpPr>
-      <p:grpSpPr>
-        <a:xfrm>
-          <a:off x="0" y="0"/>
-          <a:ext cx="0" cy="0"/>
-          <a:chOff x="0" y="0"/>
-          <a:chExt cx="0" cy="0"/>
-        </a:xfrm>
-      </p:grpSpPr>
-      <p:pic>
-        <p:nvPicPr>
-          <p:cNvPr id="2" name="圖片 1"/>
-          <p:cNvPicPr>
-            <a:picLocks noChangeAspect="1"/>
-          </p:cNvPicPr>
-          <p:nvPr/>
-        </p:nvPicPr>
-        <p:blipFill>
-          <a:blip r:embed="rId2"/>
-          <a:stretch>
-            <a:fillRect/>
-          </a:stretch>
-        </p:blipFill>
-        <p:spPr>
-          <a:xfrm>
-            <a:off x="80628" y="2000250"/>
-            <a:ext cx="3726414" cy="5143500"/>
-          </a:xfrm>
-          <a:prstGeom prst="rect">
-            <a:avLst/>
-          </a:prstGeom>
-        </p:spPr>
-      </p:pic>
-    </p:spTree>
-    <p:extLst>
-      <p:ext uri="{BB962C8B-B14F-4D97-AF65-F5344CB8AC3E}">
-        <p14:creationId xmlns:p14="http://schemas.microsoft.com/office/powerpoint/2010/main" val="3016705582"/>
-      </p:ext>
-    </p:extLst>
-  </p:cSld>
-  <p:clrMapOvr>
-    <a:masterClrMapping/>
-  </p:clrMapOvr>
-</p:sld>
-</file>
-
-<file path=ppt/slides/slide3.xml><?xml version="1.0" encoding="utf-8"?>
-<p:sld xmlns:a="http://schemas.openxmlformats.org/drawingml/2006/main" xmlns:r="http://schemas.openxmlformats.org/officeDocument/2006/relationships" xmlns:p="http://schemas.openxmlformats.org/presentationml/2006/main">
-  <p:cSld>
-    <p:spTree>
-      <p:nvGrpSpPr>
-        <p:cNvPr id="1" name=""/>
-        <p:cNvGrpSpPr/>
-        <p:nvPr/>
-      </p:nvGrpSpPr>
-      <p:grpSpPr>
-        <a:xfrm>
-          <a:off x="0" y="0"/>
-          <a:ext cx="0" cy="0"/>
-          <a:chOff x="0" y="0"/>
-          <a:chExt cx="0" cy="0"/>
-        </a:xfrm>
-      </p:grpSpPr>
-      <p:pic>
-        <p:nvPicPr>
-          <p:cNvPr id="4" name="圖片 3"/>
-          <p:cNvPicPr>
-            <a:picLocks noChangeAspect="1"/>
-          </p:cNvPicPr>
-          <p:nvPr/>
-        </p:nvPicPr>
-        <p:blipFill rotWithShape="1">
-          <a:blip r:embed="rId2">
-            <a:extLst>
-              <a:ext uri="{28A0092B-C50C-407E-A947-70E740481C1C}">
-                <a14:useLocalDpi xmlns:a14="http://schemas.microsoft.com/office/drawing/2010/main" val="0"/>
-              </a:ext>
-            </a:extLst>
-          </a:blip>
-          <a:srcRect b="32150"/>
-          <a:stretch/>
-        </p:blipFill>
-        <p:spPr>
-          <a:xfrm>
-            <a:off x="0" y="2000251"/>
-            <a:ext cx="4862304" cy="3562985"/>
-          </a:xfrm>
-          <a:prstGeom prst="rect">
-            <a:avLst/>
-          </a:prstGeom>
-        </p:spPr>
-      </p:pic>
-    </p:spTree>
-    <p:extLst>
-      <p:ext uri="{BB962C8B-B14F-4D97-AF65-F5344CB8AC3E}">
-        <p14:creationId xmlns:p14="http://schemas.microsoft.com/office/powerpoint/2010/main" val="4127836509"/>
-      </p:ext>
-    </p:extLst>
-  </p:cSld>
-  <p:clrMapOvr>
-    <a:masterClrMapping/>
-  </p:clrMapOvr>
-</p:sld>
-</file>
-
-<file path=ppt/slides/slide4.xml><?xml version="1.0" encoding="utf-8"?>
-<p:sld xmlns:a="http://schemas.openxmlformats.org/drawingml/2006/main" xmlns:r="http://schemas.openxmlformats.org/officeDocument/2006/relationships" xmlns:p="http://schemas.openxmlformats.org/presentationml/2006/main">
-  <p:cSld>
-    <p:spTree>
-      <p:nvGrpSpPr>
-        <p:cNvPr id="1" name=""/>
-        <p:cNvGrpSpPr/>
-        <p:nvPr/>
-      </p:nvGrpSpPr>
-      <p:grpSpPr>
-        <a:xfrm>
-          <a:off x="0" y="0"/>
-          <a:ext cx="0" cy="0"/>
-          <a:chOff x="0" y="0"/>
-          <a:chExt cx="0" cy="0"/>
-        </a:xfrm>
-      </p:grpSpPr>
-      <p:pic>
-        <p:nvPicPr>
-          <p:cNvPr id="4" name="圖片 3"/>
-          <p:cNvPicPr>
-            <a:picLocks noChangeAspect="1"/>
-          </p:cNvPicPr>
-          <p:nvPr/>
-        </p:nvPicPr>
-        <p:blipFill rotWithShape="1">
-          <a:blip r:embed="rId2">
-            <a:extLst>
-              <a:ext uri="{28A0092B-C50C-407E-A947-70E740481C1C}">
-                <a14:useLocalDpi xmlns:a14="http://schemas.microsoft.com/office/drawing/2010/main" val="0"/>
-              </a:ext>
-            </a:extLst>
-          </a:blip>
-          <a:srcRect b="41295"/>
-          <a:stretch/>
-        </p:blipFill>
-        <p:spPr>
-          <a:xfrm>
-            <a:off x="6412" y="1975701"/>
-            <a:ext cx="3852443" cy="1890210"/>
-          </a:xfrm>
-          <a:prstGeom prst="rect">
-            <a:avLst/>
-          </a:prstGeom>
-        </p:spPr>
-      </p:pic>
-      <p:pic>
-        <p:nvPicPr>
-          <p:cNvPr id="5" name="圖片 4"/>
-          <p:cNvPicPr>
-            <a:picLocks noChangeAspect="1"/>
-          </p:cNvPicPr>
-          <p:nvPr/>
-        </p:nvPicPr>
-        <p:blipFill>
-          <a:blip r:embed="rId3">
-            <a:extLst>
-              <a:ext uri="{28A0092B-C50C-407E-A947-70E740481C1C}">
-                <a14:useLocalDpi xmlns:a14="http://schemas.microsoft.com/office/drawing/2010/main" val="0"/>
-              </a:ext>
-            </a:extLst>
-          </a:blip>
-          <a:stretch>
-            <a:fillRect/>
-          </a:stretch>
-        </p:blipFill>
-        <p:spPr>
-          <a:xfrm>
-            <a:off x="30262" y="3865911"/>
-            <a:ext cx="3884792" cy="3246859"/>
-          </a:xfrm>
-          <a:prstGeom prst="rect">
-            <a:avLst/>
-          </a:prstGeom>
-        </p:spPr>
-      </p:pic>
-      <p:cxnSp>
-        <p:nvCxnSpPr>
-          <p:cNvPr id="7" name="肘形接點 6"/>
-          <p:cNvCxnSpPr>
-            <a:stCxn id="11" idx="2"/>
-          </p:cNvCxnSpPr>
-          <p:nvPr/>
-        </p:nvCxnSpPr>
-        <p:spPr>
-          <a:xfrm rot="5400000">
-            <a:off x="1201253" y="3235352"/>
-            <a:ext cx="756084" cy="729081"/>
-          </a:xfrm>
-          <a:prstGeom prst="bentConnector3">
-            <a:avLst>
-              <a:gd name="adj1" fmla="val 50000"/>
-            </a:avLst>
-          </a:prstGeom>
-          <a:ln w="28575">
-            <a:solidFill>
-              <a:srgbClr val="FF0000"/>
-            </a:solidFill>
-            <a:tailEnd type="triangle"/>
-          </a:ln>
-        </p:spPr>
-        <p:style>
-          <a:lnRef idx="1">
-            <a:schemeClr val="accent1"/>
-          </a:lnRef>
-          <a:fillRef idx="0">
-            <a:schemeClr val="accent1"/>
-          </a:fillRef>
-          <a:effectRef idx="0">
-            <a:schemeClr val="accent1"/>
-          </a:effectRef>
-          <a:fontRef idx="minor">
-            <a:schemeClr val="tx1"/>
-          </a:fontRef>
-        </p:style>
-      </p:cxnSp>
-      <p:sp>
-        <p:nvSpPr>
-          <p:cNvPr id="11" name="矩形 10"/>
-          <p:cNvSpPr/>
-          <p:nvPr/>
-        </p:nvSpPr>
-        <p:spPr>
-          <a:xfrm>
-            <a:off x="1106742" y="2951820"/>
-            <a:ext cx="1674186" cy="270030"/>
-          </a:xfrm>
-          <a:prstGeom prst="rect">
-            <a:avLst/>
-          </a:prstGeom>
-          <a:noFill/>
-        </p:spPr>
-        <p:style>
-          <a:lnRef idx="2">
-            <a:schemeClr val="accent1">
-              <a:shade val="50000"/>
-            </a:schemeClr>
-          </a:lnRef>
-          <a:fillRef idx="1">
-            <a:schemeClr val="accent1"/>
-          </a:fillRef>
-          <a:effectRef idx="0">
-            <a:schemeClr val="accent1"/>
-          </a:effectRef>
-          <a:fontRef idx="minor">
-            <a:schemeClr val="lt1"/>
-          </a:fontRef>
-        </p:style>
-        <p:txBody>
-          <a:bodyPr rtlCol="0" anchor="ctr"/>
-          <a:lstStyle/>
-          <a:p>
-            <a:pPr algn="ctr"/>
-            <a:endParaRPr lang="zh-TW" altLang="en-US" sz="1350"/>
-          </a:p>
-        </p:txBody>
-      </p:sp>
-    </p:spTree>
-    <p:extLst>
-      <p:ext uri="{BB962C8B-B14F-4D97-AF65-F5344CB8AC3E}">
-        <p14:creationId xmlns:p14="http://schemas.microsoft.com/office/powerpoint/2010/main" val="3275367579"/>
-      </p:ext>
-    </p:extLst>
-  </p:cSld>
-  <p:clrMapOvr>
-    <a:masterClrMapping/>
-  </p:clrMapOvr>
-</p:sld>
-</file>
-
-<file path=ppt/slides/slide5.xml><?xml version="1.0" encoding="utf-8"?>
-<p:sld xmlns:a="http://schemas.openxmlformats.org/drawingml/2006/main" xmlns:r="http://schemas.openxmlformats.org/officeDocument/2006/relationships" xmlns:p="http://schemas.openxmlformats.org/presentationml/2006/main">
-  <p:cSld>
-    <p:spTree>
-      <p:nvGrpSpPr>
-        <p:cNvPr id="1" name=""/>
-        <p:cNvGrpSpPr/>
-        <p:nvPr/>
-      </p:nvGrpSpPr>
-      <p:grpSpPr>
-        <a:xfrm>
-          <a:off x="0" y="0"/>
-          <a:ext cx="0" cy="0"/>
-          <a:chOff x="0" y="0"/>
-          <a:chExt cx="0" cy="0"/>
-        </a:xfrm>
-      </p:grpSpPr>
-      <p:pic>
-        <p:nvPicPr>
-          <p:cNvPr id="4" name="圖片 3"/>
-          <p:cNvPicPr>
-            <a:picLocks noChangeAspect="1"/>
-          </p:cNvPicPr>
-          <p:nvPr/>
-        </p:nvPicPr>
-        <p:blipFill>
-          <a:blip r:embed="rId2">
-            <a:extLst>
-              <a:ext uri="{28A0092B-C50C-407E-A947-70E740481C1C}">
-                <a14:useLocalDpi xmlns:a14="http://schemas.microsoft.com/office/drawing/2010/main" val="0"/>
-              </a:ext>
-            </a:extLst>
-          </a:blip>
-          <a:stretch>
-            <a:fillRect/>
-          </a:stretch>
-        </p:blipFill>
-        <p:spPr>
-          <a:xfrm>
-            <a:off x="188640" y="2005408"/>
-            <a:ext cx="5842857" cy="1550000"/>
-          </a:xfrm>
-          <a:prstGeom prst="rect">
-            <a:avLst/>
-          </a:prstGeom>
-        </p:spPr>
-      </p:pic>
-      <p:sp>
-        <p:nvSpPr>
-          <p:cNvPr id="5" name="文字方塊 4"/>
-          <p:cNvSpPr txBox="1"/>
-          <p:nvPr/>
-        </p:nvSpPr>
-        <p:spPr>
-          <a:xfrm>
-            <a:off x="188640" y="3653899"/>
-            <a:ext cx="5955476" cy="1131079"/>
-          </a:xfrm>
-          <a:prstGeom prst="rect">
-            <a:avLst/>
-          </a:prstGeom>
-          <a:noFill/>
-        </p:spPr>
-        <p:txBody>
-          <a:bodyPr wrap="none" rtlCol="0">
-            <a:spAutoFit/>
-          </a:bodyPr>
-          <a:lstStyle/>
-          <a:p>
-            <a:r>
-              <a:rPr lang="zh-TW" altLang="en-US" sz="1350" dirty="0"/>
-              <a:t>一般大多數版主都是從</a:t>
-            </a:r>
-            <a:r>
-              <a:rPr lang="en-US" altLang="zh-TW" sz="1350" dirty="0"/>
-              <a:t>Line </a:t>
-            </a:r>
-            <a:r>
-              <a:rPr lang="zh-TW" altLang="en-US" sz="1350" dirty="0"/>
-              <a:t>直接</a:t>
-            </a:r>
-            <a:r>
-              <a:rPr lang="en-US" altLang="zh-TW" sz="1350" dirty="0"/>
-              <a:t>PO</a:t>
-            </a:r>
-            <a:r>
-              <a:rPr lang="zh-TW" altLang="en-US" sz="1350" dirty="0"/>
-              <a:t>商品在記事本內</a:t>
-            </a:r>
-            <a:r>
-              <a:rPr lang="en-US" altLang="zh-TW" sz="1350" dirty="0"/>
-              <a:t>,</a:t>
-            </a:r>
-            <a:r>
-              <a:rPr lang="zh-TW" altLang="en-US" sz="1350" dirty="0"/>
-              <a:t>只會修改到價錢及結單日</a:t>
-            </a:r>
-            <a:endParaRPr lang="en-US" altLang="zh-TW" sz="1350" dirty="0"/>
-          </a:p>
-          <a:p>
-            <a:r>
-              <a:rPr lang="zh-TW" altLang="en-US" sz="1350" dirty="0"/>
-              <a:t>以這套系統來看</a:t>
-            </a:r>
-            <a:r>
-              <a:rPr lang="en-US" altLang="zh-TW" sz="1350" dirty="0"/>
-              <a:t>,</a:t>
-            </a:r>
-            <a:r>
-              <a:rPr lang="zh-TW" altLang="en-US" sz="1350" dirty="0"/>
-              <a:t>則需要開啓</a:t>
-            </a:r>
-            <a:r>
-              <a:rPr lang="en-US" altLang="zh-TW" sz="1350" dirty="0"/>
-              <a:t>Google sheet</a:t>
-            </a:r>
-            <a:r>
-              <a:rPr lang="zh-TW" altLang="en-US" sz="1350" dirty="0"/>
-              <a:t>並將商品建立在</a:t>
-            </a:r>
-            <a:r>
-              <a:rPr lang="en-US" altLang="zh-TW" sz="1350" dirty="0"/>
-              <a:t>Products sheet</a:t>
-            </a:r>
-            <a:r>
-              <a:rPr lang="zh-TW" altLang="en-US" sz="1350" dirty="0"/>
-              <a:t>內</a:t>
-            </a:r>
-            <a:endParaRPr lang="en-US" altLang="zh-TW" sz="1350" dirty="0"/>
-          </a:p>
-          <a:p>
-            <a:r>
-              <a:rPr lang="zh-TW" altLang="en-US" sz="1350" dirty="0"/>
-              <a:t>目前於</a:t>
-            </a:r>
-            <a:r>
-              <a:rPr lang="en-US" altLang="zh-TW" sz="1350" dirty="0"/>
-              <a:t>Products Sheet</a:t>
-            </a:r>
-            <a:r>
-              <a:rPr lang="zh-TW" altLang="en-US" sz="1350" dirty="0"/>
-              <a:t>內要手動輸入的欄位為</a:t>
-            </a:r>
-            <a:r>
-              <a:rPr lang="en-US" altLang="zh-TW" sz="1350" dirty="0"/>
-              <a:t>A,B,C,D,F</a:t>
-            </a:r>
-          </a:p>
-          <a:p>
-            <a:r>
-              <a:rPr lang="en-US" altLang="zh-TW" sz="1350" dirty="0"/>
-              <a:t>1) </a:t>
-            </a:r>
-            <a:r>
-              <a:rPr lang="zh-TW" altLang="en-US" sz="1350" dirty="0"/>
-              <a:t>是否有</a:t>
-            </a:r>
-            <a:endParaRPr lang="en-US" altLang="zh-TW" sz="1350" dirty="0"/>
-          </a:p>
-          <a:p>
-            <a:r>
-              <a:rPr lang="zh-TW" altLang="en-US" sz="1350" dirty="0"/>
-              <a:t>商品代碼是否可以由系統產生</a:t>
-            </a:r>
-            <a:r>
-              <a:rPr lang="en-US" altLang="zh-TW" sz="1350" dirty="0"/>
-              <a:t>,</a:t>
-            </a:r>
-            <a:r>
-              <a:rPr lang="zh-TW" altLang="en-US" sz="1350" dirty="0"/>
-              <a:t>這樣版主可以不用想代碼或輸入到重覆的代碼</a:t>
-            </a:r>
-          </a:p>
-        </p:txBody>
-      </p:sp>
-    </p:spTree>
-    <p:extLst>
-      <p:ext uri="{BB962C8B-B14F-4D97-AF65-F5344CB8AC3E}">
-        <p14:creationId xmlns:p14="http://schemas.microsoft.com/office/powerpoint/2010/main" val="2985418562"/>
-      </p:ext>
-    </p:extLst>
-  </p:cSld>
-  <p:clrMapOvr>
-    <a:masterClrMapping/>
-  </p:clrMapOvr>
-</p:sld>
-</file>
-
-<file path=ppt/slides/slide6.xml><?xml version="1.0" encoding="utf-8"?>
-<p:sld xmlns:a="http://schemas.openxmlformats.org/drawingml/2006/main" xmlns:r="http://schemas.openxmlformats.org/officeDocument/2006/relationships" xmlns:p="http://schemas.openxmlformats.org/presentationml/2006/main">
-  <p:cSld>
-    <p:spTree>
-      <p:nvGrpSpPr>
-        <p:cNvPr id="1" name=""/>
-        <p:cNvGrpSpPr/>
-        <p:nvPr/>
-      </p:nvGrpSpPr>
-      <p:grpSpPr>
-        <a:xfrm>
-          <a:off x="0" y="0"/>
-          <a:ext cx="0" cy="0"/>
-          <a:chOff x="0" y="0"/>
-          <a:chExt cx="0" cy="0"/>
-        </a:xfrm>
-      </p:grpSpPr>
-      <p:pic>
-        <p:nvPicPr>
-          <p:cNvPr id="2" name="圖片 1"/>
-          <p:cNvPicPr>
-            <a:picLocks noChangeAspect="1"/>
-          </p:cNvPicPr>
-          <p:nvPr/>
-        </p:nvPicPr>
-        <p:blipFill rotWithShape="1">
-          <a:blip r:embed="rId2"/>
-          <a:srcRect b="12201"/>
-          <a:stretch/>
-        </p:blipFill>
-        <p:spPr>
-          <a:xfrm>
-            <a:off x="3560277" y="2004110"/>
-            <a:ext cx="3297723" cy="3996444"/>
-          </a:xfrm>
-          <a:prstGeom prst="rect">
-            <a:avLst/>
-          </a:prstGeom>
-        </p:spPr>
-      </p:pic>
-      <p:pic>
-        <p:nvPicPr>
-          <p:cNvPr id="3" name="圖片 2"/>
-          <p:cNvPicPr>
-            <a:picLocks noChangeAspect="1"/>
-          </p:cNvPicPr>
-          <p:nvPr/>
-        </p:nvPicPr>
-        <p:blipFill>
-          <a:blip r:embed="rId3" cstate="print">
-            <a:extLst>
-              <a:ext uri="{28A0092B-C50C-407E-A947-70E740481C1C}">
-                <a14:useLocalDpi xmlns:a14="http://schemas.microsoft.com/office/drawing/2010/main" val="0"/>
-              </a:ext>
-            </a:extLst>
-          </a:blip>
-          <a:stretch>
-            <a:fillRect/>
-          </a:stretch>
-        </p:blipFill>
-        <p:spPr>
-          <a:xfrm>
-            <a:off x="0" y="3815916"/>
-            <a:ext cx="3131586" cy="1976998"/>
-          </a:xfrm>
-          <a:prstGeom prst="rect">
-            <a:avLst/>
-          </a:prstGeom>
-        </p:spPr>
-      </p:pic>
-      <p:pic>
-        <p:nvPicPr>
-          <p:cNvPr id="4" name="圖片 3"/>
-          <p:cNvPicPr>
-            <a:picLocks noChangeAspect="1"/>
-          </p:cNvPicPr>
-          <p:nvPr/>
-        </p:nvPicPr>
-        <p:blipFill>
-          <a:blip r:embed="rId4" cstate="print">
-            <a:extLst>
-              <a:ext uri="{28A0092B-C50C-407E-A947-70E740481C1C}">
-                <a14:useLocalDpi xmlns:a14="http://schemas.microsoft.com/office/drawing/2010/main" val="0"/>
-              </a:ext>
-            </a:extLst>
-          </a:blip>
-          <a:stretch>
-            <a:fillRect/>
-          </a:stretch>
-        </p:blipFill>
-        <p:spPr>
-          <a:xfrm>
-            <a:off x="0" y="1945890"/>
-            <a:ext cx="3131586" cy="1976998"/>
-          </a:xfrm>
-          <a:prstGeom prst="rect">
-            <a:avLst/>
-          </a:prstGeom>
-        </p:spPr>
-      </p:pic>
-      <p:sp>
-        <p:nvSpPr>
-          <p:cNvPr id="5" name="橢圓 4"/>
-          <p:cNvSpPr/>
-          <p:nvPr/>
-        </p:nvSpPr>
-        <p:spPr>
-          <a:xfrm>
-            <a:off x="1430778" y="3329862"/>
-            <a:ext cx="540060" cy="270030"/>
-          </a:xfrm>
-          <a:prstGeom prst="ellipse">
-            <a:avLst/>
-          </a:prstGeom>
-          <a:noFill/>
-          <a:ln>
-            <a:solidFill>
-              <a:srgbClr val="FF0000"/>
-            </a:solidFill>
-          </a:ln>
-        </p:spPr>
-        <p:style>
-          <a:lnRef idx="2">
-            <a:schemeClr val="accent1">
-              <a:shade val="50000"/>
-            </a:schemeClr>
-          </a:lnRef>
-          <a:fillRef idx="1">
-            <a:schemeClr val="accent1"/>
-          </a:fillRef>
-          <a:effectRef idx="0">
-            <a:schemeClr val="accent1"/>
-          </a:effectRef>
-          <a:fontRef idx="minor">
-            <a:schemeClr val="lt1"/>
-          </a:fontRef>
-        </p:style>
-        <p:txBody>
-          <a:bodyPr rtlCol="0" anchor="ctr"/>
-          <a:lstStyle/>
-          <a:p>
-            <a:pPr algn="ctr"/>
-            <a:endParaRPr lang="zh-TW" altLang="en-US" sz="1350"/>
-          </a:p>
-        </p:txBody>
-      </p:sp>
-      <p:cxnSp>
-        <p:nvCxnSpPr>
-          <p:cNvPr id="7" name="直線單箭頭接點 6"/>
-          <p:cNvCxnSpPr/>
-          <p:nvPr/>
-        </p:nvCxnSpPr>
-        <p:spPr>
-          <a:xfrm flipH="1">
-            <a:off x="1430778" y="3599892"/>
-            <a:ext cx="270030" cy="1134126"/>
-          </a:xfrm>
-          <a:prstGeom prst="straightConnector1">
-            <a:avLst/>
-          </a:prstGeom>
-          <a:ln>
-            <a:solidFill>
-              <a:srgbClr val="FF0000"/>
-            </a:solidFill>
-            <a:tailEnd type="triangle"/>
-          </a:ln>
-        </p:spPr>
-        <p:style>
-          <a:lnRef idx="1">
-            <a:schemeClr val="accent1"/>
-          </a:lnRef>
-          <a:fillRef idx="0">
-            <a:schemeClr val="accent1"/>
-          </a:fillRef>
-          <a:effectRef idx="0">
-            <a:schemeClr val="accent1"/>
-          </a:effectRef>
-          <a:fontRef idx="minor">
-            <a:schemeClr val="tx1"/>
-          </a:fontRef>
-        </p:style>
-      </p:cxnSp>
-      <p:sp>
-        <p:nvSpPr>
-          <p:cNvPr id="8" name="橢圓 7"/>
-          <p:cNvSpPr/>
-          <p:nvPr/>
-        </p:nvSpPr>
-        <p:spPr>
-          <a:xfrm>
-            <a:off x="1159055" y="4848849"/>
-            <a:ext cx="540060" cy="270030"/>
-          </a:xfrm>
-          <a:prstGeom prst="ellipse">
-            <a:avLst/>
-          </a:prstGeom>
-          <a:noFill/>
-          <a:ln>
-            <a:solidFill>
-              <a:srgbClr val="FF0000"/>
-            </a:solidFill>
-          </a:ln>
-        </p:spPr>
-        <p:style>
-          <a:lnRef idx="2">
-            <a:schemeClr val="accent1">
-              <a:shade val="50000"/>
-            </a:schemeClr>
-          </a:lnRef>
-          <a:fillRef idx="1">
-            <a:schemeClr val="accent1"/>
-          </a:fillRef>
-          <a:effectRef idx="0">
-            <a:schemeClr val="accent1"/>
-          </a:effectRef>
-          <a:fontRef idx="minor">
-            <a:schemeClr val="lt1"/>
-          </a:fontRef>
-        </p:style>
-        <p:txBody>
-          <a:bodyPr rtlCol="0" anchor="ctr"/>
-          <a:lstStyle/>
-          <a:p>
-            <a:pPr algn="ctr"/>
-            <a:endParaRPr lang="zh-TW" altLang="en-US" sz="1350"/>
-          </a:p>
-        </p:txBody>
-      </p:sp>
-      <p:cxnSp>
-        <p:nvCxnSpPr>
-          <p:cNvPr id="10" name="直線單箭頭接點 9"/>
-          <p:cNvCxnSpPr/>
-          <p:nvPr/>
-        </p:nvCxnSpPr>
-        <p:spPr>
-          <a:xfrm flipV="1">
-            <a:off x="1699116" y="4562429"/>
-            <a:ext cx="1783891" cy="421436"/>
-          </a:xfrm>
-          <a:prstGeom prst="straightConnector1">
-            <a:avLst/>
-          </a:prstGeom>
-          <a:ln>
-            <a:solidFill>
-              <a:srgbClr val="FF0000"/>
-            </a:solidFill>
-            <a:tailEnd type="triangle"/>
-          </a:ln>
-        </p:spPr>
-        <p:style>
-          <a:lnRef idx="1">
-            <a:schemeClr val="accent1"/>
-          </a:lnRef>
-          <a:fillRef idx="0">
-            <a:schemeClr val="accent1"/>
-          </a:fillRef>
-          <a:effectRef idx="0">
-            <a:schemeClr val="accent1"/>
-          </a:effectRef>
-          <a:fontRef idx="minor">
-            <a:schemeClr val="tx1"/>
-          </a:fontRef>
-        </p:style>
-      </p:cxnSp>
-      <p:pic>
-        <p:nvPicPr>
-          <p:cNvPr id="12" name="圖片 11"/>
-          <p:cNvPicPr>
-            <a:picLocks noChangeAspect="1"/>
-          </p:cNvPicPr>
-          <p:nvPr/>
-        </p:nvPicPr>
-        <p:blipFill rotWithShape="1">
-          <a:blip r:embed="rId5" cstate="print">
-            <a:extLst>
-              <a:ext uri="{28A0092B-C50C-407E-A947-70E740481C1C}">
-                <a14:useLocalDpi xmlns:a14="http://schemas.microsoft.com/office/drawing/2010/main" val="0"/>
-              </a:ext>
-            </a:extLst>
-          </a:blip>
-          <a:srcRect t="25470"/>
-          <a:stretch/>
-        </p:blipFill>
-        <p:spPr>
-          <a:xfrm>
-            <a:off x="11618" y="5730377"/>
-            <a:ext cx="2823316" cy="1328417"/>
-          </a:xfrm>
-          <a:prstGeom prst="rect">
-            <a:avLst/>
-          </a:prstGeom>
-        </p:spPr>
-      </p:pic>
-      <p:sp>
-        <p:nvSpPr>
-          <p:cNvPr id="13" name="矩形 12"/>
-          <p:cNvSpPr/>
-          <p:nvPr/>
-        </p:nvSpPr>
-        <p:spPr>
-          <a:xfrm>
-            <a:off x="620688" y="5730378"/>
-            <a:ext cx="810090" cy="191773"/>
-          </a:xfrm>
-          <a:prstGeom prst="rect">
-            <a:avLst/>
-          </a:prstGeom>
-          <a:noFill/>
-        </p:spPr>
-        <p:style>
-          <a:lnRef idx="2">
-            <a:schemeClr val="accent1">
-              <a:shade val="50000"/>
-            </a:schemeClr>
-          </a:lnRef>
-          <a:fillRef idx="1">
-            <a:schemeClr val="accent1"/>
-          </a:fillRef>
-          <a:effectRef idx="0">
-            <a:schemeClr val="accent1"/>
-          </a:effectRef>
-          <a:fontRef idx="minor">
-            <a:schemeClr val="lt1"/>
-          </a:fontRef>
-        </p:style>
-        <p:txBody>
-          <a:bodyPr rtlCol="0" anchor="ctr"/>
-          <a:lstStyle/>
-          <a:p>
-            <a:pPr algn="ctr"/>
-            <a:endParaRPr lang="zh-TW" altLang="en-US" sz="1350"/>
-          </a:p>
-        </p:txBody>
-      </p:sp>
-      <p:cxnSp>
-        <p:nvCxnSpPr>
-          <p:cNvPr id="15" name="直線單箭頭接點 14"/>
-          <p:cNvCxnSpPr/>
-          <p:nvPr/>
-        </p:nvCxnSpPr>
-        <p:spPr>
-          <a:xfrm>
-            <a:off x="1322766" y="5907745"/>
-            <a:ext cx="54006" cy="496667"/>
-          </a:xfrm>
-          <a:prstGeom prst="straightConnector1">
-            <a:avLst/>
-          </a:prstGeom>
-          <a:ln>
-            <a:tailEnd type="triangle"/>
-          </a:ln>
-        </p:spPr>
-        <p:style>
-          <a:lnRef idx="1">
-            <a:schemeClr val="accent1"/>
-          </a:lnRef>
-          <a:fillRef idx="0">
-            <a:schemeClr val="accent1"/>
-          </a:fillRef>
-          <a:effectRef idx="0">
-            <a:schemeClr val="accent1"/>
-          </a:effectRef>
-          <a:fontRef idx="minor">
-            <a:schemeClr val="tx1"/>
-          </a:fontRef>
-        </p:style>
-      </p:cxnSp>
-      <p:sp>
-        <p:nvSpPr>
-          <p:cNvPr id="16" name="矩形 15"/>
-          <p:cNvSpPr/>
-          <p:nvPr/>
-        </p:nvSpPr>
-        <p:spPr>
-          <a:xfrm>
-            <a:off x="3320988" y="6394586"/>
-            <a:ext cx="3429000" cy="507831"/>
-          </a:xfrm>
-          <a:prstGeom prst="rect">
-            <a:avLst/>
-          </a:prstGeom>
-        </p:spPr>
-        <p:txBody>
-          <a:bodyPr>
-            <a:spAutoFit/>
-          </a:bodyPr>
-          <a:lstStyle/>
-          <a:p>
-            <a:r>
-              <a:rPr lang="en-US" altLang="zh-TW" sz="900" dirty="0"/>
-              <a:t>Messaging API </a:t>
-            </a:r>
-            <a:r>
-              <a:rPr lang="zh-TW" altLang="en-US" sz="900" dirty="0"/>
-              <a:t>錯誤訊息</a:t>
-            </a:r>
-            <a:endParaRPr lang="en-US" altLang="zh-TW" sz="900" dirty="0"/>
-          </a:p>
-          <a:p>
-            <a:r>
-              <a:rPr lang="zh-TW" altLang="en-US" sz="900" dirty="0"/>
-              <a:t>您無法再將 </a:t>
-            </a:r>
-            <a:r>
-              <a:rPr lang="en-US" altLang="zh-TW" sz="900" dirty="0"/>
-              <a:t>LIFF </a:t>
-            </a:r>
-            <a:r>
-              <a:rPr lang="zh-TW" altLang="en-US" sz="900" dirty="0"/>
-              <a:t>應用程式新增至 </a:t>
-            </a:r>
-            <a:r>
-              <a:rPr lang="en-US" altLang="zh-TW" sz="900" dirty="0"/>
-              <a:t>Messaging API </a:t>
-            </a:r>
-            <a:r>
-              <a:rPr lang="zh-TW" altLang="en-US" sz="900" dirty="0"/>
-              <a:t>通道。請改用 </a:t>
-            </a:r>
-            <a:r>
-              <a:rPr lang="en-US" altLang="zh-TW" sz="900" dirty="0"/>
-              <a:t>LINE </a:t>
-            </a:r>
-            <a:r>
-              <a:rPr lang="zh-TW" altLang="en-US" sz="900" dirty="0"/>
-              <a:t>登入頻道。</a:t>
-            </a:r>
-          </a:p>
-        </p:txBody>
-      </p:sp>
-      <p:cxnSp>
-        <p:nvCxnSpPr>
-          <p:cNvPr id="18" name="直線單箭頭接點 17"/>
-          <p:cNvCxnSpPr>
-            <a:stCxn id="16" idx="1"/>
-          </p:cNvCxnSpPr>
-          <p:nvPr/>
-        </p:nvCxnSpPr>
-        <p:spPr>
-          <a:xfrm flipH="1" flipV="1">
-            <a:off x="2456892" y="6462211"/>
-            <a:ext cx="864096" cy="186291"/>
-          </a:xfrm>
-          <a:prstGeom prst="straightConnector1">
-            <a:avLst/>
-          </a:prstGeom>
-          <a:ln>
-            <a:tailEnd type="triangle"/>
-          </a:ln>
-        </p:spPr>
-        <p:style>
-          <a:lnRef idx="1">
-            <a:schemeClr val="accent1"/>
-          </a:lnRef>
-          <a:fillRef idx="0">
-            <a:schemeClr val="accent1"/>
-          </a:fillRef>
-          <a:effectRef idx="0">
-            <a:schemeClr val="accent1"/>
-          </a:effectRef>
-          <a:fontRef idx="minor">
-            <a:schemeClr val="tx1"/>
-          </a:fontRef>
-        </p:style>
-      </p:cxnSp>
-    </p:spTree>
-    <p:extLst>
-      <p:ext uri="{BB962C8B-B14F-4D97-AF65-F5344CB8AC3E}">
-        <p14:creationId xmlns:p14="http://schemas.microsoft.com/office/powerpoint/2010/main" val="2702851738"/>
-      </p:ext>
-    </p:extLst>
-  </p:cSld>
-  <p:clrMapOvr>
-    <a:masterClrMapping/>
-  </p:clrMapOvr>
-</p:sld>
-</file>
-
-<file path=ppt/slides/slide7.xml><?xml version="1.0" encoding="utf-8"?>
-<p:sld xmlns:a="http://schemas.openxmlformats.org/drawingml/2006/main" xmlns:r="http://schemas.openxmlformats.org/officeDocument/2006/relationships" xmlns:p="http://schemas.openxmlformats.org/presentationml/2006/main">
-  <p:cSld>
-    <p:spTree>
-      <p:nvGrpSpPr>
-        <p:cNvPr id="1" name=""/>
-        <p:cNvGrpSpPr/>
-        <p:nvPr/>
-      </p:nvGrpSpPr>
-      <p:grpSpPr>
-        <a:xfrm>
-          <a:off x="0" y="0"/>
-          <a:ext cx="0" cy="0"/>
-          <a:chOff x="0" y="0"/>
-          <a:chExt cx="0" cy="0"/>
-        </a:xfrm>
-      </p:grpSpPr>
-      <p:pic>
-        <p:nvPicPr>
-          <p:cNvPr id="4" name="圖片 3"/>
-          <p:cNvPicPr>
-            <a:picLocks noChangeAspect="1"/>
-          </p:cNvPicPr>
-          <p:nvPr/>
-        </p:nvPicPr>
-        <p:blipFill>
-          <a:blip r:embed="rId2">
-            <a:extLst>
-              <a:ext uri="{28A0092B-C50C-407E-A947-70E740481C1C}">
-                <a14:useLocalDpi xmlns:a14="http://schemas.microsoft.com/office/drawing/2010/main" val="0"/>
-              </a:ext>
-            </a:extLst>
-          </a:blip>
-          <a:stretch>
-            <a:fillRect/>
-          </a:stretch>
-        </p:blipFill>
-        <p:spPr>
-          <a:xfrm>
-            <a:off x="3318621" y="2000250"/>
-            <a:ext cx="3539380" cy="3844061"/>
-          </a:xfrm>
-          <a:prstGeom prst="rect">
-            <a:avLst/>
-          </a:prstGeom>
-        </p:spPr>
-      </p:pic>
-      <p:pic>
-        <p:nvPicPr>
-          <p:cNvPr id="5" name="圖片 4"/>
-          <p:cNvPicPr>
-            <a:picLocks noChangeAspect="1"/>
-          </p:cNvPicPr>
-          <p:nvPr/>
-        </p:nvPicPr>
-        <p:blipFill>
-          <a:blip r:embed="rId3">
-            <a:extLst>
-              <a:ext uri="{28A0092B-C50C-407E-A947-70E740481C1C}">
-                <a14:useLocalDpi xmlns:a14="http://schemas.microsoft.com/office/drawing/2010/main" val="0"/>
-              </a:ext>
-            </a:extLst>
-          </a:blip>
-          <a:stretch>
-            <a:fillRect/>
-          </a:stretch>
-        </p:blipFill>
-        <p:spPr>
-          <a:xfrm>
-            <a:off x="-81389" y="2000251"/>
-            <a:ext cx="3561324" cy="3867894"/>
-          </a:xfrm>
-          <a:prstGeom prst="rect">
-            <a:avLst/>
-          </a:prstGeom>
-        </p:spPr>
-      </p:pic>
-    </p:spTree>
-    <p:extLst>
-      <p:ext uri="{BB962C8B-B14F-4D97-AF65-F5344CB8AC3E}">
-        <p14:creationId xmlns:p14="http://schemas.microsoft.com/office/powerpoint/2010/main" val="578561926"/>
-      </p:ext>
-    </p:extLst>
-  </p:cSld>
-  <p:clrMapOvr>
-    <a:masterClrMapping/>
-  </p:clrMapOvr>
-</p:sld>
-</file>
-
-<file path=ppt/slides/slide8.xml><?xml version="1.0" encoding="utf-8"?>
+<file path=ppt/slides/slide10.xml><?xml version="1.0" encoding="utf-8"?>
 <p:sld xmlns:a="http://schemas.openxmlformats.org/drawingml/2006/main" xmlns:r="http://schemas.openxmlformats.org/officeDocument/2006/relationships" xmlns:p="http://schemas.openxmlformats.org/presentationml/2006/main">
   <p:cSld>
     <p:spTree>
@@ -6522,7 +5898,7 @@
 </p:sld>
 </file>
 
-<file path=ppt/slides/slide9.xml><?xml version="1.0" encoding="utf-8"?>
+<file path=ppt/slides/slide11.xml><?xml version="1.0" encoding="utf-8"?>
 <p:sld xmlns:a="http://schemas.openxmlformats.org/drawingml/2006/main" xmlns:r="http://schemas.openxmlformats.org/officeDocument/2006/relationships" xmlns:p="http://schemas.openxmlformats.org/presentationml/2006/main">
   <p:cSld>
     <p:spTree>
@@ -6567,6 +5943,3280 @@
     <p:extLst>
       <p:ext uri="{BB962C8B-B14F-4D97-AF65-F5344CB8AC3E}">
         <p14:creationId xmlns:p14="http://schemas.microsoft.com/office/powerpoint/2010/main" val="1426341059"/>
+      </p:ext>
+    </p:extLst>
+  </p:cSld>
+  <p:clrMapOvr>
+    <a:masterClrMapping/>
+  </p:clrMapOvr>
+</p:sld>
+</file>
+
+<file path=ppt/slides/slide2.xml><?xml version="1.0" encoding="utf-8"?>
+<p:sld xmlns:a="http://schemas.openxmlformats.org/drawingml/2006/main" xmlns:r="http://schemas.openxmlformats.org/officeDocument/2006/relationships" xmlns:p="http://schemas.openxmlformats.org/presentationml/2006/main">
+  <p:cSld>
+    <p:spTree>
+      <p:nvGrpSpPr>
+        <p:cNvPr id="1" name=""/>
+        <p:cNvGrpSpPr/>
+        <p:nvPr/>
+      </p:nvGrpSpPr>
+      <p:grpSpPr>
+        <a:xfrm>
+          <a:off x="0" y="0"/>
+          <a:ext cx="0" cy="0"/>
+          <a:chOff x="0" y="0"/>
+          <a:chExt cx="0" cy="0"/>
+        </a:xfrm>
+      </p:grpSpPr>
+      <p:pic>
+        <p:nvPicPr>
+          <p:cNvPr id="4" name="圖片 3"/>
+          <p:cNvPicPr>
+            <a:picLocks noChangeAspect="1"/>
+          </p:cNvPicPr>
+          <p:nvPr/>
+        </p:nvPicPr>
+        <p:blipFill>
+          <a:blip r:embed="rId2">
+            <a:extLst>
+              <a:ext uri="{28A0092B-C50C-407E-A947-70E740481C1C}">
+                <a14:useLocalDpi xmlns:a14="http://schemas.microsoft.com/office/drawing/2010/main" val="0"/>
+              </a:ext>
+            </a:extLst>
+          </a:blip>
+          <a:stretch>
+            <a:fillRect/>
+          </a:stretch>
+        </p:blipFill>
+        <p:spPr>
+          <a:xfrm>
+            <a:off x="0" y="260853"/>
+            <a:ext cx="6858000" cy="601672"/>
+          </a:xfrm>
+          <a:prstGeom prst="rect">
+            <a:avLst/>
+          </a:prstGeom>
+        </p:spPr>
+      </p:pic>
+      <p:pic>
+        <p:nvPicPr>
+          <p:cNvPr id="5" name="圖片 4"/>
+          <p:cNvPicPr>
+            <a:picLocks noChangeAspect="1"/>
+          </p:cNvPicPr>
+          <p:nvPr/>
+        </p:nvPicPr>
+        <p:blipFill>
+          <a:blip r:embed="rId3">
+            <a:extLst>
+              <a:ext uri="{28A0092B-C50C-407E-A947-70E740481C1C}">
+                <a14:useLocalDpi xmlns:a14="http://schemas.microsoft.com/office/drawing/2010/main" val="0"/>
+              </a:ext>
+            </a:extLst>
+          </a:blip>
+          <a:stretch>
+            <a:fillRect/>
+          </a:stretch>
+        </p:blipFill>
+        <p:spPr>
+          <a:xfrm>
+            <a:off x="0" y="862525"/>
+            <a:ext cx="6858000" cy="646002"/>
+          </a:xfrm>
+          <a:prstGeom prst="rect">
+            <a:avLst/>
+          </a:prstGeom>
+        </p:spPr>
+      </p:pic>
+      <p:pic>
+        <p:nvPicPr>
+          <p:cNvPr id="6" name="圖片 5"/>
+          <p:cNvPicPr>
+            <a:picLocks noChangeAspect="1"/>
+          </p:cNvPicPr>
+          <p:nvPr/>
+        </p:nvPicPr>
+        <p:blipFill>
+          <a:blip r:embed="rId4">
+            <a:extLst>
+              <a:ext uri="{28A0092B-C50C-407E-A947-70E740481C1C}">
+                <a14:useLocalDpi xmlns:a14="http://schemas.microsoft.com/office/drawing/2010/main" val="0"/>
+              </a:ext>
+            </a:extLst>
+          </a:blip>
+          <a:stretch>
+            <a:fillRect/>
+          </a:stretch>
+        </p:blipFill>
+        <p:spPr>
+          <a:xfrm>
+            <a:off x="0" y="1476133"/>
+            <a:ext cx="6858000" cy="757451"/>
+          </a:xfrm>
+          <a:prstGeom prst="rect">
+            <a:avLst/>
+          </a:prstGeom>
+        </p:spPr>
+      </p:pic>
+      <p:pic>
+        <p:nvPicPr>
+          <p:cNvPr id="7" name="圖片 6"/>
+          <p:cNvPicPr>
+            <a:picLocks noChangeAspect="1"/>
+          </p:cNvPicPr>
+          <p:nvPr/>
+        </p:nvPicPr>
+        <p:blipFill>
+          <a:blip r:embed="rId5">
+            <a:extLst>
+              <a:ext uri="{28A0092B-C50C-407E-A947-70E740481C1C}">
+                <a14:useLocalDpi xmlns:a14="http://schemas.microsoft.com/office/drawing/2010/main" val="0"/>
+              </a:ext>
+            </a:extLst>
+          </a:blip>
+          <a:stretch>
+            <a:fillRect/>
+          </a:stretch>
+        </p:blipFill>
+        <p:spPr>
+          <a:xfrm>
+            <a:off x="1" y="2233585"/>
+            <a:ext cx="6642857" cy="800000"/>
+          </a:xfrm>
+          <a:prstGeom prst="rect">
+            <a:avLst/>
+          </a:prstGeom>
+        </p:spPr>
+      </p:pic>
+      <p:pic>
+        <p:nvPicPr>
+          <p:cNvPr id="8" name="圖片 7"/>
+          <p:cNvPicPr>
+            <a:picLocks noChangeAspect="1"/>
+          </p:cNvPicPr>
+          <p:nvPr/>
+        </p:nvPicPr>
+        <p:blipFill>
+          <a:blip r:embed="rId6">
+            <a:extLst>
+              <a:ext uri="{28A0092B-C50C-407E-A947-70E740481C1C}">
+                <a14:useLocalDpi xmlns:a14="http://schemas.microsoft.com/office/drawing/2010/main" val="0"/>
+              </a:ext>
+            </a:extLst>
+          </a:blip>
+          <a:stretch>
+            <a:fillRect/>
+          </a:stretch>
+        </p:blipFill>
+        <p:spPr>
+          <a:xfrm>
+            <a:off x="0" y="3080492"/>
+            <a:ext cx="5235714" cy="771428"/>
+          </a:xfrm>
+          <a:prstGeom prst="rect">
+            <a:avLst/>
+          </a:prstGeom>
+        </p:spPr>
+      </p:pic>
+      <p:sp>
+        <p:nvSpPr>
+          <p:cNvPr id="13" name="文字方塊 12"/>
+          <p:cNvSpPr txBox="1"/>
+          <p:nvPr/>
+        </p:nvSpPr>
+        <p:spPr>
+          <a:xfrm>
+            <a:off x="2492896" y="-39229"/>
+            <a:ext cx="1137299" cy="300082"/>
+          </a:xfrm>
+          <a:prstGeom prst="rect">
+            <a:avLst/>
+          </a:prstGeom>
+          <a:noFill/>
+        </p:spPr>
+        <p:txBody>
+          <a:bodyPr wrap="none" rtlCol="0">
+            <a:spAutoFit/>
+          </a:bodyPr>
+          <a:lstStyle/>
+          <a:p>
+            <a:r>
+              <a:rPr lang="en-US" altLang="zh-TW" sz="1350" b="1" dirty="0">
+                <a:solidFill>
+                  <a:srgbClr val="0070C0"/>
+                </a:solidFill>
+              </a:rPr>
+              <a:t>Google Sheet</a:t>
+            </a:r>
+            <a:endParaRPr lang="zh-TW" altLang="en-US" sz="1350" b="1" dirty="0">
+              <a:solidFill>
+                <a:srgbClr val="0070C0"/>
+              </a:solidFill>
+            </a:endParaRPr>
+          </a:p>
+        </p:txBody>
+      </p:sp>
+      <p:grpSp>
+        <p:nvGrpSpPr>
+          <p:cNvPr id="2" name="群組 1">
+            <a:extLst>
+              <a:ext uri="{FF2B5EF4-FFF2-40B4-BE49-F238E27FC236}">
+                <a16:creationId xmlns:a16="http://schemas.microsoft.com/office/drawing/2014/main" id="{D408DAFA-1B92-7C95-34F5-E72C2D69ABDF}"/>
+              </a:ext>
+            </a:extLst>
+          </p:cNvPr>
+          <p:cNvGrpSpPr/>
+          <p:nvPr/>
+        </p:nvGrpSpPr>
+        <p:grpSpPr>
+          <a:xfrm>
+            <a:off x="84552" y="4211960"/>
+            <a:ext cx="6473754" cy="4825498"/>
+            <a:chOff x="173709" y="295863"/>
+            <a:chExt cx="6473754" cy="4825498"/>
+          </a:xfrm>
+        </p:grpSpPr>
+        <p:pic>
+          <p:nvPicPr>
+            <p:cNvPr id="3" name="圖片 2">
+              <a:extLst>
+                <a:ext uri="{FF2B5EF4-FFF2-40B4-BE49-F238E27FC236}">
+                  <a16:creationId xmlns:a16="http://schemas.microsoft.com/office/drawing/2014/main" id="{405B0C76-FC18-B637-B95D-1083B565A7C4}"/>
+                </a:ext>
+              </a:extLst>
+            </p:cNvPr>
+            <p:cNvPicPr>
+              <a:picLocks noChangeAspect="1"/>
+            </p:cNvPicPr>
+            <p:nvPr/>
+          </p:nvPicPr>
+          <p:blipFill>
+            <a:blip r:embed="rId7">
+              <a:extLst>
+                <a:ext uri="{28A0092B-C50C-407E-A947-70E740481C1C}">
+                  <a14:useLocalDpi xmlns:a14="http://schemas.microsoft.com/office/drawing/2010/main" val="0"/>
+                </a:ext>
+              </a:extLst>
+            </a:blip>
+            <a:stretch>
+              <a:fillRect/>
+            </a:stretch>
+          </p:blipFill>
+          <p:spPr>
+            <a:xfrm>
+              <a:off x="199280" y="879554"/>
+              <a:ext cx="1455508" cy="2977679"/>
+            </a:xfrm>
+            <a:prstGeom prst="rect">
+              <a:avLst/>
+            </a:prstGeom>
+          </p:spPr>
+        </p:pic>
+        <p:sp>
+          <p:nvSpPr>
+            <p:cNvPr id="10" name="文字方塊 9">
+              <a:extLst>
+                <a:ext uri="{FF2B5EF4-FFF2-40B4-BE49-F238E27FC236}">
+                  <a16:creationId xmlns:a16="http://schemas.microsoft.com/office/drawing/2014/main" id="{E58CF7B8-9C81-AFF9-A43A-5459623C8D03}"/>
+                </a:ext>
+              </a:extLst>
+            </p:cNvPr>
+            <p:cNvSpPr txBox="1"/>
+            <p:nvPr/>
+          </p:nvSpPr>
+          <p:spPr>
+            <a:xfrm>
+              <a:off x="173709" y="295864"/>
+              <a:ext cx="1859805" cy="300082"/>
+            </a:xfrm>
+            <a:prstGeom prst="rect">
+              <a:avLst/>
+            </a:prstGeom>
+            <a:solidFill>
+              <a:srgbClr val="FFFF00"/>
+            </a:solidFill>
+          </p:spPr>
+          <p:txBody>
+            <a:bodyPr wrap="none" rtlCol="0">
+              <a:spAutoFit/>
+            </a:bodyPr>
+            <a:lstStyle/>
+            <a:p>
+              <a:r>
+                <a:rPr lang="zh-TW" altLang="en-US" sz="1350" b="1" dirty="0">
+                  <a:solidFill>
+                    <a:srgbClr val="FF0000"/>
+                  </a:solidFill>
+                </a:rPr>
+                <a:t>本機 </a:t>
+              </a:r>
+              <a:r>
+                <a:rPr lang="en-US" altLang="zh-TW" sz="1350" b="1" dirty="0" err="1">
+                  <a:solidFill>
+                    <a:srgbClr val="FF0000"/>
+                  </a:solidFill>
+                </a:rPr>
+                <a:t>Phonmain</a:t>
+              </a:r>
+              <a:r>
+                <a:rPr lang="en-US" altLang="zh-TW" sz="1350" b="1" dirty="0">
+                  <a:solidFill>
+                    <a:srgbClr val="FF0000"/>
+                  </a:solidFill>
+                </a:rPr>
+                <a:t> </a:t>
+              </a:r>
+              <a:r>
+                <a:rPr lang="zh-TW" altLang="en-US" sz="1350" b="1" dirty="0">
+                  <a:solidFill>
+                    <a:srgbClr val="FF0000"/>
+                  </a:solidFill>
+                </a:rPr>
+                <a:t>根目錄</a:t>
+              </a:r>
+            </a:p>
+          </p:txBody>
+        </p:sp>
+        <p:cxnSp>
+          <p:nvCxnSpPr>
+            <p:cNvPr id="11" name="直線單箭頭接點 10">
+              <a:extLst>
+                <a:ext uri="{FF2B5EF4-FFF2-40B4-BE49-F238E27FC236}">
+                  <a16:creationId xmlns:a16="http://schemas.microsoft.com/office/drawing/2014/main" id="{6BD5CEC3-2C63-DDDE-CEC7-CF4E5EAA0D4C}"/>
+                </a:ext>
+              </a:extLst>
+            </p:cNvPr>
+            <p:cNvCxnSpPr/>
+            <p:nvPr/>
+          </p:nvCxnSpPr>
+          <p:spPr>
+            <a:xfrm>
+              <a:off x="1548325" y="1331640"/>
+              <a:ext cx="396000" cy="0"/>
+            </a:xfrm>
+            <a:prstGeom prst="straightConnector1">
+              <a:avLst/>
+            </a:prstGeom>
+            <a:ln>
+              <a:solidFill>
+                <a:srgbClr val="FF0000"/>
+              </a:solidFill>
+              <a:tailEnd type="triangle"/>
+            </a:ln>
+          </p:spPr>
+          <p:style>
+            <a:lnRef idx="1">
+              <a:schemeClr val="accent1"/>
+            </a:lnRef>
+            <a:fillRef idx="0">
+              <a:schemeClr val="accent1"/>
+            </a:fillRef>
+            <a:effectRef idx="0">
+              <a:schemeClr val="accent1"/>
+            </a:effectRef>
+            <a:fontRef idx="minor">
+              <a:schemeClr val="tx1"/>
+            </a:fontRef>
+          </p:style>
+        </p:cxnSp>
+        <p:cxnSp>
+          <p:nvCxnSpPr>
+            <p:cNvPr id="15" name="直線單箭頭接點 14">
+              <a:extLst>
+                <a:ext uri="{FF2B5EF4-FFF2-40B4-BE49-F238E27FC236}">
+                  <a16:creationId xmlns:a16="http://schemas.microsoft.com/office/drawing/2014/main" id="{33BEF131-D493-C05F-820D-60E25DDAED5E}"/>
+                </a:ext>
+              </a:extLst>
+            </p:cNvPr>
+            <p:cNvCxnSpPr/>
+            <p:nvPr/>
+          </p:nvCxnSpPr>
+          <p:spPr>
+            <a:xfrm>
+              <a:off x="1067563" y="1619672"/>
+              <a:ext cx="432048" cy="0"/>
+            </a:xfrm>
+            <a:prstGeom prst="straightConnector1">
+              <a:avLst/>
+            </a:prstGeom>
+            <a:ln>
+              <a:solidFill>
+                <a:srgbClr val="FF0000"/>
+              </a:solidFill>
+              <a:tailEnd type="triangle"/>
+            </a:ln>
+          </p:spPr>
+          <p:style>
+            <a:lnRef idx="1">
+              <a:schemeClr val="accent1"/>
+            </a:lnRef>
+            <a:fillRef idx="0">
+              <a:schemeClr val="accent1"/>
+            </a:fillRef>
+            <a:effectRef idx="0">
+              <a:schemeClr val="accent1"/>
+            </a:effectRef>
+            <a:fontRef idx="minor">
+              <a:schemeClr val="tx1"/>
+            </a:fontRef>
+          </p:style>
+        </p:cxnSp>
+        <p:cxnSp>
+          <p:nvCxnSpPr>
+            <p:cNvPr id="16" name="肘形接點 27">
+              <a:extLst>
+                <a:ext uri="{FF2B5EF4-FFF2-40B4-BE49-F238E27FC236}">
+                  <a16:creationId xmlns:a16="http://schemas.microsoft.com/office/drawing/2014/main" id="{5BABC4F3-5962-7131-0584-408D91D6D616}"/>
+                </a:ext>
+              </a:extLst>
+            </p:cNvPr>
+            <p:cNvCxnSpPr>
+              <a:cxnSpLocks/>
+            </p:cNvCxnSpPr>
+            <p:nvPr/>
+          </p:nvCxnSpPr>
+          <p:spPr>
+            <a:xfrm>
+              <a:off x="1082732" y="1927963"/>
+              <a:ext cx="1455508" cy="115434"/>
+            </a:xfrm>
+            <a:prstGeom prst="bentConnector3">
+              <a:avLst>
+                <a:gd name="adj1" fmla="val 50000"/>
+              </a:avLst>
+            </a:prstGeom>
+            <a:ln>
+              <a:solidFill>
+                <a:srgbClr val="FF0000"/>
+              </a:solidFill>
+              <a:headEnd type="none" w="med" len="med"/>
+              <a:tailEnd type="triangle" w="med" len="med"/>
+            </a:ln>
+          </p:spPr>
+          <p:style>
+            <a:lnRef idx="1">
+              <a:schemeClr val="accent1"/>
+            </a:lnRef>
+            <a:fillRef idx="0">
+              <a:schemeClr val="accent1"/>
+            </a:fillRef>
+            <a:effectRef idx="0">
+              <a:schemeClr val="accent1"/>
+            </a:effectRef>
+            <a:fontRef idx="minor">
+              <a:schemeClr val="tx1"/>
+            </a:fontRef>
+          </p:style>
+        </p:cxnSp>
+        <p:cxnSp>
+          <p:nvCxnSpPr>
+            <p:cNvPr id="17" name="直線單箭頭接點 16">
+              <a:extLst>
+                <a:ext uri="{FF2B5EF4-FFF2-40B4-BE49-F238E27FC236}">
+                  <a16:creationId xmlns:a16="http://schemas.microsoft.com/office/drawing/2014/main" id="{420755E3-EB5D-0B85-859A-074843772498}"/>
+                </a:ext>
+              </a:extLst>
+            </p:cNvPr>
+            <p:cNvCxnSpPr/>
+            <p:nvPr/>
+          </p:nvCxnSpPr>
+          <p:spPr>
+            <a:xfrm>
+              <a:off x="836712" y="595946"/>
+              <a:ext cx="0" cy="246511"/>
+            </a:xfrm>
+            <a:prstGeom prst="straightConnector1">
+              <a:avLst/>
+            </a:prstGeom>
+            <a:ln>
+              <a:solidFill>
+                <a:srgbClr val="FF0000"/>
+              </a:solidFill>
+              <a:tailEnd type="triangle"/>
+            </a:ln>
+          </p:spPr>
+          <p:style>
+            <a:lnRef idx="1">
+              <a:schemeClr val="accent1"/>
+            </a:lnRef>
+            <a:fillRef idx="0">
+              <a:schemeClr val="accent1"/>
+            </a:fillRef>
+            <a:effectRef idx="0">
+              <a:schemeClr val="accent1"/>
+            </a:effectRef>
+            <a:fontRef idx="minor">
+              <a:schemeClr val="tx1"/>
+            </a:fontRef>
+          </p:style>
+        </p:cxnSp>
+        <p:cxnSp>
+          <p:nvCxnSpPr>
+            <p:cNvPr id="18" name="肘形接點 40">
+              <a:extLst>
+                <a:ext uri="{FF2B5EF4-FFF2-40B4-BE49-F238E27FC236}">
+                  <a16:creationId xmlns:a16="http://schemas.microsoft.com/office/drawing/2014/main" id="{32B29F09-79AB-8DBB-1C85-6C90E1E3A5A7}"/>
+                </a:ext>
+              </a:extLst>
+            </p:cNvPr>
+            <p:cNvCxnSpPr>
+              <a:cxnSpLocks/>
+            </p:cNvCxnSpPr>
+            <p:nvPr/>
+          </p:nvCxnSpPr>
+          <p:spPr>
+            <a:xfrm>
+              <a:off x="1159912" y="2214044"/>
+              <a:ext cx="2889689" cy="1492432"/>
+            </a:xfrm>
+            <a:prstGeom prst="bentConnector3">
+              <a:avLst>
+                <a:gd name="adj1" fmla="val 44140"/>
+              </a:avLst>
+            </a:prstGeom>
+            <a:ln>
+              <a:solidFill>
+                <a:srgbClr val="FF0000"/>
+              </a:solidFill>
+              <a:tailEnd type="triangle"/>
+            </a:ln>
+          </p:spPr>
+          <p:style>
+            <a:lnRef idx="1">
+              <a:schemeClr val="accent1"/>
+            </a:lnRef>
+            <a:fillRef idx="0">
+              <a:schemeClr val="accent1"/>
+            </a:fillRef>
+            <a:effectRef idx="0">
+              <a:schemeClr val="accent1"/>
+            </a:effectRef>
+            <a:fontRef idx="minor">
+              <a:schemeClr val="tx1"/>
+            </a:fontRef>
+          </p:style>
+        </p:cxnSp>
+        <p:cxnSp>
+          <p:nvCxnSpPr>
+            <p:cNvPr id="19" name="直線單箭頭接點 18">
+              <a:extLst>
+                <a:ext uri="{FF2B5EF4-FFF2-40B4-BE49-F238E27FC236}">
+                  <a16:creationId xmlns:a16="http://schemas.microsoft.com/office/drawing/2014/main" id="{F1B7BF54-F6C2-4C76-319E-7F06CE98D2EC}"/>
+                </a:ext>
+              </a:extLst>
+            </p:cNvPr>
+            <p:cNvCxnSpPr/>
+            <p:nvPr/>
+          </p:nvCxnSpPr>
+          <p:spPr>
+            <a:xfrm>
+              <a:off x="887587" y="2513441"/>
+              <a:ext cx="432048" cy="0"/>
+            </a:xfrm>
+            <a:prstGeom prst="straightConnector1">
+              <a:avLst/>
+            </a:prstGeom>
+            <a:ln>
+              <a:solidFill>
+                <a:srgbClr val="FF0000"/>
+              </a:solidFill>
+              <a:tailEnd type="triangle"/>
+            </a:ln>
+          </p:spPr>
+          <p:style>
+            <a:lnRef idx="1">
+              <a:schemeClr val="accent1"/>
+            </a:lnRef>
+            <a:fillRef idx="0">
+              <a:schemeClr val="accent1"/>
+            </a:fillRef>
+            <a:effectRef idx="0">
+              <a:schemeClr val="accent1"/>
+            </a:effectRef>
+            <a:fontRef idx="minor">
+              <a:schemeClr val="tx1"/>
+            </a:fontRef>
+          </p:style>
+        </p:cxnSp>
+        <p:pic>
+          <p:nvPicPr>
+            <p:cNvPr id="20" name="圖片 19">
+              <a:extLst>
+                <a:ext uri="{FF2B5EF4-FFF2-40B4-BE49-F238E27FC236}">
+                  <a16:creationId xmlns:a16="http://schemas.microsoft.com/office/drawing/2014/main" id="{2165DD2C-0794-D907-5410-EB59DCA93881}"/>
+                </a:ext>
+              </a:extLst>
+            </p:cNvPr>
+            <p:cNvPicPr>
+              <a:picLocks noChangeAspect="1"/>
+            </p:cNvPicPr>
+            <p:nvPr/>
+          </p:nvPicPr>
+          <p:blipFill>
+            <a:blip r:embed="rId8">
+              <a:extLst>
+                <a:ext uri="{28A0092B-C50C-407E-A947-70E740481C1C}">
+                  <a14:useLocalDpi xmlns:a14="http://schemas.microsoft.com/office/drawing/2010/main" val="0"/>
+                </a:ext>
+              </a:extLst>
+            </a:blip>
+            <a:stretch>
+              <a:fillRect/>
+            </a:stretch>
+          </p:blipFill>
+          <p:spPr>
+            <a:xfrm>
+              <a:off x="1944325" y="1167253"/>
+              <a:ext cx="1262848" cy="300082"/>
+            </a:xfrm>
+            <a:prstGeom prst="rect">
+              <a:avLst/>
+            </a:prstGeom>
+          </p:spPr>
+        </p:pic>
+        <p:cxnSp>
+          <p:nvCxnSpPr>
+            <p:cNvPr id="21" name="直線單箭頭接點 20">
+              <a:extLst>
+                <a:ext uri="{FF2B5EF4-FFF2-40B4-BE49-F238E27FC236}">
+                  <a16:creationId xmlns:a16="http://schemas.microsoft.com/office/drawing/2014/main" id="{30C38612-BB1A-6AEE-4E34-FBAC35B6CE98}"/>
+                </a:ext>
+              </a:extLst>
+            </p:cNvPr>
+            <p:cNvCxnSpPr/>
+            <p:nvPr/>
+          </p:nvCxnSpPr>
+          <p:spPr>
+            <a:xfrm>
+              <a:off x="1103611" y="1043608"/>
+              <a:ext cx="396000" cy="0"/>
+            </a:xfrm>
+            <a:prstGeom prst="straightConnector1">
+              <a:avLst/>
+            </a:prstGeom>
+            <a:ln>
+              <a:solidFill>
+                <a:srgbClr val="FF0000"/>
+              </a:solidFill>
+              <a:tailEnd type="triangle"/>
+            </a:ln>
+          </p:spPr>
+          <p:style>
+            <a:lnRef idx="1">
+              <a:schemeClr val="accent1"/>
+            </a:lnRef>
+            <a:fillRef idx="0">
+              <a:schemeClr val="accent1"/>
+            </a:fillRef>
+            <a:effectRef idx="0">
+              <a:schemeClr val="accent1"/>
+            </a:effectRef>
+            <a:fontRef idx="minor">
+              <a:schemeClr val="tx1"/>
+            </a:fontRef>
+          </p:style>
+        </p:cxnSp>
+        <p:pic>
+          <p:nvPicPr>
+            <p:cNvPr id="22" name="圖片 21">
+              <a:extLst>
+                <a:ext uri="{FF2B5EF4-FFF2-40B4-BE49-F238E27FC236}">
+                  <a16:creationId xmlns:a16="http://schemas.microsoft.com/office/drawing/2014/main" id="{FA4C5856-8DB1-0BA4-18C9-3067FD345DBE}"/>
+                </a:ext>
+              </a:extLst>
+            </p:cNvPr>
+            <p:cNvPicPr>
+              <a:picLocks noChangeAspect="1"/>
+            </p:cNvPicPr>
+            <p:nvPr/>
+          </p:nvPicPr>
+          <p:blipFill>
+            <a:blip r:embed="rId9">
+              <a:extLst>
+                <a:ext uri="{28A0092B-C50C-407E-A947-70E740481C1C}">
+                  <a14:useLocalDpi xmlns:a14="http://schemas.microsoft.com/office/drawing/2010/main" val="0"/>
+                </a:ext>
+              </a:extLst>
+            </a:blip>
+            <a:stretch>
+              <a:fillRect/>
+            </a:stretch>
+          </p:blipFill>
+          <p:spPr>
+            <a:xfrm>
+              <a:off x="1548325" y="889122"/>
+              <a:ext cx="936521" cy="283134"/>
+            </a:xfrm>
+            <a:prstGeom prst="rect">
+              <a:avLst/>
+            </a:prstGeom>
+          </p:spPr>
+        </p:pic>
+        <p:pic>
+          <p:nvPicPr>
+            <p:cNvPr id="23" name="圖片 22">
+              <a:extLst>
+                <a:ext uri="{FF2B5EF4-FFF2-40B4-BE49-F238E27FC236}">
+                  <a16:creationId xmlns:a16="http://schemas.microsoft.com/office/drawing/2014/main" id="{EEAD33F3-15F8-3E7A-9833-0EEB66D5A639}"/>
+                </a:ext>
+              </a:extLst>
+            </p:cNvPr>
+            <p:cNvPicPr>
+              <a:picLocks noChangeAspect="1"/>
+            </p:cNvPicPr>
+            <p:nvPr/>
+          </p:nvPicPr>
+          <p:blipFill>
+            <a:blip r:embed="rId10"/>
+            <a:stretch>
+              <a:fillRect/>
+            </a:stretch>
+          </p:blipFill>
+          <p:spPr>
+            <a:xfrm>
+              <a:off x="1449139" y="1449516"/>
+              <a:ext cx="560459" cy="432759"/>
+            </a:xfrm>
+            <a:prstGeom prst="rect">
+              <a:avLst/>
+            </a:prstGeom>
+          </p:spPr>
+        </p:pic>
+        <p:cxnSp>
+          <p:nvCxnSpPr>
+            <p:cNvPr id="24" name="直線單箭頭接點 23">
+              <a:extLst>
+                <a:ext uri="{FF2B5EF4-FFF2-40B4-BE49-F238E27FC236}">
+                  <a16:creationId xmlns:a16="http://schemas.microsoft.com/office/drawing/2014/main" id="{5CC55BE7-28FC-13C8-2E50-27EC44C26040}"/>
+                </a:ext>
+              </a:extLst>
+            </p:cNvPr>
+            <p:cNvCxnSpPr>
+              <a:cxnSpLocks/>
+            </p:cNvCxnSpPr>
+            <p:nvPr/>
+          </p:nvCxnSpPr>
+          <p:spPr>
+            <a:xfrm flipV="1">
+              <a:off x="1990538" y="1619672"/>
+              <a:ext cx="2520000" cy="0"/>
+            </a:xfrm>
+            <a:prstGeom prst="straightConnector1">
+              <a:avLst/>
+            </a:prstGeom>
+            <a:ln>
+              <a:solidFill>
+                <a:srgbClr val="FF0000"/>
+              </a:solidFill>
+              <a:tailEnd type="triangle"/>
+            </a:ln>
+          </p:spPr>
+          <p:style>
+            <a:lnRef idx="1">
+              <a:schemeClr val="accent1"/>
+            </a:lnRef>
+            <a:fillRef idx="0">
+              <a:schemeClr val="accent1"/>
+            </a:fillRef>
+            <a:effectRef idx="0">
+              <a:schemeClr val="accent1"/>
+            </a:effectRef>
+            <a:fontRef idx="minor">
+              <a:schemeClr val="tx1"/>
+            </a:fontRef>
+          </p:style>
+        </p:cxnSp>
+        <p:pic>
+          <p:nvPicPr>
+            <p:cNvPr id="25" name="圖片 24">
+              <a:extLst>
+                <a:ext uri="{FF2B5EF4-FFF2-40B4-BE49-F238E27FC236}">
+                  <a16:creationId xmlns:a16="http://schemas.microsoft.com/office/drawing/2014/main" id="{3FA6DAE3-22A6-B07C-858B-9566F1D5950A}"/>
+                </a:ext>
+              </a:extLst>
+            </p:cNvPr>
+            <p:cNvPicPr>
+              <a:picLocks noChangeAspect="1"/>
+            </p:cNvPicPr>
+            <p:nvPr/>
+          </p:nvPicPr>
+          <p:blipFill>
+            <a:blip r:embed="rId11">
+              <a:extLst>
+                <a:ext uri="{28A0092B-C50C-407E-A947-70E740481C1C}">
+                  <a14:useLocalDpi xmlns:a14="http://schemas.microsoft.com/office/drawing/2010/main" val="0"/>
+                </a:ext>
+              </a:extLst>
+            </a:blip>
+            <a:stretch>
+              <a:fillRect/>
+            </a:stretch>
+          </p:blipFill>
+          <p:spPr>
+            <a:xfrm>
+              <a:off x="1358249" y="2305198"/>
+              <a:ext cx="984846" cy="528235"/>
+            </a:xfrm>
+            <a:prstGeom prst="rect">
+              <a:avLst/>
+            </a:prstGeom>
+          </p:spPr>
+        </p:pic>
+        <p:pic>
+          <p:nvPicPr>
+            <p:cNvPr id="26" name="圖片 25">
+              <a:extLst>
+                <a:ext uri="{FF2B5EF4-FFF2-40B4-BE49-F238E27FC236}">
+                  <a16:creationId xmlns:a16="http://schemas.microsoft.com/office/drawing/2014/main" id="{0955305B-C51F-E833-B0D5-F28CE57FBA88}"/>
+                </a:ext>
+              </a:extLst>
+            </p:cNvPr>
+            <p:cNvPicPr>
+              <a:picLocks noChangeAspect="1"/>
+            </p:cNvPicPr>
+            <p:nvPr/>
+          </p:nvPicPr>
+          <p:blipFill>
+            <a:blip r:embed="rId12">
+              <a:extLst>
+                <a:ext uri="{28A0092B-C50C-407E-A947-70E740481C1C}">
+                  <a14:useLocalDpi xmlns:a14="http://schemas.microsoft.com/office/drawing/2010/main" val="0"/>
+                </a:ext>
+              </a:extLst>
+            </a:blip>
+            <a:stretch>
+              <a:fillRect/>
+            </a:stretch>
+          </p:blipFill>
+          <p:spPr>
+            <a:xfrm>
+              <a:off x="2569494" y="1695214"/>
+              <a:ext cx="1480107" cy="1219967"/>
+            </a:xfrm>
+            <a:prstGeom prst="rect">
+              <a:avLst/>
+            </a:prstGeom>
+          </p:spPr>
+        </p:pic>
+        <p:pic>
+          <p:nvPicPr>
+            <p:cNvPr id="27" name="圖片 26">
+              <a:extLst>
+                <a:ext uri="{FF2B5EF4-FFF2-40B4-BE49-F238E27FC236}">
+                  <a16:creationId xmlns:a16="http://schemas.microsoft.com/office/drawing/2014/main" id="{E42FFE4B-C8FC-4FD6-26D2-CDE3B12751A2}"/>
+                </a:ext>
+              </a:extLst>
+            </p:cNvPr>
+            <p:cNvPicPr>
+              <a:picLocks noChangeAspect="1"/>
+            </p:cNvPicPr>
+            <p:nvPr/>
+          </p:nvPicPr>
+          <p:blipFill>
+            <a:blip r:embed="rId13">
+              <a:extLst>
+                <a:ext uri="{28A0092B-C50C-407E-A947-70E740481C1C}">
+                  <a14:useLocalDpi xmlns:a14="http://schemas.microsoft.com/office/drawing/2010/main" val="0"/>
+                </a:ext>
+              </a:extLst>
+            </a:blip>
+            <a:stretch>
+              <a:fillRect/>
+            </a:stretch>
+          </p:blipFill>
+          <p:spPr>
+            <a:xfrm>
+              <a:off x="4066707" y="2593104"/>
+              <a:ext cx="1327124" cy="2528257"/>
+            </a:xfrm>
+            <a:prstGeom prst="rect">
+              <a:avLst/>
+            </a:prstGeom>
+          </p:spPr>
+        </p:pic>
+        <p:pic>
+          <p:nvPicPr>
+            <p:cNvPr id="28" name="圖片 27">
+              <a:extLst>
+                <a:ext uri="{FF2B5EF4-FFF2-40B4-BE49-F238E27FC236}">
+                  <a16:creationId xmlns:a16="http://schemas.microsoft.com/office/drawing/2014/main" id="{57C34D73-539C-6703-FDA8-04B6C2A39308}"/>
+                </a:ext>
+              </a:extLst>
+            </p:cNvPr>
+            <p:cNvPicPr>
+              <a:picLocks noChangeAspect="1"/>
+            </p:cNvPicPr>
+            <p:nvPr/>
+          </p:nvPicPr>
+          <p:blipFill>
+            <a:blip r:embed="rId14">
+              <a:extLst>
+                <a:ext uri="{28A0092B-C50C-407E-A947-70E740481C1C}">
+                  <a14:useLocalDpi xmlns:a14="http://schemas.microsoft.com/office/drawing/2010/main" val="0"/>
+                </a:ext>
+              </a:extLst>
+            </a:blip>
+            <a:stretch>
+              <a:fillRect/>
+            </a:stretch>
+          </p:blipFill>
+          <p:spPr>
+            <a:xfrm>
+              <a:off x="4622321" y="295863"/>
+              <a:ext cx="2025142" cy="2217577"/>
+            </a:xfrm>
+            <a:prstGeom prst="rect">
+              <a:avLst/>
+            </a:prstGeom>
+          </p:spPr>
+        </p:pic>
+      </p:grpSp>
+    </p:spTree>
+    <p:extLst>
+      <p:ext uri="{BB962C8B-B14F-4D97-AF65-F5344CB8AC3E}">
+        <p14:creationId xmlns:p14="http://schemas.microsoft.com/office/powerpoint/2010/main" val="1786444560"/>
+      </p:ext>
+    </p:extLst>
+  </p:cSld>
+  <p:clrMapOvr>
+    <a:masterClrMapping/>
+  </p:clrMapOvr>
+</p:sld>
+</file>
+
+<file path=ppt/slides/slide3.xml><?xml version="1.0" encoding="utf-8"?>
+<p:sld xmlns:a="http://schemas.openxmlformats.org/drawingml/2006/main" xmlns:r="http://schemas.openxmlformats.org/officeDocument/2006/relationships" xmlns:p="http://schemas.openxmlformats.org/presentationml/2006/main">
+  <p:cSld>
+    <p:spTree>
+      <p:nvGrpSpPr>
+        <p:cNvPr id="1" name=""/>
+        <p:cNvGrpSpPr/>
+        <p:nvPr/>
+      </p:nvGrpSpPr>
+      <p:grpSpPr>
+        <a:xfrm>
+          <a:off x="0" y="0"/>
+          <a:ext cx="0" cy="0"/>
+          <a:chOff x="0" y="0"/>
+          <a:chExt cx="0" cy="0"/>
+        </a:xfrm>
+      </p:grpSpPr>
+      <p:pic>
+        <p:nvPicPr>
+          <p:cNvPr id="4" name="圖片 3"/>
+          <p:cNvPicPr>
+            <a:picLocks noChangeAspect="1"/>
+          </p:cNvPicPr>
+          <p:nvPr/>
+        </p:nvPicPr>
+        <p:blipFill rotWithShape="1">
+          <a:blip r:embed="rId2">
+            <a:extLst>
+              <a:ext uri="{28A0092B-C50C-407E-A947-70E740481C1C}">
+                <a14:useLocalDpi xmlns:a14="http://schemas.microsoft.com/office/drawing/2010/main" val="0"/>
+              </a:ext>
+            </a:extLst>
+          </a:blip>
+          <a:srcRect l="2312" t="46001" r="87484" b="40889"/>
+          <a:stretch/>
+        </p:blipFill>
+        <p:spPr>
+          <a:xfrm>
+            <a:off x="150224" y="635386"/>
+            <a:ext cx="594067" cy="324036"/>
+          </a:xfrm>
+          <a:prstGeom prst="rect">
+            <a:avLst/>
+          </a:prstGeom>
+        </p:spPr>
+      </p:pic>
+      <p:pic>
+        <p:nvPicPr>
+          <p:cNvPr id="5" name="圖片 4"/>
+          <p:cNvPicPr>
+            <a:picLocks noChangeAspect="1"/>
+          </p:cNvPicPr>
+          <p:nvPr/>
+        </p:nvPicPr>
+        <p:blipFill rotWithShape="1">
+          <a:blip r:embed="rId2">
+            <a:extLst>
+              <a:ext uri="{28A0092B-C50C-407E-A947-70E740481C1C}">
+                <a14:useLocalDpi xmlns:a14="http://schemas.microsoft.com/office/drawing/2010/main" val="0"/>
+              </a:ext>
+            </a:extLst>
+          </a:blip>
+          <a:srcRect l="24117" t="69920" r="67535" b="16970"/>
+          <a:stretch/>
+        </p:blipFill>
+        <p:spPr>
+          <a:xfrm>
+            <a:off x="287855" y="2768835"/>
+            <a:ext cx="486055" cy="324036"/>
+          </a:xfrm>
+          <a:prstGeom prst="rect">
+            <a:avLst/>
+          </a:prstGeom>
+        </p:spPr>
+      </p:pic>
+      <p:sp>
+        <p:nvSpPr>
+          <p:cNvPr id="7" name="文字方塊 6"/>
+          <p:cNvSpPr txBox="1"/>
+          <p:nvPr/>
+        </p:nvSpPr>
+        <p:spPr>
+          <a:xfrm>
+            <a:off x="233849" y="214243"/>
+            <a:ext cx="1571264" cy="253916"/>
+          </a:xfrm>
+          <a:prstGeom prst="rect">
+            <a:avLst/>
+          </a:prstGeom>
+          <a:noFill/>
+        </p:spPr>
+        <p:txBody>
+          <a:bodyPr wrap="none" rtlCol="0">
+            <a:spAutoFit/>
+          </a:bodyPr>
+          <a:lstStyle/>
+          <a:p>
+            <a:r>
+              <a:rPr lang="en-US" altLang="zh-TW" sz="1050" b="1" dirty="0"/>
+              <a:t>Line </a:t>
+            </a:r>
+            <a:r>
+              <a:rPr lang="zh-TW" altLang="en-US" sz="1050" b="1" dirty="0"/>
+              <a:t>選單畫面 </a:t>
+            </a:r>
+            <a:r>
+              <a:rPr lang="en-US" altLang="zh-TW" sz="1050" b="1" dirty="0"/>
+              <a:t>(4</a:t>
+            </a:r>
+            <a:r>
+              <a:rPr lang="zh-TW" altLang="en-US" sz="1050" b="1" dirty="0"/>
+              <a:t>個按鈕</a:t>
+            </a:r>
+            <a:r>
+              <a:rPr lang="en-US" altLang="zh-TW" sz="1050" b="1" dirty="0"/>
+              <a:t>)</a:t>
+            </a:r>
+            <a:endParaRPr lang="zh-TW" altLang="en-US" sz="1050" b="1" dirty="0"/>
+          </a:p>
+        </p:txBody>
+      </p:sp>
+      <p:pic>
+        <p:nvPicPr>
+          <p:cNvPr id="10" name="圖片 9"/>
+          <p:cNvPicPr>
+            <a:picLocks noChangeAspect="1"/>
+          </p:cNvPicPr>
+          <p:nvPr/>
+        </p:nvPicPr>
+        <p:blipFill rotWithShape="1">
+          <a:blip r:embed="rId2">
+            <a:extLst>
+              <a:ext uri="{28A0092B-C50C-407E-A947-70E740481C1C}">
+                <a14:useLocalDpi xmlns:a14="http://schemas.microsoft.com/office/drawing/2010/main" val="0"/>
+              </a:ext>
+            </a:extLst>
+          </a:blip>
+          <a:srcRect l="12169" t="44371" r="77627" b="42519"/>
+          <a:stretch/>
+        </p:blipFill>
+        <p:spPr>
+          <a:xfrm>
+            <a:off x="179843" y="1267608"/>
+            <a:ext cx="594066" cy="324036"/>
+          </a:xfrm>
+          <a:prstGeom prst="rect">
+            <a:avLst/>
+          </a:prstGeom>
+        </p:spPr>
+      </p:pic>
+      <p:pic>
+        <p:nvPicPr>
+          <p:cNvPr id="11" name="圖片 10"/>
+          <p:cNvPicPr>
+            <a:picLocks noChangeAspect="1"/>
+          </p:cNvPicPr>
+          <p:nvPr/>
+        </p:nvPicPr>
+        <p:blipFill rotWithShape="1">
+          <a:blip r:embed="rId2">
+            <a:extLst>
+              <a:ext uri="{28A0092B-C50C-407E-A947-70E740481C1C}">
+                <a14:useLocalDpi xmlns:a14="http://schemas.microsoft.com/office/drawing/2010/main" val="0"/>
+              </a:ext>
+            </a:extLst>
+          </a:blip>
+          <a:srcRect l="21945" t="43815" r="66923" b="40890"/>
+          <a:stretch/>
+        </p:blipFill>
+        <p:spPr>
+          <a:xfrm>
+            <a:off x="172000" y="1972028"/>
+            <a:ext cx="648072" cy="378042"/>
+          </a:xfrm>
+          <a:prstGeom prst="rect">
+            <a:avLst/>
+          </a:prstGeom>
+        </p:spPr>
+      </p:pic>
+      <p:cxnSp>
+        <p:nvCxnSpPr>
+          <p:cNvPr id="15" name="直線單箭頭接點 14"/>
+          <p:cNvCxnSpPr/>
+          <p:nvPr/>
+        </p:nvCxnSpPr>
+        <p:spPr>
+          <a:xfrm>
+            <a:off x="820072" y="1514056"/>
+            <a:ext cx="275258" cy="0"/>
+          </a:xfrm>
+          <a:prstGeom prst="straightConnector1">
+            <a:avLst/>
+          </a:prstGeom>
+          <a:ln>
+            <a:tailEnd type="triangle"/>
+          </a:ln>
+        </p:spPr>
+        <p:style>
+          <a:lnRef idx="1">
+            <a:schemeClr val="accent1"/>
+          </a:lnRef>
+          <a:fillRef idx="0">
+            <a:schemeClr val="accent1"/>
+          </a:fillRef>
+          <a:effectRef idx="0">
+            <a:schemeClr val="accent1"/>
+          </a:effectRef>
+          <a:fontRef idx="minor">
+            <a:schemeClr val="tx1"/>
+          </a:fontRef>
+        </p:style>
+      </p:cxnSp>
+      <p:cxnSp>
+        <p:nvCxnSpPr>
+          <p:cNvPr id="21" name="直線單箭頭接點 20"/>
+          <p:cNvCxnSpPr/>
+          <p:nvPr/>
+        </p:nvCxnSpPr>
+        <p:spPr>
+          <a:xfrm>
+            <a:off x="820072" y="811978"/>
+            <a:ext cx="347081" cy="0"/>
+          </a:xfrm>
+          <a:prstGeom prst="straightConnector1">
+            <a:avLst/>
+          </a:prstGeom>
+          <a:ln>
+            <a:tailEnd type="triangle"/>
+          </a:ln>
+        </p:spPr>
+        <p:style>
+          <a:lnRef idx="1">
+            <a:schemeClr val="accent1"/>
+          </a:lnRef>
+          <a:fillRef idx="0">
+            <a:schemeClr val="accent1"/>
+          </a:fillRef>
+          <a:effectRef idx="0">
+            <a:schemeClr val="accent1"/>
+          </a:effectRef>
+          <a:fontRef idx="minor">
+            <a:schemeClr val="tx1"/>
+          </a:fontRef>
+        </p:style>
+      </p:cxnSp>
+      <p:cxnSp>
+        <p:nvCxnSpPr>
+          <p:cNvPr id="22" name="直線單箭頭接點 21"/>
+          <p:cNvCxnSpPr/>
+          <p:nvPr/>
+        </p:nvCxnSpPr>
+        <p:spPr>
+          <a:xfrm>
+            <a:off x="820072" y="2142427"/>
+            <a:ext cx="275258" cy="0"/>
+          </a:xfrm>
+          <a:prstGeom prst="straightConnector1">
+            <a:avLst/>
+          </a:prstGeom>
+          <a:ln>
+            <a:tailEnd type="triangle"/>
+          </a:ln>
+        </p:spPr>
+        <p:style>
+          <a:lnRef idx="1">
+            <a:schemeClr val="accent1"/>
+          </a:lnRef>
+          <a:fillRef idx="0">
+            <a:schemeClr val="accent1"/>
+          </a:fillRef>
+          <a:effectRef idx="0">
+            <a:schemeClr val="accent1"/>
+          </a:effectRef>
+          <a:fontRef idx="minor">
+            <a:schemeClr val="tx1"/>
+          </a:fontRef>
+        </p:style>
+      </p:cxnSp>
+      <p:cxnSp>
+        <p:nvCxnSpPr>
+          <p:cNvPr id="23" name="直線單箭頭接點 22"/>
+          <p:cNvCxnSpPr/>
+          <p:nvPr/>
+        </p:nvCxnSpPr>
+        <p:spPr>
+          <a:xfrm>
+            <a:off x="820072" y="2930853"/>
+            <a:ext cx="275258" cy="0"/>
+          </a:xfrm>
+          <a:prstGeom prst="straightConnector1">
+            <a:avLst/>
+          </a:prstGeom>
+          <a:ln>
+            <a:tailEnd type="triangle"/>
+          </a:ln>
+        </p:spPr>
+        <p:style>
+          <a:lnRef idx="1">
+            <a:schemeClr val="accent1"/>
+          </a:lnRef>
+          <a:fillRef idx="0">
+            <a:schemeClr val="accent1"/>
+          </a:fillRef>
+          <a:effectRef idx="0">
+            <a:schemeClr val="accent1"/>
+          </a:effectRef>
+          <a:fontRef idx="minor">
+            <a:schemeClr val="tx1"/>
+          </a:fontRef>
+        </p:style>
+      </p:cxnSp>
+      <p:sp>
+        <p:nvSpPr>
+          <p:cNvPr id="24" name="矩形 23"/>
+          <p:cNvSpPr/>
+          <p:nvPr/>
+        </p:nvSpPr>
+        <p:spPr>
+          <a:xfrm>
+            <a:off x="379451" y="2567138"/>
+            <a:ext cx="2624007" cy="392415"/>
+          </a:xfrm>
+          <a:prstGeom prst="rect">
+            <a:avLst/>
+          </a:prstGeom>
+        </p:spPr>
+        <p:txBody>
+          <a:bodyPr wrap="square">
+            <a:spAutoFit/>
+          </a:bodyPr>
+          <a:lstStyle/>
+          <a:p>
+            <a:r>
+              <a:rPr lang="zh-TW" altLang="zh-TW" sz="975" b="1" kern="100" dirty="0">
+                <a:solidFill>
+                  <a:srgbClr val="538135"/>
+                </a:solidFill>
+                <a:latin typeface="Segoe UI Symbol" panose="020B0502040204020203" pitchFamily="34" charset="0"/>
+                <a:cs typeface="Segoe UI Symbol" panose="020B0502040204020203" pitchFamily="34" charset="0"/>
+              </a:rPr>
+              <a:t>管理員入口選單（第一層）</a:t>
+            </a:r>
+            <a:r>
+              <a:rPr lang="en-US" altLang="zh-TW" sz="975" b="1" kern="100" dirty="0">
+                <a:solidFill>
+                  <a:srgbClr val="538135"/>
+                </a:solidFill>
+                <a:latin typeface="Segoe UI Symbol" panose="020B0502040204020203" pitchFamily="34" charset="0"/>
+                <a:cs typeface="Segoe UI Symbol" panose="020B0502040204020203" pitchFamily="34" charset="0"/>
+              </a:rPr>
+              <a:t>&lt;*</a:t>
+            </a:r>
+            <a:r>
+              <a:rPr lang="zh-TW" altLang="en-US" sz="975" b="1" kern="100" dirty="0">
+                <a:solidFill>
+                  <a:srgbClr val="538135"/>
+                </a:solidFill>
+                <a:latin typeface="Segoe UI Symbol" panose="020B0502040204020203" pitchFamily="34" charset="0"/>
+                <a:cs typeface="Segoe UI Symbol" panose="020B0502040204020203" pitchFamily="34" charset="0"/>
+              </a:rPr>
+              <a:t>買家不能進入</a:t>
+            </a:r>
+            <a:r>
+              <a:rPr lang="en-US" altLang="zh-TW" sz="975" b="1" kern="100" dirty="0">
+                <a:solidFill>
+                  <a:srgbClr val="538135"/>
+                </a:solidFill>
+                <a:latin typeface="Segoe UI Symbol" panose="020B0502040204020203" pitchFamily="34" charset="0"/>
+                <a:cs typeface="Segoe UI Symbol" panose="020B0502040204020203" pitchFamily="34" charset="0"/>
+              </a:rPr>
+              <a:t>&gt;</a:t>
+            </a:r>
+            <a:endParaRPr lang="zh-TW" altLang="zh-TW" sz="900" kern="100" dirty="0">
+              <a:latin typeface="Calibri" panose="020F0502020204030204" pitchFamily="34" charset="0"/>
+              <a:cs typeface="Times New Roman" panose="02020603050405020304" pitchFamily="18" charset="0"/>
+            </a:endParaRPr>
+          </a:p>
+        </p:txBody>
+      </p:sp>
+      <p:cxnSp>
+        <p:nvCxnSpPr>
+          <p:cNvPr id="26" name="直線單箭頭接點 25"/>
+          <p:cNvCxnSpPr/>
+          <p:nvPr/>
+        </p:nvCxnSpPr>
+        <p:spPr>
+          <a:xfrm>
+            <a:off x="2277469" y="2930853"/>
+            <a:ext cx="648072" cy="0"/>
+          </a:xfrm>
+          <a:prstGeom prst="straightConnector1">
+            <a:avLst/>
+          </a:prstGeom>
+          <a:ln>
+            <a:tailEnd type="triangle"/>
+          </a:ln>
+        </p:spPr>
+        <p:style>
+          <a:lnRef idx="1">
+            <a:schemeClr val="accent1"/>
+          </a:lnRef>
+          <a:fillRef idx="0">
+            <a:schemeClr val="accent1"/>
+          </a:fillRef>
+          <a:effectRef idx="0">
+            <a:schemeClr val="accent1"/>
+          </a:effectRef>
+          <a:fontRef idx="minor">
+            <a:schemeClr val="tx1"/>
+          </a:fontRef>
+        </p:style>
+      </p:cxnSp>
+      <p:pic>
+        <p:nvPicPr>
+          <p:cNvPr id="28" name="圖片 27"/>
+          <p:cNvPicPr>
+            <a:picLocks noChangeAspect="1"/>
+          </p:cNvPicPr>
+          <p:nvPr/>
+        </p:nvPicPr>
+        <p:blipFill>
+          <a:blip r:embed="rId3"/>
+          <a:stretch>
+            <a:fillRect/>
+          </a:stretch>
+        </p:blipFill>
+        <p:spPr>
+          <a:xfrm>
+            <a:off x="1189196" y="2800511"/>
+            <a:ext cx="1088273" cy="1141301"/>
+          </a:xfrm>
+          <a:prstGeom prst="rect">
+            <a:avLst/>
+          </a:prstGeom>
+        </p:spPr>
+      </p:pic>
+      <p:cxnSp>
+        <p:nvCxnSpPr>
+          <p:cNvPr id="30" name="直線單箭頭接點 29"/>
+          <p:cNvCxnSpPr/>
+          <p:nvPr/>
+        </p:nvCxnSpPr>
+        <p:spPr>
+          <a:xfrm>
+            <a:off x="3903642" y="2864206"/>
+            <a:ext cx="1080120" cy="0"/>
+          </a:xfrm>
+          <a:prstGeom prst="straightConnector1">
+            <a:avLst/>
+          </a:prstGeom>
+          <a:ln>
+            <a:tailEnd type="triangle"/>
+          </a:ln>
+        </p:spPr>
+        <p:style>
+          <a:lnRef idx="1">
+            <a:schemeClr val="accent1"/>
+          </a:lnRef>
+          <a:fillRef idx="0">
+            <a:schemeClr val="accent1"/>
+          </a:fillRef>
+          <a:effectRef idx="0">
+            <a:schemeClr val="accent1"/>
+          </a:effectRef>
+          <a:fontRef idx="minor">
+            <a:schemeClr val="tx1"/>
+          </a:fontRef>
+        </p:style>
+      </p:cxnSp>
+      <p:pic>
+        <p:nvPicPr>
+          <p:cNvPr id="35" name="圖片 34"/>
+          <p:cNvPicPr>
+            <a:picLocks noChangeAspect="1"/>
+          </p:cNvPicPr>
+          <p:nvPr/>
+        </p:nvPicPr>
+        <p:blipFill>
+          <a:blip r:embed="rId4"/>
+          <a:stretch>
+            <a:fillRect/>
+          </a:stretch>
+        </p:blipFill>
+        <p:spPr>
+          <a:xfrm>
+            <a:off x="5101096" y="2094406"/>
+            <a:ext cx="1545470" cy="1348857"/>
+          </a:xfrm>
+          <a:prstGeom prst="rect">
+            <a:avLst/>
+          </a:prstGeom>
+        </p:spPr>
+      </p:pic>
+      <p:pic>
+        <p:nvPicPr>
+          <p:cNvPr id="41" name="圖片 40"/>
+          <p:cNvPicPr>
+            <a:picLocks noChangeAspect="1"/>
+          </p:cNvPicPr>
+          <p:nvPr/>
+        </p:nvPicPr>
+        <p:blipFill>
+          <a:blip r:embed="rId5"/>
+          <a:stretch>
+            <a:fillRect/>
+          </a:stretch>
+        </p:blipFill>
+        <p:spPr>
+          <a:xfrm>
+            <a:off x="2929741" y="2700504"/>
+            <a:ext cx="1138527" cy="662998"/>
+          </a:xfrm>
+          <a:prstGeom prst="rect">
+            <a:avLst/>
+          </a:prstGeom>
+        </p:spPr>
+      </p:pic>
+      <p:pic>
+        <p:nvPicPr>
+          <p:cNvPr id="42" name="圖片 41"/>
+          <p:cNvPicPr>
+            <a:picLocks noChangeAspect="1"/>
+          </p:cNvPicPr>
+          <p:nvPr/>
+        </p:nvPicPr>
+        <p:blipFill>
+          <a:blip r:embed="rId6"/>
+          <a:stretch>
+            <a:fillRect/>
+          </a:stretch>
+        </p:blipFill>
+        <p:spPr>
+          <a:xfrm>
+            <a:off x="3368298" y="3404295"/>
+            <a:ext cx="1911262" cy="662998"/>
+          </a:xfrm>
+          <a:prstGeom prst="rect">
+            <a:avLst/>
+          </a:prstGeom>
+        </p:spPr>
+      </p:pic>
+      <p:cxnSp>
+        <p:nvCxnSpPr>
+          <p:cNvPr id="44" name="肘形接點 43"/>
+          <p:cNvCxnSpPr/>
+          <p:nvPr/>
+        </p:nvCxnSpPr>
+        <p:spPr>
+          <a:xfrm>
+            <a:off x="2277469" y="3110641"/>
+            <a:ext cx="1061571" cy="616571"/>
+          </a:xfrm>
+          <a:prstGeom prst="bentConnector3">
+            <a:avLst>
+              <a:gd name="adj1" fmla="val 55653"/>
+            </a:avLst>
+          </a:prstGeom>
+          <a:ln>
+            <a:tailEnd type="triangle"/>
+          </a:ln>
+        </p:spPr>
+        <p:style>
+          <a:lnRef idx="1">
+            <a:schemeClr val="accent1"/>
+          </a:lnRef>
+          <a:fillRef idx="0">
+            <a:schemeClr val="accent1"/>
+          </a:fillRef>
+          <a:effectRef idx="0">
+            <a:schemeClr val="accent1"/>
+          </a:effectRef>
+          <a:fontRef idx="minor">
+            <a:schemeClr val="tx1"/>
+          </a:fontRef>
+        </p:style>
+      </p:cxnSp>
+      <p:pic>
+        <p:nvPicPr>
+          <p:cNvPr id="48" name="圖片 47"/>
+          <p:cNvPicPr>
+            <a:picLocks noChangeAspect="1"/>
+          </p:cNvPicPr>
+          <p:nvPr/>
+        </p:nvPicPr>
+        <p:blipFill>
+          <a:blip r:embed="rId7"/>
+          <a:stretch>
+            <a:fillRect/>
+          </a:stretch>
+        </p:blipFill>
+        <p:spPr>
+          <a:xfrm>
+            <a:off x="5124205" y="3425667"/>
+            <a:ext cx="1586621" cy="251482"/>
+          </a:xfrm>
+          <a:prstGeom prst="rect">
+            <a:avLst/>
+          </a:prstGeom>
+        </p:spPr>
+      </p:pic>
+      <p:cxnSp>
+        <p:nvCxnSpPr>
+          <p:cNvPr id="53" name="直線單箭頭接點 52"/>
+          <p:cNvCxnSpPr/>
+          <p:nvPr/>
+        </p:nvCxnSpPr>
+        <p:spPr>
+          <a:xfrm>
+            <a:off x="4748821" y="3534804"/>
+            <a:ext cx="352275" cy="0"/>
+          </a:xfrm>
+          <a:prstGeom prst="straightConnector1">
+            <a:avLst/>
+          </a:prstGeom>
+          <a:ln>
+            <a:tailEnd type="triangle"/>
+          </a:ln>
+        </p:spPr>
+        <p:style>
+          <a:lnRef idx="1">
+            <a:schemeClr val="accent1"/>
+          </a:lnRef>
+          <a:fillRef idx="0">
+            <a:schemeClr val="accent1"/>
+          </a:fillRef>
+          <a:effectRef idx="0">
+            <a:schemeClr val="accent1"/>
+          </a:effectRef>
+          <a:fontRef idx="minor">
+            <a:schemeClr val="tx1"/>
+          </a:fontRef>
+        </p:style>
+      </p:cxnSp>
+      <p:pic>
+        <p:nvPicPr>
+          <p:cNvPr id="56" name="圖片 55"/>
+          <p:cNvPicPr>
+            <a:picLocks noChangeAspect="1"/>
+          </p:cNvPicPr>
+          <p:nvPr/>
+        </p:nvPicPr>
+        <p:blipFill>
+          <a:blip r:embed="rId8"/>
+          <a:stretch>
+            <a:fillRect/>
+          </a:stretch>
+        </p:blipFill>
+        <p:spPr>
+          <a:xfrm>
+            <a:off x="5465752" y="3818356"/>
+            <a:ext cx="1412870" cy="246910"/>
+          </a:xfrm>
+          <a:prstGeom prst="rect">
+            <a:avLst/>
+          </a:prstGeom>
+        </p:spPr>
+      </p:pic>
+      <p:cxnSp>
+        <p:nvCxnSpPr>
+          <p:cNvPr id="57" name="直線單箭頭接點 56"/>
+          <p:cNvCxnSpPr/>
+          <p:nvPr/>
+        </p:nvCxnSpPr>
+        <p:spPr>
+          <a:xfrm>
+            <a:off x="5231419" y="3924610"/>
+            <a:ext cx="275258" cy="0"/>
+          </a:xfrm>
+          <a:prstGeom prst="straightConnector1">
+            <a:avLst/>
+          </a:prstGeom>
+          <a:ln>
+            <a:tailEnd type="triangle"/>
+          </a:ln>
+        </p:spPr>
+        <p:style>
+          <a:lnRef idx="1">
+            <a:schemeClr val="accent1"/>
+          </a:lnRef>
+          <a:fillRef idx="0">
+            <a:schemeClr val="accent1"/>
+          </a:fillRef>
+          <a:effectRef idx="0">
+            <a:schemeClr val="accent1"/>
+          </a:effectRef>
+          <a:fontRef idx="minor">
+            <a:schemeClr val="tx1"/>
+          </a:fontRef>
+        </p:style>
+      </p:cxnSp>
+      <p:cxnSp>
+        <p:nvCxnSpPr>
+          <p:cNvPr id="58" name="肘形接點 57"/>
+          <p:cNvCxnSpPr/>
+          <p:nvPr/>
+        </p:nvCxnSpPr>
+        <p:spPr>
+          <a:xfrm>
+            <a:off x="2213631" y="3285565"/>
+            <a:ext cx="1956197" cy="1035341"/>
+          </a:xfrm>
+          <a:prstGeom prst="bentConnector3">
+            <a:avLst>
+              <a:gd name="adj1" fmla="val 30718"/>
+            </a:avLst>
+          </a:prstGeom>
+          <a:ln>
+            <a:tailEnd type="triangle"/>
+          </a:ln>
+        </p:spPr>
+        <p:style>
+          <a:lnRef idx="1">
+            <a:schemeClr val="accent1"/>
+          </a:lnRef>
+          <a:fillRef idx="0">
+            <a:schemeClr val="accent1"/>
+          </a:fillRef>
+          <a:effectRef idx="0">
+            <a:schemeClr val="accent1"/>
+          </a:effectRef>
+          <a:fontRef idx="minor">
+            <a:schemeClr val="tx1"/>
+          </a:fontRef>
+        </p:style>
+      </p:cxnSp>
+      <p:pic>
+        <p:nvPicPr>
+          <p:cNvPr id="63" name="圖片 62"/>
+          <p:cNvPicPr>
+            <a:picLocks noChangeAspect="1"/>
+          </p:cNvPicPr>
+          <p:nvPr/>
+        </p:nvPicPr>
+        <p:blipFill>
+          <a:blip r:embed="rId9"/>
+          <a:stretch>
+            <a:fillRect/>
+          </a:stretch>
+        </p:blipFill>
+        <p:spPr>
+          <a:xfrm>
+            <a:off x="4259038" y="4046174"/>
+            <a:ext cx="1449449" cy="525826"/>
+          </a:xfrm>
+          <a:prstGeom prst="rect">
+            <a:avLst/>
+          </a:prstGeom>
+        </p:spPr>
+      </p:pic>
+      <p:pic>
+        <p:nvPicPr>
+          <p:cNvPr id="67" name="圖片 66"/>
+          <p:cNvPicPr>
+            <a:picLocks noChangeAspect="1"/>
+          </p:cNvPicPr>
+          <p:nvPr/>
+        </p:nvPicPr>
+        <p:blipFill>
+          <a:blip r:embed="rId10"/>
+          <a:stretch>
+            <a:fillRect/>
+          </a:stretch>
+        </p:blipFill>
+        <p:spPr>
+          <a:xfrm>
+            <a:off x="1149163" y="469001"/>
+            <a:ext cx="1937882" cy="874348"/>
+          </a:xfrm>
+          <a:prstGeom prst="rect">
+            <a:avLst/>
+          </a:prstGeom>
+        </p:spPr>
+      </p:pic>
+      <p:pic>
+        <p:nvPicPr>
+          <p:cNvPr id="68" name="圖片 67"/>
+          <p:cNvPicPr>
+            <a:picLocks noChangeAspect="1"/>
+          </p:cNvPicPr>
+          <p:nvPr/>
+        </p:nvPicPr>
+        <p:blipFill>
+          <a:blip r:embed="rId11"/>
+          <a:stretch>
+            <a:fillRect/>
+          </a:stretch>
+        </p:blipFill>
+        <p:spPr>
+          <a:xfrm>
+            <a:off x="1189196" y="1384142"/>
+            <a:ext cx="1024434" cy="386888"/>
+          </a:xfrm>
+          <a:prstGeom prst="rect">
+            <a:avLst/>
+          </a:prstGeom>
+        </p:spPr>
+      </p:pic>
+      <p:pic>
+        <p:nvPicPr>
+          <p:cNvPr id="69" name="圖片 68"/>
+          <p:cNvPicPr>
+            <a:picLocks noChangeAspect="1"/>
+          </p:cNvPicPr>
+          <p:nvPr/>
+        </p:nvPicPr>
+        <p:blipFill>
+          <a:blip r:embed="rId12"/>
+          <a:stretch>
+            <a:fillRect/>
+          </a:stretch>
+        </p:blipFill>
+        <p:spPr>
+          <a:xfrm>
+            <a:off x="1167152" y="1847669"/>
+            <a:ext cx="1000967" cy="644240"/>
+          </a:xfrm>
+          <a:prstGeom prst="rect">
+            <a:avLst/>
+          </a:prstGeom>
+        </p:spPr>
+      </p:pic>
+      <p:pic>
+        <p:nvPicPr>
+          <p:cNvPr id="70" name="圖片 69"/>
+          <p:cNvPicPr>
+            <a:picLocks noChangeAspect="1"/>
+          </p:cNvPicPr>
+          <p:nvPr/>
+        </p:nvPicPr>
+        <p:blipFill>
+          <a:blip r:embed="rId13"/>
+          <a:stretch>
+            <a:fillRect/>
+          </a:stretch>
+        </p:blipFill>
+        <p:spPr>
+          <a:xfrm>
+            <a:off x="4253104" y="4628851"/>
+            <a:ext cx="2025572" cy="393226"/>
+          </a:xfrm>
+          <a:prstGeom prst="rect">
+            <a:avLst/>
+          </a:prstGeom>
+        </p:spPr>
+      </p:pic>
+      <p:cxnSp>
+        <p:nvCxnSpPr>
+          <p:cNvPr id="71" name="肘形接點 70"/>
+          <p:cNvCxnSpPr>
+            <a:endCxn id="70" idx="1"/>
+          </p:cNvCxnSpPr>
+          <p:nvPr/>
+        </p:nvCxnSpPr>
+        <p:spPr>
+          <a:xfrm>
+            <a:off x="1937030" y="3449269"/>
+            <a:ext cx="2316074" cy="1376195"/>
+          </a:xfrm>
+          <a:prstGeom prst="bentConnector3">
+            <a:avLst>
+              <a:gd name="adj1" fmla="val 33344"/>
+            </a:avLst>
+          </a:prstGeom>
+          <a:ln>
+            <a:tailEnd type="triangle"/>
+          </a:ln>
+        </p:spPr>
+        <p:style>
+          <a:lnRef idx="1">
+            <a:schemeClr val="accent1"/>
+          </a:lnRef>
+          <a:fillRef idx="0">
+            <a:schemeClr val="accent1"/>
+          </a:fillRef>
+          <a:effectRef idx="0">
+            <a:schemeClr val="accent1"/>
+          </a:effectRef>
+          <a:fontRef idx="minor">
+            <a:schemeClr val="tx1"/>
+          </a:fontRef>
+        </p:style>
+      </p:cxnSp>
+      <p:pic>
+        <p:nvPicPr>
+          <p:cNvPr id="79" name="圖片 78"/>
+          <p:cNvPicPr>
+            <a:picLocks noChangeAspect="1"/>
+          </p:cNvPicPr>
+          <p:nvPr/>
+        </p:nvPicPr>
+        <p:blipFill>
+          <a:blip r:embed="rId14"/>
+          <a:stretch>
+            <a:fillRect/>
+          </a:stretch>
+        </p:blipFill>
+        <p:spPr>
+          <a:xfrm>
+            <a:off x="379450" y="4000477"/>
+            <a:ext cx="2057579" cy="1216258"/>
+          </a:xfrm>
+          <a:prstGeom prst="rect">
+            <a:avLst/>
+          </a:prstGeom>
+        </p:spPr>
+      </p:pic>
+      <p:cxnSp>
+        <p:nvCxnSpPr>
+          <p:cNvPr id="81" name="肘形接點 80"/>
+          <p:cNvCxnSpPr/>
+          <p:nvPr/>
+        </p:nvCxnSpPr>
+        <p:spPr>
+          <a:xfrm rot="5400000">
+            <a:off x="856246" y="3688096"/>
+            <a:ext cx="434738" cy="276601"/>
+          </a:xfrm>
+          <a:prstGeom prst="bentConnector3">
+            <a:avLst>
+              <a:gd name="adj1" fmla="val 703"/>
+            </a:avLst>
+          </a:prstGeom>
+          <a:ln>
+            <a:solidFill>
+              <a:srgbClr val="FF0000"/>
+            </a:solidFill>
+            <a:tailEnd type="triangle"/>
+          </a:ln>
+        </p:spPr>
+        <p:style>
+          <a:lnRef idx="1">
+            <a:schemeClr val="accent1"/>
+          </a:lnRef>
+          <a:fillRef idx="0">
+            <a:schemeClr val="accent1"/>
+          </a:fillRef>
+          <a:effectRef idx="0">
+            <a:schemeClr val="accent1"/>
+          </a:effectRef>
+          <a:fontRef idx="minor">
+            <a:schemeClr val="tx1"/>
+          </a:fontRef>
+        </p:style>
+      </p:cxnSp>
+      <p:sp>
+        <p:nvSpPr>
+          <p:cNvPr id="85" name="右大括弧 84"/>
+          <p:cNvSpPr/>
+          <p:nvPr/>
+        </p:nvSpPr>
+        <p:spPr>
+          <a:xfrm>
+            <a:off x="3095067" y="797404"/>
+            <a:ext cx="322521" cy="1372385"/>
+          </a:xfrm>
+          <a:prstGeom prst="rightBrace">
+            <a:avLst/>
+          </a:prstGeom>
+          <a:ln>
+            <a:solidFill>
+              <a:schemeClr val="tx1"/>
+            </a:solidFill>
+          </a:ln>
+        </p:spPr>
+        <p:style>
+          <a:lnRef idx="1">
+            <a:schemeClr val="accent1"/>
+          </a:lnRef>
+          <a:fillRef idx="0">
+            <a:schemeClr val="accent1"/>
+          </a:fillRef>
+          <a:effectRef idx="0">
+            <a:schemeClr val="accent1"/>
+          </a:effectRef>
+          <a:fontRef idx="minor">
+            <a:schemeClr val="tx1"/>
+          </a:fontRef>
+        </p:style>
+        <p:txBody>
+          <a:bodyPr rtlCol="0" anchor="ctr"/>
+          <a:lstStyle/>
+          <a:p>
+            <a:pPr algn="ctr"/>
+            <a:endParaRPr lang="zh-TW" altLang="en-US" sz="1350" b="1" dirty="0"/>
+          </a:p>
+        </p:txBody>
+      </p:sp>
+      <p:pic>
+        <p:nvPicPr>
+          <p:cNvPr id="87" name="圖片 86"/>
+          <p:cNvPicPr>
+            <a:picLocks noChangeAspect="1"/>
+          </p:cNvPicPr>
+          <p:nvPr/>
+        </p:nvPicPr>
+        <p:blipFill>
+          <a:blip r:embed="rId15"/>
+          <a:stretch>
+            <a:fillRect/>
+          </a:stretch>
+        </p:blipFill>
+        <p:spPr>
+          <a:xfrm>
+            <a:off x="1978337" y="3818356"/>
+            <a:ext cx="727011" cy="246910"/>
+          </a:xfrm>
+          <a:prstGeom prst="rect">
+            <a:avLst/>
+          </a:prstGeom>
+        </p:spPr>
+      </p:pic>
+      <p:cxnSp>
+        <p:nvCxnSpPr>
+          <p:cNvPr id="89" name="肘形接點 88"/>
+          <p:cNvCxnSpPr/>
+          <p:nvPr/>
+        </p:nvCxnSpPr>
+        <p:spPr>
+          <a:xfrm>
+            <a:off x="1834131" y="3854296"/>
+            <a:ext cx="193932" cy="94446"/>
+          </a:xfrm>
+          <a:prstGeom prst="bentConnector3">
+            <a:avLst>
+              <a:gd name="adj1" fmla="val -26"/>
+            </a:avLst>
+          </a:prstGeom>
+          <a:ln>
+            <a:tailEnd type="triangle"/>
+          </a:ln>
+        </p:spPr>
+        <p:style>
+          <a:lnRef idx="1">
+            <a:schemeClr val="accent1"/>
+          </a:lnRef>
+          <a:fillRef idx="0">
+            <a:schemeClr val="accent1"/>
+          </a:fillRef>
+          <a:effectRef idx="0">
+            <a:schemeClr val="accent1"/>
+          </a:effectRef>
+          <a:fontRef idx="minor">
+            <a:schemeClr val="tx1"/>
+          </a:fontRef>
+        </p:style>
+      </p:cxnSp>
+      <p:sp>
+        <p:nvSpPr>
+          <p:cNvPr id="94" name="矩形 93"/>
+          <p:cNvSpPr/>
+          <p:nvPr/>
+        </p:nvSpPr>
+        <p:spPr>
+          <a:xfrm>
+            <a:off x="3481471" y="1384142"/>
+            <a:ext cx="944489" cy="242374"/>
+          </a:xfrm>
+          <a:prstGeom prst="rect">
+            <a:avLst/>
+          </a:prstGeom>
+        </p:spPr>
+        <p:txBody>
+          <a:bodyPr wrap="none">
+            <a:spAutoFit/>
+          </a:bodyPr>
+          <a:lstStyle/>
+          <a:p>
+            <a:r>
+              <a:rPr lang="zh-TW" altLang="zh-TW" sz="975" b="1" dirty="0">
+                <a:solidFill>
+                  <a:srgbClr val="538135"/>
+                </a:solidFill>
+                <a:latin typeface="Calibri" panose="020F0502020204030204" pitchFamily="34" charset="0"/>
+                <a:cs typeface="Times New Roman" panose="02020603050405020304" pitchFamily="18" charset="0"/>
+              </a:rPr>
+              <a:t>買家</a:t>
+            </a:r>
+            <a:r>
+              <a:rPr lang="en-US" altLang="zh-TW" sz="975" b="1" dirty="0">
+                <a:solidFill>
+                  <a:srgbClr val="538135"/>
+                </a:solidFill>
+                <a:latin typeface="Calibri" panose="020F0502020204030204" pitchFamily="34" charset="0"/>
+                <a:cs typeface="Times New Roman" panose="02020603050405020304" pitchFamily="18" charset="0"/>
+              </a:rPr>
+              <a:t> LIFF </a:t>
+            </a:r>
+            <a:r>
+              <a:rPr lang="zh-TW" altLang="zh-TW" sz="975" b="1" dirty="0">
+                <a:solidFill>
+                  <a:srgbClr val="538135"/>
+                </a:solidFill>
+                <a:latin typeface="Calibri" panose="020F0502020204030204" pitchFamily="34" charset="0"/>
+                <a:cs typeface="Times New Roman" panose="02020603050405020304" pitchFamily="18" charset="0"/>
+              </a:rPr>
+              <a:t>頁</a:t>
+            </a:r>
+            <a:r>
+              <a:rPr lang="zh-TW" altLang="en-US" sz="975" b="1" dirty="0">
+                <a:solidFill>
+                  <a:srgbClr val="538135"/>
+                </a:solidFill>
+                <a:latin typeface="Calibri" panose="020F0502020204030204" pitchFamily="34" charset="0"/>
+                <a:cs typeface="Times New Roman" panose="02020603050405020304" pitchFamily="18" charset="0"/>
+              </a:rPr>
+              <a:t>面</a:t>
+            </a:r>
+            <a:endParaRPr lang="zh-TW" altLang="en-US" sz="1350" dirty="0"/>
+          </a:p>
+        </p:txBody>
+      </p:sp>
+      <p:pic>
+        <p:nvPicPr>
+          <p:cNvPr id="96" name="圖片 95"/>
+          <p:cNvPicPr>
+            <a:picLocks noChangeAspect="1"/>
+          </p:cNvPicPr>
+          <p:nvPr/>
+        </p:nvPicPr>
+        <p:blipFill>
+          <a:blip r:embed="rId16"/>
+          <a:stretch>
+            <a:fillRect/>
+          </a:stretch>
+        </p:blipFill>
+        <p:spPr>
+          <a:xfrm>
+            <a:off x="115567" y="870645"/>
+            <a:ext cx="845969" cy="263552"/>
+          </a:xfrm>
+          <a:prstGeom prst="rect">
+            <a:avLst/>
+          </a:prstGeom>
+        </p:spPr>
+      </p:pic>
+      <p:pic>
+        <p:nvPicPr>
+          <p:cNvPr id="97" name="圖片 96"/>
+          <p:cNvPicPr>
+            <a:picLocks noChangeAspect="1"/>
+          </p:cNvPicPr>
+          <p:nvPr/>
+        </p:nvPicPr>
+        <p:blipFill>
+          <a:blip r:embed="rId17"/>
+          <a:stretch>
+            <a:fillRect/>
+          </a:stretch>
+        </p:blipFill>
+        <p:spPr>
+          <a:xfrm>
+            <a:off x="73171" y="1540205"/>
+            <a:ext cx="1087142" cy="232344"/>
+          </a:xfrm>
+          <a:prstGeom prst="rect">
+            <a:avLst/>
+          </a:prstGeom>
+        </p:spPr>
+      </p:pic>
+      <p:pic>
+        <p:nvPicPr>
+          <p:cNvPr id="98" name="圖片 97"/>
+          <p:cNvPicPr>
+            <a:picLocks noChangeAspect="1"/>
+          </p:cNvPicPr>
+          <p:nvPr/>
+        </p:nvPicPr>
+        <p:blipFill>
+          <a:blip r:embed="rId18"/>
+          <a:stretch>
+            <a:fillRect/>
+          </a:stretch>
+        </p:blipFill>
+        <p:spPr>
+          <a:xfrm>
+            <a:off x="44522" y="2275350"/>
+            <a:ext cx="1184388" cy="256842"/>
+          </a:xfrm>
+          <a:prstGeom prst="rect">
+            <a:avLst/>
+          </a:prstGeom>
+        </p:spPr>
+      </p:pic>
+      <p:pic>
+        <p:nvPicPr>
+          <p:cNvPr id="99" name="圖片 98"/>
+          <p:cNvPicPr>
+            <a:picLocks noChangeAspect="1"/>
+          </p:cNvPicPr>
+          <p:nvPr/>
+        </p:nvPicPr>
+        <p:blipFill>
+          <a:blip r:embed="rId19"/>
+          <a:stretch>
+            <a:fillRect/>
+          </a:stretch>
+        </p:blipFill>
+        <p:spPr>
+          <a:xfrm>
+            <a:off x="5022" y="3016287"/>
+            <a:ext cx="1280077" cy="230414"/>
+          </a:xfrm>
+          <a:prstGeom prst="rect">
+            <a:avLst/>
+          </a:prstGeom>
+        </p:spPr>
+      </p:pic>
+      <p:pic>
+        <p:nvPicPr>
+          <p:cNvPr id="100" name="圖片 99"/>
+          <p:cNvPicPr>
+            <a:picLocks noChangeAspect="1"/>
+          </p:cNvPicPr>
+          <p:nvPr/>
+        </p:nvPicPr>
+        <p:blipFill>
+          <a:blip r:embed="rId20"/>
+          <a:stretch>
+            <a:fillRect/>
+          </a:stretch>
+        </p:blipFill>
+        <p:spPr>
+          <a:xfrm>
+            <a:off x="4169828" y="179971"/>
+            <a:ext cx="2523539" cy="1191672"/>
+          </a:xfrm>
+          <a:prstGeom prst="rect">
+            <a:avLst/>
+          </a:prstGeom>
+        </p:spPr>
+      </p:pic>
+      <p:sp>
+        <p:nvSpPr>
+          <p:cNvPr id="2" name="文字方塊 1"/>
+          <p:cNvSpPr txBox="1"/>
+          <p:nvPr/>
+        </p:nvSpPr>
+        <p:spPr>
+          <a:xfrm>
+            <a:off x="1207311" y="1668866"/>
+            <a:ext cx="1986441" cy="230832"/>
+          </a:xfrm>
+          <a:prstGeom prst="rect">
+            <a:avLst/>
+          </a:prstGeom>
+          <a:noFill/>
+        </p:spPr>
+        <p:txBody>
+          <a:bodyPr wrap="none" rtlCol="0">
+            <a:spAutoFit/>
+          </a:bodyPr>
+          <a:lstStyle/>
+          <a:p>
+            <a:r>
+              <a:rPr lang="zh-TW" altLang="en-US" sz="900" b="1" dirty="0"/>
+              <a:t>刪除訂單</a:t>
+            </a:r>
+            <a:r>
+              <a:rPr lang="en-US" altLang="zh-TW" sz="900" b="1" dirty="0">
+                <a:solidFill>
+                  <a:srgbClr val="FF0000"/>
+                </a:solidFill>
+              </a:rPr>
+              <a:t>(</a:t>
+            </a:r>
+            <a:r>
+              <a:rPr lang="zh-TW" altLang="en-US" sz="900" b="1" dirty="0">
+                <a:solidFill>
+                  <a:srgbClr val="FF0000"/>
+                </a:solidFill>
+              </a:rPr>
+              <a:t>當管理員按結單後則無效</a:t>
+            </a:r>
+            <a:r>
+              <a:rPr lang="en-US" altLang="zh-TW" sz="900" b="1" dirty="0">
+                <a:solidFill>
+                  <a:srgbClr val="FF0000"/>
+                </a:solidFill>
+              </a:rPr>
+              <a:t>)</a:t>
+            </a:r>
+            <a:endParaRPr lang="zh-TW" altLang="en-US" sz="900" b="1" dirty="0">
+              <a:solidFill>
+                <a:srgbClr val="FF0000"/>
+              </a:solidFill>
+            </a:endParaRPr>
+          </a:p>
+        </p:txBody>
+      </p:sp>
+    </p:spTree>
+    <p:extLst>
+      <p:ext uri="{BB962C8B-B14F-4D97-AF65-F5344CB8AC3E}">
+        <p14:creationId xmlns:p14="http://schemas.microsoft.com/office/powerpoint/2010/main" val="4127542347"/>
+      </p:ext>
+    </p:extLst>
+  </p:cSld>
+  <p:clrMapOvr>
+    <a:masterClrMapping/>
+  </p:clrMapOvr>
+</p:sld>
+</file>
+
+<file path=ppt/slides/slide4.xml><?xml version="1.0" encoding="utf-8"?>
+<p:sld xmlns:a="http://schemas.openxmlformats.org/drawingml/2006/main" xmlns:r="http://schemas.openxmlformats.org/officeDocument/2006/relationships" xmlns:p="http://schemas.openxmlformats.org/presentationml/2006/main">
+  <p:cSld>
+    <p:spTree>
+      <p:nvGrpSpPr>
+        <p:cNvPr id="1" name=""/>
+        <p:cNvGrpSpPr/>
+        <p:nvPr/>
+      </p:nvGrpSpPr>
+      <p:grpSpPr>
+        <a:xfrm>
+          <a:off x="0" y="0"/>
+          <a:ext cx="0" cy="0"/>
+          <a:chOff x="0" y="0"/>
+          <a:chExt cx="0" cy="0"/>
+        </a:xfrm>
+      </p:grpSpPr>
+      <p:pic>
+        <p:nvPicPr>
+          <p:cNvPr id="2" name="圖片 1"/>
+          <p:cNvPicPr>
+            <a:picLocks noChangeAspect="1"/>
+          </p:cNvPicPr>
+          <p:nvPr/>
+        </p:nvPicPr>
+        <p:blipFill>
+          <a:blip r:embed="rId2"/>
+          <a:stretch>
+            <a:fillRect/>
+          </a:stretch>
+        </p:blipFill>
+        <p:spPr>
+          <a:xfrm>
+            <a:off x="80628" y="2000250"/>
+            <a:ext cx="3726414" cy="5143500"/>
+          </a:xfrm>
+          <a:prstGeom prst="rect">
+            <a:avLst/>
+          </a:prstGeom>
+        </p:spPr>
+      </p:pic>
+    </p:spTree>
+    <p:extLst>
+      <p:ext uri="{BB962C8B-B14F-4D97-AF65-F5344CB8AC3E}">
+        <p14:creationId xmlns:p14="http://schemas.microsoft.com/office/powerpoint/2010/main" val="3016705582"/>
+      </p:ext>
+    </p:extLst>
+  </p:cSld>
+  <p:clrMapOvr>
+    <a:masterClrMapping/>
+  </p:clrMapOvr>
+</p:sld>
+</file>
+
+<file path=ppt/slides/slide5.xml><?xml version="1.0" encoding="utf-8"?>
+<p:sld xmlns:a="http://schemas.openxmlformats.org/drawingml/2006/main" xmlns:r="http://schemas.openxmlformats.org/officeDocument/2006/relationships" xmlns:p="http://schemas.openxmlformats.org/presentationml/2006/main">
+  <p:cSld>
+    <p:spTree>
+      <p:nvGrpSpPr>
+        <p:cNvPr id="1" name=""/>
+        <p:cNvGrpSpPr/>
+        <p:nvPr/>
+      </p:nvGrpSpPr>
+      <p:grpSpPr>
+        <a:xfrm>
+          <a:off x="0" y="0"/>
+          <a:ext cx="0" cy="0"/>
+          <a:chOff x="0" y="0"/>
+          <a:chExt cx="0" cy="0"/>
+        </a:xfrm>
+      </p:grpSpPr>
+      <p:pic>
+        <p:nvPicPr>
+          <p:cNvPr id="4" name="圖片 3"/>
+          <p:cNvPicPr>
+            <a:picLocks noChangeAspect="1"/>
+          </p:cNvPicPr>
+          <p:nvPr/>
+        </p:nvPicPr>
+        <p:blipFill rotWithShape="1">
+          <a:blip r:embed="rId2">
+            <a:extLst>
+              <a:ext uri="{28A0092B-C50C-407E-A947-70E740481C1C}">
+                <a14:useLocalDpi xmlns:a14="http://schemas.microsoft.com/office/drawing/2010/main" val="0"/>
+              </a:ext>
+            </a:extLst>
+          </a:blip>
+          <a:srcRect b="32150"/>
+          <a:stretch/>
+        </p:blipFill>
+        <p:spPr>
+          <a:xfrm>
+            <a:off x="0" y="2000251"/>
+            <a:ext cx="4862304" cy="3562985"/>
+          </a:xfrm>
+          <a:prstGeom prst="rect">
+            <a:avLst/>
+          </a:prstGeom>
+        </p:spPr>
+      </p:pic>
+    </p:spTree>
+    <p:extLst>
+      <p:ext uri="{BB962C8B-B14F-4D97-AF65-F5344CB8AC3E}">
+        <p14:creationId xmlns:p14="http://schemas.microsoft.com/office/powerpoint/2010/main" val="4127836509"/>
+      </p:ext>
+    </p:extLst>
+  </p:cSld>
+  <p:clrMapOvr>
+    <a:masterClrMapping/>
+  </p:clrMapOvr>
+</p:sld>
+</file>
+
+<file path=ppt/slides/slide6.xml><?xml version="1.0" encoding="utf-8"?>
+<p:sld xmlns:a="http://schemas.openxmlformats.org/drawingml/2006/main" xmlns:r="http://schemas.openxmlformats.org/officeDocument/2006/relationships" xmlns:p="http://schemas.openxmlformats.org/presentationml/2006/main">
+  <p:cSld>
+    <p:spTree>
+      <p:nvGrpSpPr>
+        <p:cNvPr id="1" name=""/>
+        <p:cNvGrpSpPr/>
+        <p:nvPr/>
+      </p:nvGrpSpPr>
+      <p:grpSpPr>
+        <a:xfrm>
+          <a:off x="0" y="0"/>
+          <a:ext cx="0" cy="0"/>
+          <a:chOff x="0" y="0"/>
+          <a:chExt cx="0" cy="0"/>
+        </a:xfrm>
+      </p:grpSpPr>
+      <p:pic>
+        <p:nvPicPr>
+          <p:cNvPr id="4" name="圖片 3"/>
+          <p:cNvPicPr>
+            <a:picLocks noChangeAspect="1"/>
+          </p:cNvPicPr>
+          <p:nvPr/>
+        </p:nvPicPr>
+        <p:blipFill rotWithShape="1">
+          <a:blip r:embed="rId2">
+            <a:extLst>
+              <a:ext uri="{28A0092B-C50C-407E-A947-70E740481C1C}">
+                <a14:useLocalDpi xmlns:a14="http://schemas.microsoft.com/office/drawing/2010/main" val="0"/>
+              </a:ext>
+            </a:extLst>
+          </a:blip>
+          <a:srcRect b="41295"/>
+          <a:stretch/>
+        </p:blipFill>
+        <p:spPr>
+          <a:xfrm>
+            <a:off x="6412" y="1975701"/>
+            <a:ext cx="3852443" cy="1890210"/>
+          </a:xfrm>
+          <a:prstGeom prst="rect">
+            <a:avLst/>
+          </a:prstGeom>
+        </p:spPr>
+      </p:pic>
+      <p:pic>
+        <p:nvPicPr>
+          <p:cNvPr id="5" name="圖片 4"/>
+          <p:cNvPicPr>
+            <a:picLocks noChangeAspect="1"/>
+          </p:cNvPicPr>
+          <p:nvPr/>
+        </p:nvPicPr>
+        <p:blipFill>
+          <a:blip r:embed="rId3">
+            <a:extLst>
+              <a:ext uri="{28A0092B-C50C-407E-A947-70E740481C1C}">
+                <a14:useLocalDpi xmlns:a14="http://schemas.microsoft.com/office/drawing/2010/main" val="0"/>
+              </a:ext>
+            </a:extLst>
+          </a:blip>
+          <a:stretch>
+            <a:fillRect/>
+          </a:stretch>
+        </p:blipFill>
+        <p:spPr>
+          <a:xfrm>
+            <a:off x="30262" y="3865911"/>
+            <a:ext cx="3884792" cy="3246859"/>
+          </a:xfrm>
+          <a:prstGeom prst="rect">
+            <a:avLst/>
+          </a:prstGeom>
+        </p:spPr>
+      </p:pic>
+      <p:cxnSp>
+        <p:nvCxnSpPr>
+          <p:cNvPr id="7" name="肘形接點 6"/>
+          <p:cNvCxnSpPr>
+            <a:stCxn id="11" idx="2"/>
+          </p:cNvCxnSpPr>
+          <p:nvPr/>
+        </p:nvCxnSpPr>
+        <p:spPr>
+          <a:xfrm rot="5400000">
+            <a:off x="1201253" y="3235352"/>
+            <a:ext cx="756084" cy="729081"/>
+          </a:xfrm>
+          <a:prstGeom prst="bentConnector3">
+            <a:avLst>
+              <a:gd name="adj1" fmla="val 50000"/>
+            </a:avLst>
+          </a:prstGeom>
+          <a:ln w="28575">
+            <a:solidFill>
+              <a:srgbClr val="FF0000"/>
+            </a:solidFill>
+            <a:tailEnd type="triangle"/>
+          </a:ln>
+        </p:spPr>
+        <p:style>
+          <a:lnRef idx="1">
+            <a:schemeClr val="accent1"/>
+          </a:lnRef>
+          <a:fillRef idx="0">
+            <a:schemeClr val="accent1"/>
+          </a:fillRef>
+          <a:effectRef idx="0">
+            <a:schemeClr val="accent1"/>
+          </a:effectRef>
+          <a:fontRef idx="minor">
+            <a:schemeClr val="tx1"/>
+          </a:fontRef>
+        </p:style>
+      </p:cxnSp>
+      <p:sp>
+        <p:nvSpPr>
+          <p:cNvPr id="11" name="矩形 10"/>
+          <p:cNvSpPr/>
+          <p:nvPr/>
+        </p:nvSpPr>
+        <p:spPr>
+          <a:xfrm>
+            <a:off x="1106742" y="2951820"/>
+            <a:ext cx="1674186" cy="270030"/>
+          </a:xfrm>
+          <a:prstGeom prst="rect">
+            <a:avLst/>
+          </a:prstGeom>
+          <a:noFill/>
+        </p:spPr>
+        <p:style>
+          <a:lnRef idx="2">
+            <a:schemeClr val="accent1">
+              <a:shade val="50000"/>
+            </a:schemeClr>
+          </a:lnRef>
+          <a:fillRef idx="1">
+            <a:schemeClr val="accent1"/>
+          </a:fillRef>
+          <a:effectRef idx="0">
+            <a:schemeClr val="accent1"/>
+          </a:effectRef>
+          <a:fontRef idx="minor">
+            <a:schemeClr val="lt1"/>
+          </a:fontRef>
+        </p:style>
+        <p:txBody>
+          <a:bodyPr rtlCol="0" anchor="ctr"/>
+          <a:lstStyle/>
+          <a:p>
+            <a:pPr algn="ctr"/>
+            <a:endParaRPr lang="zh-TW" altLang="en-US" sz="1350"/>
+          </a:p>
+        </p:txBody>
+      </p:sp>
+    </p:spTree>
+    <p:extLst>
+      <p:ext uri="{BB962C8B-B14F-4D97-AF65-F5344CB8AC3E}">
+        <p14:creationId xmlns:p14="http://schemas.microsoft.com/office/powerpoint/2010/main" val="3275367579"/>
+      </p:ext>
+    </p:extLst>
+  </p:cSld>
+  <p:clrMapOvr>
+    <a:masterClrMapping/>
+  </p:clrMapOvr>
+</p:sld>
+</file>
+
+<file path=ppt/slides/slide7.xml><?xml version="1.0" encoding="utf-8"?>
+<p:sld xmlns:a="http://schemas.openxmlformats.org/drawingml/2006/main" xmlns:r="http://schemas.openxmlformats.org/officeDocument/2006/relationships" xmlns:p="http://schemas.openxmlformats.org/presentationml/2006/main">
+  <p:cSld>
+    <p:spTree>
+      <p:nvGrpSpPr>
+        <p:cNvPr id="1" name=""/>
+        <p:cNvGrpSpPr/>
+        <p:nvPr/>
+      </p:nvGrpSpPr>
+      <p:grpSpPr>
+        <a:xfrm>
+          <a:off x="0" y="0"/>
+          <a:ext cx="0" cy="0"/>
+          <a:chOff x="0" y="0"/>
+          <a:chExt cx="0" cy="0"/>
+        </a:xfrm>
+      </p:grpSpPr>
+      <p:pic>
+        <p:nvPicPr>
+          <p:cNvPr id="4" name="圖片 3"/>
+          <p:cNvPicPr>
+            <a:picLocks noChangeAspect="1"/>
+          </p:cNvPicPr>
+          <p:nvPr/>
+        </p:nvPicPr>
+        <p:blipFill>
+          <a:blip r:embed="rId2">
+            <a:extLst>
+              <a:ext uri="{28A0092B-C50C-407E-A947-70E740481C1C}">
+                <a14:useLocalDpi xmlns:a14="http://schemas.microsoft.com/office/drawing/2010/main" val="0"/>
+              </a:ext>
+            </a:extLst>
+          </a:blip>
+          <a:stretch>
+            <a:fillRect/>
+          </a:stretch>
+        </p:blipFill>
+        <p:spPr>
+          <a:xfrm>
+            <a:off x="188640" y="2005408"/>
+            <a:ext cx="5842857" cy="1550000"/>
+          </a:xfrm>
+          <a:prstGeom prst="rect">
+            <a:avLst/>
+          </a:prstGeom>
+        </p:spPr>
+      </p:pic>
+      <p:sp>
+        <p:nvSpPr>
+          <p:cNvPr id="5" name="文字方塊 4"/>
+          <p:cNvSpPr txBox="1"/>
+          <p:nvPr/>
+        </p:nvSpPr>
+        <p:spPr>
+          <a:xfrm>
+            <a:off x="188640" y="3653899"/>
+            <a:ext cx="5955476" cy="1131079"/>
+          </a:xfrm>
+          <a:prstGeom prst="rect">
+            <a:avLst/>
+          </a:prstGeom>
+          <a:noFill/>
+        </p:spPr>
+        <p:txBody>
+          <a:bodyPr wrap="none" rtlCol="0">
+            <a:spAutoFit/>
+          </a:bodyPr>
+          <a:lstStyle/>
+          <a:p>
+            <a:r>
+              <a:rPr lang="zh-TW" altLang="en-US" sz="1350" dirty="0"/>
+              <a:t>一般大多數版主都是從</a:t>
+            </a:r>
+            <a:r>
+              <a:rPr lang="en-US" altLang="zh-TW" sz="1350" dirty="0"/>
+              <a:t>Line </a:t>
+            </a:r>
+            <a:r>
+              <a:rPr lang="zh-TW" altLang="en-US" sz="1350" dirty="0"/>
+              <a:t>直接</a:t>
+            </a:r>
+            <a:r>
+              <a:rPr lang="en-US" altLang="zh-TW" sz="1350" dirty="0"/>
+              <a:t>PO</a:t>
+            </a:r>
+            <a:r>
+              <a:rPr lang="zh-TW" altLang="en-US" sz="1350" dirty="0"/>
+              <a:t>商品在記事本內</a:t>
+            </a:r>
+            <a:r>
+              <a:rPr lang="en-US" altLang="zh-TW" sz="1350" dirty="0"/>
+              <a:t>,</a:t>
+            </a:r>
+            <a:r>
+              <a:rPr lang="zh-TW" altLang="en-US" sz="1350" dirty="0"/>
+              <a:t>只會修改到價錢及結單日</a:t>
+            </a:r>
+            <a:endParaRPr lang="en-US" altLang="zh-TW" sz="1350" dirty="0"/>
+          </a:p>
+          <a:p>
+            <a:r>
+              <a:rPr lang="zh-TW" altLang="en-US" sz="1350" dirty="0"/>
+              <a:t>以這套系統來看</a:t>
+            </a:r>
+            <a:r>
+              <a:rPr lang="en-US" altLang="zh-TW" sz="1350" dirty="0"/>
+              <a:t>,</a:t>
+            </a:r>
+            <a:r>
+              <a:rPr lang="zh-TW" altLang="en-US" sz="1350" dirty="0"/>
+              <a:t>則需要開啓</a:t>
+            </a:r>
+            <a:r>
+              <a:rPr lang="en-US" altLang="zh-TW" sz="1350" dirty="0"/>
+              <a:t>Google sheet</a:t>
+            </a:r>
+            <a:r>
+              <a:rPr lang="zh-TW" altLang="en-US" sz="1350" dirty="0"/>
+              <a:t>並將商品建立在</a:t>
+            </a:r>
+            <a:r>
+              <a:rPr lang="en-US" altLang="zh-TW" sz="1350" dirty="0"/>
+              <a:t>Products sheet</a:t>
+            </a:r>
+            <a:r>
+              <a:rPr lang="zh-TW" altLang="en-US" sz="1350" dirty="0"/>
+              <a:t>內</a:t>
+            </a:r>
+            <a:endParaRPr lang="en-US" altLang="zh-TW" sz="1350" dirty="0"/>
+          </a:p>
+          <a:p>
+            <a:r>
+              <a:rPr lang="zh-TW" altLang="en-US" sz="1350" dirty="0"/>
+              <a:t>目前於</a:t>
+            </a:r>
+            <a:r>
+              <a:rPr lang="en-US" altLang="zh-TW" sz="1350" dirty="0"/>
+              <a:t>Products Sheet</a:t>
+            </a:r>
+            <a:r>
+              <a:rPr lang="zh-TW" altLang="en-US" sz="1350" dirty="0"/>
+              <a:t>內要手動輸入的欄位為</a:t>
+            </a:r>
+            <a:r>
+              <a:rPr lang="en-US" altLang="zh-TW" sz="1350" dirty="0"/>
+              <a:t>A,B,C,D,F</a:t>
+            </a:r>
+          </a:p>
+          <a:p>
+            <a:r>
+              <a:rPr lang="en-US" altLang="zh-TW" sz="1350" dirty="0"/>
+              <a:t>1) </a:t>
+            </a:r>
+            <a:r>
+              <a:rPr lang="zh-TW" altLang="en-US" sz="1350" dirty="0"/>
+              <a:t>是否有</a:t>
+            </a:r>
+            <a:endParaRPr lang="en-US" altLang="zh-TW" sz="1350" dirty="0"/>
+          </a:p>
+          <a:p>
+            <a:r>
+              <a:rPr lang="zh-TW" altLang="en-US" sz="1350" dirty="0"/>
+              <a:t>商品代碼是否可以由系統產生</a:t>
+            </a:r>
+            <a:r>
+              <a:rPr lang="en-US" altLang="zh-TW" sz="1350" dirty="0"/>
+              <a:t>,</a:t>
+            </a:r>
+            <a:r>
+              <a:rPr lang="zh-TW" altLang="en-US" sz="1350" dirty="0"/>
+              <a:t>這樣版主可以不用想代碼或輸入到重覆的代碼</a:t>
+            </a:r>
+          </a:p>
+        </p:txBody>
+      </p:sp>
+    </p:spTree>
+    <p:extLst>
+      <p:ext uri="{BB962C8B-B14F-4D97-AF65-F5344CB8AC3E}">
+        <p14:creationId xmlns:p14="http://schemas.microsoft.com/office/powerpoint/2010/main" val="2985418562"/>
+      </p:ext>
+    </p:extLst>
+  </p:cSld>
+  <p:clrMapOvr>
+    <a:masterClrMapping/>
+  </p:clrMapOvr>
+</p:sld>
+</file>
+
+<file path=ppt/slides/slide8.xml><?xml version="1.0" encoding="utf-8"?>
+<p:sld xmlns:a="http://schemas.openxmlformats.org/drawingml/2006/main" xmlns:r="http://schemas.openxmlformats.org/officeDocument/2006/relationships" xmlns:p="http://schemas.openxmlformats.org/presentationml/2006/main">
+  <p:cSld>
+    <p:spTree>
+      <p:nvGrpSpPr>
+        <p:cNvPr id="1" name=""/>
+        <p:cNvGrpSpPr/>
+        <p:nvPr/>
+      </p:nvGrpSpPr>
+      <p:grpSpPr>
+        <a:xfrm>
+          <a:off x="0" y="0"/>
+          <a:ext cx="0" cy="0"/>
+          <a:chOff x="0" y="0"/>
+          <a:chExt cx="0" cy="0"/>
+        </a:xfrm>
+      </p:grpSpPr>
+      <p:pic>
+        <p:nvPicPr>
+          <p:cNvPr id="2" name="圖片 1"/>
+          <p:cNvPicPr>
+            <a:picLocks noChangeAspect="1"/>
+          </p:cNvPicPr>
+          <p:nvPr/>
+        </p:nvPicPr>
+        <p:blipFill rotWithShape="1">
+          <a:blip r:embed="rId2"/>
+          <a:srcRect b="12201"/>
+          <a:stretch/>
+        </p:blipFill>
+        <p:spPr>
+          <a:xfrm>
+            <a:off x="3560277" y="2004110"/>
+            <a:ext cx="3297723" cy="3996444"/>
+          </a:xfrm>
+          <a:prstGeom prst="rect">
+            <a:avLst/>
+          </a:prstGeom>
+        </p:spPr>
+      </p:pic>
+      <p:pic>
+        <p:nvPicPr>
+          <p:cNvPr id="3" name="圖片 2"/>
+          <p:cNvPicPr>
+            <a:picLocks noChangeAspect="1"/>
+          </p:cNvPicPr>
+          <p:nvPr/>
+        </p:nvPicPr>
+        <p:blipFill>
+          <a:blip r:embed="rId3" cstate="print">
+            <a:extLst>
+              <a:ext uri="{28A0092B-C50C-407E-A947-70E740481C1C}">
+                <a14:useLocalDpi xmlns:a14="http://schemas.microsoft.com/office/drawing/2010/main" val="0"/>
+              </a:ext>
+            </a:extLst>
+          </a:blip>
+          <a:stretch>
+            <a:fillRect/>
+          </a:stretch>
+        </p:blipFill>
+        <p:spPr>
+          <a:xfrm>
+            <a:off x="0" y="3815916"/>
+            <a:ext cx="3131586" cy="1976998"/>
+          </a:xfrm>
+          <a:prstGeom prst="rect">
+            <a:avLst/>
+          </a:prstGeom>
+        </p:spPr>
+      </p:pic>
+      <p:pic>
+        <p:nvPicPr>
+          <p:cNvPr id="4" name="圖片 3"/>
+          <p:cNvPicPr>
+            <a:picLocks noChangeAspect="1"/>
+          </p:cNvPicPr>
+          <p:nvPr/>
+        </p:nvPicPr>
+        <p:blipFill>
+          <a:blip r:embed="rId4" cstate="print">
+            <a:extLst>
+              <a:ext uri="{28A0092B-C50C-407E-A947-70E740481C1C}">
+                <a14:useLocalDpi xmlns:a14="http://schemas.microsoft.com/office/drawing/2010/main" val="0"/>
+              </a:ext>
+            </a:extLst>
+          </a:blip>
+          <a:stretch>
+            <a:fillRect/>
+          </a:stretch>
+        </p:blipFill>
+        <p:spPr>
+          <a:xfrm>
+            <a:off x="0" y="1945890"/>
+            <a:ext cx="3131586" cy="1976998"/>
+          </a:xfrm>
+          <a:prstGeom prst="rect">
+            <a:avLst/>
+          </a:prstGeom>
+        </p:spPr>
+      </p:pic>
+      <p:sp>
+        <p:nvSpPr>
+          <p:cNvPr id="5" name="橢圓 4"/>
+          <p:cNvSpPr/>
+          <p:nvPr/>
+        </p:nvSpPr>
+        <p:spPr>
+          <a:xfrm>
+            <a:off x="1430778" y="3329862"/>
+            <a:ext cx="540060" cy="270030"/>
+          </a:xfrm>
+          <a:prstGeom prst="ellipse">
+            <a:avLst/>
+          </a:prstGeom>
+          <a:noFill/>
+          <a:ln>
+            <a:solidFill>
+              <a:srgbClr val="FF0000"/>
+            </a:solidFill>
+          </a:ln>
+        </p:spPr>
+        <p:style>
+          <a:lnRef idx="2">
+            <a:schemeClr val="accent1">
+              <a:shade val="50000"/>
+            </a:schemeClr>
+          </a:lnRef>
+          <a:fillRef idx="1">
+            <a:schemeClr val="accent1"/>
+          </a:fillRef>
+          <a:effectRef idx="0">
+            <a:schemeClr val="accent1"/>
+          </a:effectRef>
+          <a:fontRef idx="minor">
+            <a:schemeClr val="lt1"/>
+          </a:fontRef>
+        </p:style>
+        <p:txBody>
+          <a:bodyPr rtlCol="0" anchor="ctr"/>
+          <a:lstStyle/>
+          <a:p>
+            <a:pPr algn="ctr"/>
+            <a:endParaRPr lang="zh-TW" altLang="en-US" sz="1350"/>
+          </a:p>
+        </p:txBody>
+      </p:sp>
+      <p:cxnSp>
+        <p:nvCxnSpPr>
+          <p:cNvPr id="7" name="直線單箭頭接點 6"/>
+          <p:cNvCxnSpPr/>
+          <p:nvPr/>
+        </p:nvCxnSpPr>
+        <p:spPr>
+          <a:xfrm flipH="1">
+            <a:off x="1430778" y="3599892"/>
+            <a:ext cx="270030" cy="1134126"/>
+          </a:xfrm>
+          <a:prstGeom prst="straightConnector1">
+            <a:avLst/>
+          </a:prstGeom>
+          <a:ln>
+            <a:solidFill>
+              <a:srgbClr val="FF0000"/>
+            </a:solidFill>
+            <a:tailEnd type="triangle"/>
+          </a:ln>
+        </p:spPr>
+        <p:style>
+          <a:lnRef idx="1">
+            <a:schemeClr val="accent1"/>
+          </a:lnRef>
+          <a:fillRef idx="0">
+            <a:schemeClr val="accent1"/>
+          </a:fillRef>
+          <a:effectRef idx="0">
+            <a:schemeClr val="accent1"/>
+          </a:effectRef>
+          <a:fontRef idx="minor">
+            <a:schemeClr val="tx1"/>
+          </a:fontRef>
+        </p:style>
+      </p:cxnSp>
+      <p:sp>
+        <p:nvSpPr>
+          <p:cNvPr id="8" name="橢圓 7"/>
+          <p:cNvSpPr/>
+          <p:nvPr/>
+        </p:nvSpPr>
+        <p:spPr>
+          <a:xfrm>
+            <a:off x="1159055" y="4848849"/>
+            <a:ext cx="540060" cy="270030"/>
+          </a:xfrm>
+          <a:prstGeom prst="ellipse">
+            <a:avLst/>
+          </a:prstGeom>
+          <a:noFill/>
+          <a:ln>
+            <a:solidFill>
+              <a:srgbClr val="FF0000"/>
+            </a:solidFill>
+          </a:ln>
+        </p:spPr>
+        <p:style>
+          <a:lnRef idx="2">
+            <a:schemeClr val="accent1">
+              <a:shade val="50000"/>
+            </a:schemeClr>
+          </a:lnRef>
+          <a:fillRef idx="1">
+            <a:schemeClr val="accent1"/>
+          </a:fillRef>
+          <a:effectRef idx="0">
+            <a:schemeClr val="accent1"/>
+          </a:effectRef>
+          <a:fontRef idx="minor">
+            <a:schemeClr val="lt1"/>
+          </a:fontRef>
+        </p:style>
+        <p:txBody>
+          <a:bodyPr rtlCol="0" anchor="ctr"/>
+          <a:lstStyle/>
+          <a:p>
+            <a:pPr algn="ctr"/>
+            <a:endParaRPr lang="zh-TW" altLang="en-US" sz="1350"/>
+          </a:p>
+        </p:txBody>
+      </p:sp>
+      <p:cxnSp>
+        <p:nvCxnSpPr>
+          <p:cNvPr id="10" name="直線單箭頭接點 9"/>
+          <p:cNvCxnSpPr/>
+          <p:nvPr/>
+        </p:nvCxnSpPr>
+        <p:spPr>
+          <a:xfrm flipV="1">
+            <a:off x="1699116" y="4562429"/>
+            <a:ext cx="1783891" cy="421436"/>
+          </a:xfrm>
+          <a:prstGeom prst="straightConnector1">
+            <a:avLst/>
+          </a:prstGeom>
+          <a:ln>
+            <a:solidFill>
+              <a:srgbClr val="FF0000"/>
+            </a:solidFill>
+            <a:tailEnd type="triangle"/>
+          </a:ln>
+        </p:spPr>
+        <p:style>
+          <a:lnRef idx="1">
+            <a:schemeClr val="accent1"/>
+          </a:lnRef>
+          <a:fillRef idx="0">
+            <a:schemeClr val="accent1"/>
+          </a:fillRef>
+          <a:effectRef idx="0">
+            <a:schemeClr val="accent1"/>
+          </a:effectRef>
+          <a:fontRef idx="minor">
+            <a:schemeClr val="tx1"/>
+          </a:fontRef>
+        </p:style>
+      </p:cxnSp>
+      <p:pic>
+        <p:nvPicPr>
+          <p:cNvPr id="12" name="圖片 11"/>
+          <p:cNvPicPr>
+            <a:picLocks noChangeAspect="1"/>
+          </p:cNvPicPr>
+          <p:nvPr/>
+        </p:nvPicPr>
+        <p:blipFill rotWithShape="1">
+          <a:blip r:embed="rId5" cstate="print">
+            <a:extLst>
+              <a:ext uri="{28A0092B-C50C-407E-A947-70E740481C1C}">
+                <a14:useLocalDpi xmlns:a14="http://schemas.microsoft.com/office/drawing/2010/main" val="0"/>
+              </a:ext>
+            </a:extLst>
+          </a:blip>
+          <a:srcRect t="25470"/>
+          <a:stretch/>
+        </p:blipFill>
+        <p:spPr>
+          <a:xfrm>
+            <a:off x="11618" y="5730377"/>
+            <a:ext cx="2823316" cy="1328417"/>
+          </a:xfrm>
+          <a:prstGeom prst="rect">
+            <a:avLst/>
+          </a:prstGeom>
+        </p:spPr>
+      </p:pic>
+      <p:sp>
+        <p:nvSpPr>
+          <p:cNvPr id="13" name="矩形 12"/>
+          <p:cNvSpPr/>
+          <p:nvPr/>
+        </p:nvSpPr>
+        <p:spPr>
+          <a:xfrm>
+            <a:off x="620688" y="5730378"/>
+            <a:ext cx="810090" cy="191773"/>
+          </a:xfrm>
+          <a:prstGeom prst="rect">
+            <a:avLst/>
+          </a:prstGeom>
+          <a:noFill/>
+        </p:spPr>
+        <p:style>
+          <a:lnRef idx="2">
+            <a:schemeClr val="accent1">
+              <a:shade val="50000"/>
+            </a:schemeClr>
+          </a:lnRef>
+          <a:fillRef idx="1">
+            <a:schemeClr val="accent1"/>
+          </a:fillRef>
+          <a:effectRef idx="0">
+            <a:schemeClr val="accent1"/>
+          </a:effectRef>
+          <a:fontRef idx="minor">
+            <a:schemeClr val="lt1"/>
+          </a:fontRef>
+        </p:style>
+        <p:txBody>
+          <a:bodyPr rtlCol="0" anchor="ctr"/>
+          <a:lstStyle/>
+          <a:p>
+            <a:pPr algn="ctr"/>
+            <a:endParaRPr lang="zh-TW" altLang="en-US" sz="1350"/>
+          </a:p>
+        </p:txBody>
+      </p:sp>
+      <p:cxnSp>
+        <p:nvCxnSpPr>
+          <p:cNvPr id="15" name="直線單箭頭接點 14"/>
+          <p:cNvCxnSpPr/>
+          <p:nvPr/>
+        </p:nvCxnSpPr>
+        <p:spPr>
+          <a:xfrm>
+            <a:off x="1322766" y="5907745"/>
+            <a:ext cx="54006" cy="496667"/>
+          </a:xfrm>
+          <a:prstGeom prst="straightConnector1">
+            <a:avLst/>
+          </a:prstGeom>
+          <a:ln>
+            <a:tailEnd type="triangle"/>
+          </a:ln>
+        </p:spPr>
+        <p:style>
+          <a:lnRef idx="1">
+            <a:schemeClr val="accent1"/>
+          </a:lnRef>
+          <a:fillRef idx="0">
+            <a:schemeClr val="accent1"/>
+          </a:fillRef>
+          <a:effectRef idx="0">
+            <a:schemeClr val="accent1"/>
+          </a:effectRef>
+          <a:fontRef idx="minor">
+            <a:schemeClr val="tx1"/>
+          </a:fontRef>
+        </p:style>
+      </p:cxnSp>
+      <p:sp>
+        <p:nvSpPr>
+          <p:cNvPr id="16" name="矩形 15"/>
+          <p:cNvSpPr/>
+          <p:nvPr/>
+        </p:nvSpPr>
+        <p:spPr>
+          <a:xfrm>
+            <a:off x="3320988" y="6394586"/>
+            <a:ext cx="3429000" cy="507831"/>
+          </a:xfrm>
+          <a:prstGeom prst="rect">
+            <a:avLst/>
+          </a:prstGeom>
+        </p:spPr>
+        <p:txBody>
+          <a:bodyPr>
+            <a:spAutoFit/>
+          </a:bodyPr>
+          <a:lstStyle/>
+          <a:p>
+            <a:r>
+              <a:rPr lang="en-US" altLang="zh-TW" sz="900" dirty="0"/>
+              <a:t>Messaging API </a:t>
+            </a:r>
+            <a:r>
+              <a:rPr lang="zh-TW" altLang="en-US" sz="900" dirty="0"/>
+              <a:t>錯誤訊息</a:t>
+            </a:r>
+            <a:endParaRPr lang="en-US" altLang="zh-TW" sz="900" dirty="0"/>
+          </a:p>
+          <a:p>
+            <a:r>
+              <a:rPr lang="zh-TW" altLang="en-US" sz="900" dirty="0"/>
+              <a:t>您無法再將 </a:t>
+            </a:r>
+            <a:r>
+              <a:rPr lang="en-US" altLang="zh-TW" sz="900" dirty="0"/>
+              <a:t>LIFF </a:t>
+            </a:r>
+            <a:r>
+              <a:rPr lang="zh-TW" altLang="en-US" sz="900" dirty="0"/>
+              <a:t>應用程式新增至 </a:t>
+            </a:r>
+            <a:r>
+              <a:rPr lang="en-US" altLang="zh-TW" sz="900" dirty="0"/>
+              <a:t>Messaging API </a:t>
+            </a:r>
+            <a:r>
+              <a:rPr lang="zh-TW" altLang="en-US" sz="900" dirty="0"/>
+              <a:t>通道。請改用 </a:t>
+            </a:r>
+            <a:r>
+              <a:rPr lang="en-US" altLang="zh-TW" sz="900" dirty="0"/>
+              <a:t>LINE </a:t>
+            </a:r>
+            <a:r>
+              <a:rPr lang="zh-TW" altLang="en-US" sz="900" dirty="0"/>
+              <a:t>登入頻道。</a:t>
+            </a:r>
+          </a:p>
+        </p:txBody>
+      </p:sp>
+      <p:cxnSp>
+        <p:nvCxnSpPr>
+          <p:cNvPr id="18" name="直線單箭頭接點 17"/>
+          <p:cNvCxnSpPr>
+            <a:stCxn id="16" idx="1"/>
+          </p:cNvCxnSpPr>
+          <p:nvPr/>
+        </p:nvCxnSpPr>
+        <p:spPr>
+          <a:xfrm flipH="1" flipV="1">
+            <a:off x="2456892" y="6462211"/>
+            <a:ext cx="864096" cy="186291"/>
+          </a:xfrm>
+          <a:prstGeom prst="straightConnector1">
+            <a:avLst/>
+          </a:prstGeom>
+          <a:ln>
+            <a:tailEnd type="triangle"/>
+          </a:ln>
+        </p:spPr>
+        <p:style>
+          <a:lnRef idx="1">
+            <a:schemeClr val="accent1"/>
+          </a:lnRef>
+          <a:fillRef idx="0">
+            <a:schemeClr val="accent1"/>
+          </a:fillRef>
+          <a:effectRef idx="0">
+            <a:schemeClr val="accent1"/>
+          </a:effectRef>
+          <a:fontRef idx="minor">
+            <a:schemeClr val="tx1"/>
+          </a:fontRef>
+        </p:style>
+      </p:cxnSp>
+    </p:spTree>
+    <p:extLst>
+      <p:ext uri="{BB962C8B-B14F-4D97-AF65-F5344CB8AC3E}">
+        <p14:creationId xmlns:p14="http://schemas.microsoft.com/office/powerpoint/2010/main" val="2702851738"/>
+      </p:ext>
+    </p:extLst>
+  </p:cSld>
+  <p:clrMapOvr>
+    <a:masterClrMapping/>
+  </p:clrMapOvr>
+</p:sld>
+</file>
+
+<file path=ppt/slides/slide9.xml><?xml version="1.0" encoding="utf-8"?>
+<p:sld xmlns:a="http://schemas.openxmlformats.org/drawingml/2006/main" xmlns:r="http://schemas.openxmlformats.org/officeDocument/2006/relationships" xmlns:p="http://schemas.openxmlformats.org/presentationml/2006/main">
+  <p:cSld>
+    <p:spTree>
+      <p:nvGrpSpPr>
+        <p:cNvPr id="1" name=""/>
+        <p:cNvGrpSpPr/>
+        <p:nvPr/>
+      </p:nvGrpSpPr>
+      <p:grpSpPr>
+        <a:xfrm>
+          <a:off x="0" y="0"/>
+          <a:ext cx="0" cy="0"/>
+          <a:chOff x="0" y="0"/>
+          <a:chExt cx="0" cy="0"/>
+        </a:xfrm>
+      </p:grpSpPr>
+      <p:pic>
+        <p:nvPicPr>
+          <p:cNvPr id="4" name="圖片 3"/>
+          <p:cNvPicPr>
+            <a:picLocks noChangeAspect="1"/>
+          </p:cNvPicPr>
+          <p:nvPr/>
+        </p:nvPicPr>
+        <p:blipFill>
+          <a:blip r:embed="rId2">
+            <a:extLst>
+              <a:ext uri="{28A0092B-C50C-407E-A947-70E740481C1C}">
+                <a14:useLocalDpi xmlns:a14="http://schemas.microsoft.com/office/drawing/2010/main" val="0"/>
+              </a:ext>
+            </a:extLst>
+          </a:blip>
+          <a:stretch>
+            <a:fillRect/>
+          </a:stretch>
+        </p:blipFill>
+        <p:spPr>
+          <a:xfrm>
+            <a:off x="3318621" y="2000250"/>
+            <a:ext cx="3539380" cy="3844061"/>
+          </a:xfrm>
+          <a:prstGeom prst="rect">
+            <a:avLst/>
+          </a:prstGeom>
+        </p:spPr>
+      </p:pic>
+      <p:pic>
+        <p:nvPicPr>
+          <p:cNvPr id="5" name="圖片 4"/>
+          <p:cNvPicPr>
+            <a:picLocks noChangeAspect="1"/>
+          </p:cNvPicPr>
+          <p:nvPr/>
+        </p:nvPicPr>
+        <p:blipFill>
+          <a:blip r:embed="rId3">
+            <a:extLst>
+              <a:ext uri="{28A0092B-C50C-407E-A947-70E740481C1C}">
+                <a14:useLocalDpi xmlns:a14="http://schemas.microsoft.com/office/drawing/2010/main" val="0"/>
+              </a:ext>
+            </a:extLst>
+          </a:blip>
+          <a:stretch>
+            <a:fillRect/>
+          </a:stretch>
+        </p:blipFill>
+        <p:spPr>
+          <a:xfrm>
+            <a:off x="-81389" y="2000251"/>
+            <a:ext cx="3561324" cy="3867894"/>
+          </a:xfrm>
+          <a:prstGeom prst="rect">
+            <a:avLst/>
+          </a:prstGeom>
+        </p:spPr>
+      </p:pic>
+    </p:spTree>
+    <p:extLst>
+      <p:ext uri="{BB962C8B-B14F-4D97-AF65-F5344CB8AC3E}">
+        <p14:creationId xmlns:p14="http://schemas.microsoft.com/office/powerpoint/2010/main" val="578561926"/>
       </p:ext>
     </p:extLst>
   </p:cSld>

--- a/1-Final/新增 Microsoft PowerPoint 簡報 (5) [自動儲存].pptx
+++ b/1-Final/新增 Microsoft PowerPoint 簡報 (5) [自動儲存].pptx
@@ -16,6 +16,7 @@
     <p:sldId id="263" r:id="rId10"/>
     <p:sldId id="264" r:id="rId11"/>
     <p:sldId id="265" r:id="rId12"/>
+    <p:sldId id="270" r:id="rId13"/>
   </p:sldIdLst>
   <p:sldSz cx="6858000" cy="9144000" type="screen4x3"/>
   <p:notesSz cx="6858000" cy="9144000"/>
@@ -312,7 +313,7 @@
           <a:p>
             <a:fld id="{5BBEAD13-0566-4C6C-97E7-55F17F24B09F}" type="datetimeFigureOut">
               <a:rPr lang="zh-TW" altLang="en-US" smtClean="0"/>
-              <a:t>2026/2/24</a:t>
+              <a:t>2026/3/10</a:t>
             </a:fld>
             <a:endParaRPr lang="zh-TW" altLang="en-US"/>
           </a:p>
@@ -475,7 +476,7 @@
           <a:p>
             <a:fld id="{5BBEAD13-0566-4C6C-97E7-55F17F24B09F}" type="datetimeFigureOut">
               <a:rPr lang="zh-TW" altLang="en-US" smtClean="0"/>
-              <a:t>2026/2/24</a:t>
+              <a:t>2026/3/10</a:t>
             </a:fld>
             <a:endParaRPr lang="zh-TW" altLang="en-US"/>
           </a:p>
@@ -648,7 +649,7 @@
           <a:p>
             <a:fld id="{5BBEAD13-0566-4C6C-97E7-55F17F24B09F}" type="datetimeFigureOut">
               <a:rPr lang="zh-TW" altLang="en-US" smtClean="0"/>
-              <a:t>2026/2/24</a:t>
+              <a:t>2026/3/10</a:t>
             </a:fld>
             <a:endParaRPr lang="zh-TW" altLang="en-US"/>
           </a:p>
@@ -811,7 +812,7 @@
           <a:p>
             <a:fld id="{5BBEAD13-0566-4C6C-97E7-55F17F24B09F}" type="datetimeFigureOut">
               <a:rPr lang="zh-TW" altLang="en-US" smtClean="0"/>
-              <a:t>2026/2/24</a:t>
+              <a:t>2026/3/10</a:t>
             </a:fld>
             <a:endParaRPr lang="zh-TW" altLang="en-US"/>
           </a:p>
@@ -1051,7 +1052,7 @@
           <a:p>
             <a:fld id="{5BBEAD13-0566-4C6C-97E7-55F17F24B09F}" type="datetimeFigureOut">
               <a:rPr lang="zh-TW" altLang="en-US" smtClean="0"/>
-              <a:t>2026/2/24</a:t>
+              <a:t>2026/3/10</a:t>
             </a:fld>
             <a:endParaRPr lang="zh-TW" altLang="en-US"/>
           </a:p>
@@ -1331,7 +1332,7 @@
           <a:p>
             <a:fld id="{5BBEAD13-0566-4C6C-97E7-55F17F24B09F}" type="datetimeFigureOut">
               <a:rPr lang="zh-TW" altLang="en-US" smtClean="0"/>
-              <a:t>2026/2/24</a:t>
+              <a:t>2026/3/10</a:t>
             </a:fld>
             <a:endParaRPr lang="zh-TW" altLang="en-US"/>
           </a:p>
@@ -1745,7 +1746,7 @@
           <a:p>
             <a:fld id="{5BBEAD13-0566-4C6C-97E7-55F17F24B09F}" type="datetimeFigureOut">
               <a:rPr lang="zh-TW" altLang="en-US" smtClean="0"/>
-              <a:t>2026/2/24</a:t>
+              <a:t>2026/3/10</a:t>
             </a:fld>
             <a:endParaRPr lang="zh-TW" altLang="en-US"/>
           </a:p>
@@ -1857,7 +1858,7 @@
           <a:p>
             <a:fld id="{5BBEAD13-0566-4C6C-97E7-55F17F24B09F}" type="datetimeFigureOut">
               <a:rPr lang="zh-TW" altLang="en-US" smtClean="0"/>
-              <a:t>2026/2/24</a:t>
+              <a:t>2026/3/10</a:t>
             </a:fld>
             <a:endParaRPr lang="zh-TW" altLang="en-US"/>
           </a:p>
@@ -1947,7 +1948,7 @@
           <a:p>
             <a:fld id="{5BBEAD13-0566-4C6C-97E7-55F17F24B09F}" type="datetimeFigureOut">
               <a:rPr lang="zh-TW" altLang="en-US" smtClean="0"/>
-              <a:t>2026/2/24</a:t>
+              <a:t>2026/3/10</a:t>
             </a:fld>
             <a:endParaRPr lang="zh-TW" altLang="en-US"/>
           </a:p>
@@ -2217,7 +2218,7 @@
           <a:p>
             <a:fld id="{5BBEAD13-0566-4C6C-97E7-55F17F24B09F}" type="datetimeFigureOut">
               <a:rPr lang="zh-TW" altLang="en-US" smtClean="0"/>
-              <a:t>2026/2/24</a:t>
+              <a:t>2026/3/10</a:t>
             </a:fld>
             <a:endParaRPr lang="zh-TW" altLang="en-US"/>
           </a:p>
@@ -2464,7 +2465,7 @@
           <a:p>
             <a:fld id="{5BBEAD13-0566-4C6C-97E7-55F17F24B09F}" type="datetimeFigureOut">
               <a:rPr lang="zh-TW" altLang="en-US" smtClean="0"/>
-              <a:t>2026/2/24</a:t>
+              <a:t>2026/3/10</a:t>
             </a:fld>
             <a:endParaRPr lang="zh-TW" altLang="en-US"/>
           </a:p>
@@ -2670,7 +2671,7 @@
           <a:p>
             <a:fld id="{5BBEAD13-0566-4C6C-97E7-55F17F24B09F}" type="datetimeFigureOut">
               <a:rPr lang="zh-TW" altLang="en-US" smtClean="0"/>
-              <a:t>2026/2/24</a:t>
+              <a:t>2026/3/10</a:t>
             </a:fld>
             <a:endParaRPr lang="zh-TW" altLang="en-US"/>
           </a:p>
@@ -3045,7 +3046,7 @@
           <p:cNvPr id="4" name="文字方塊 3">
             <a:extLst>
               <a:ext uri="{FF2B5EF4-FFF2-40B4-BE49-F238E27FC236}">
-                <a16:creationId xmlns:a16="http://schemas.microsoft.com/office/drawing/2014/main" id="{7FCD40F2-9077-1A99-8F71-7B84A1B2A76A}"/>
+                <a16:creationId xmlns:a16="http://schemas.microsoft.com/office/drawing/2014/main" xmlns="" id="{7FCD40F2-9077-1A99-8F71-7B84A1B2A76A}"/>
               </a:ext>
             </a:extLst>
           </p:cNvPr>
@@ -5952,6 +5953,379 @@
 </p:sld>
 </file>
 
+<file path=ppt/slides/slide12.xml><?xml version="1.0" encoding="utf-8"?>
+<p:sld xmlns:a="http://schemas.openxmlformats.org/drawingml/2006/main" xmlns:r="http://schemas.openxmlformats.org/officeDocument/2006/relationships" xmlns:p="http://schemas.openxmlformats.org/presentationml/2006/main">
+  <p:cSld>
+    <p:spTree>
+      <p:nvGrpSpPr>
+        <p:cNvPr id="1" name=""/>
+        <p:cNvGrpSpPr/>
+        <p:nvPr/>
+      </p:nvGrpSpPr>
+      <p:grpSpPr>
+        <a:xfrm>
+          <a:off x="0" y="0"/>
+          <a:ext cx="0" cy="0"/>
+          <a:chOff x="0" y="0"/>
+          <a:chExt cx="0" cy="0"/>
+        </a:xfrm>
+      </p:grpSpPr>
+      <p:pic>
+        <p:nvPicPr>
+          <p:cNvPr id="5" name="圖片 4"/>
+          <p:cNvPicPr>
+            <a:picLocks noChangeAspect="1"/>
+          </p:cNvPicPr>
+          <p:nvPr/>
+        </p:nvPicPr>
+        <p:blipFill>
+          <a:blip r:embed="rId2" cstate="print">
+            <a:extLst>
+              <a:ext uri="{28A0092B-C50C-407E-A947-70E740481C1C}">
+                <a14:useLocalDpi xmlns:a14="http://schemas.microsoft.com/office/drawing/2010/main" val="0"/>
+              </a:ext>
+            </a:extLst>
+          </a:blip>
+          <a:stretch>
+            <a:fillRect/>
+          </a:stretch>
+        </p:blipFill>
+        <p:spPr>
+          <a:xfrm>
+            <a:off x="77585" y="3548150"/>
+            <a:ext cx="1623223" cy="3126729"/>
+          </a:xfrm>
+          <a:prstGeom prst="rect">
+            <a:avLst/>
+          </a:prstGeom>
+        </p:spPr>
+      </p:pic>
+      <p:pic>
+        <p:nvPicPr>
+          <p:cNvPr id="10" name="圖片 9"/>
+          <p:cNvPicPr>
+            <a:picLocks noChangeAspect="1"/>
+          </p:cNvPicPr>
+          <p:nvPr/>
+        </p:nvPicPr>
+        <p:blipFill>
+          <a:blip r:embed="rId3">
+            <a:extLst>
+              <a:ext uri="{28A0092B-C50C-407E-A947-70E740481C1C}">
+                <a14:useLocalDpi xmlns:a14="http://schemas.microsoft.com/office/drawing/2010/main" val="0"/>
+              </a:ext>
+            </a:extLst>
+          </a:blip>
+          <a:stretch>
+            <a:fillRect/>
+          </a:stretch>
+        </p:blipFill>
+        <p:spPr>
+          <a:xfrm>
+            <a:off x="0" y="26863"/>
+            <a:ext cx="6858000" cy="1655956"/>
+          </a:xfrm>
+          <a:prstGeom prst="rect">
+            <a:avLst/>
+          </a:prstGeom>
+        </p:spPr>
+      </p:pic>
+      <p:sp>
+        <p:nvSpPr>
+          <p:cNvPr id="11" name="矩形 10"/>
+          <p:cNvSpPr/>
+          <p:nvPr/>
+        </p:nvSpPr>
+        <p:spPr>
+          <a:xfrm>
+            <a:off x="692696" y="5580112"/>
+            <a:ext cx="1008112" cy="194758"/>
+          </a:xfrm>
+          <a:prstGeom prst="rect">
+            <a:avLst/>
+          </a:prstGeom>
+          <a:noFill/>
+          <a:ln>
+            <a:solidFill>
+              <a:srgbClr val="FF0000"/>
+            </a:solidFill>
+          </a:ln>
+        </p:spPr>
+        <p:style>
+          <a:lnRef idx="2">
+            <a:schemeClr val="accent1">
+              <a:shade val="50000"/>
+            </a:schemeClr>
+          </a:lnRef>
+          <a:fillRef idx="1">
+            <a:schemeClr val="accent1"/>
+          </a:fillRef>
+          <a:effectRef idx="0">
+            <a:schemeClr val="accent1"/>
+          </a:effectRef>
+          <a:fontRef idx="minor">
+            <a:schemeClr val="lt1"/>
+          </a:fontRef>
+        </p:style>
+        <p:txBody>
+          <a:bodyPr rtlCol="0" anchor="ctr"/>
+          <a:lstStyle/>
+          <a:p>
+            <a:pPr algn="ctr"/>
+            <a:endParaRPr lang="zh-TW" altLang="en-US"/>
+          </a:p>
+        </p:txBody>
+      </p:sp>
+      <p:cxnSp>
+        <p:nvCxnSpPr>
+          <p:cNvPr id="13" name="直線單箭頭接點 12"/>
+          <p:cNvCxnSpPr>
+            <a:endCxn id="11" idx="3"/>
+          </p:cNvCxnSpPr>
+          <p:nvPr/>
+        </p:nvCxnSpPr>
+        <p:spPr>
+          <a:xfrm flipH="1" flipV="1">
+            <a:off x="1700808" y="5677491"/>
+            <a:ext cx="576064" cy="25371"/>
+          </a:xfrm>
+          <a:prstGeom prst="straightConnector1">
+            <a:avLst/>
+          </a:prstGeom>
+          <a:ln>
+            <a:solidFill>
+              <a:srgbClr val="FF0000"/>
+            </a:solidFill>
+            <a:tailEnd type="triangle"/>
+          </a:ln>
+        </p:spPr>
+        <p:style>
+          <a:lnRef idx="1">
+            <a:schemeClr val="accent1"/>
+          </a:lnRef>
+          <a:fillRef idx="0">
+            <a:schemeClr val="accent1"/>
+          </a:fillRef>
+          <a:effectRef idx="0">
+            <a:schemeClr val="accent1"/>
+          </a:effectRef>
+          <a:fontRef idx="minor">
+            <a:schemeClr val="tx1"/>
+          </a:fontRef>
+        </p:style>
+      </p:cxnSp>
+      <p:sp>
+        <p:nvSpPr>
+          <p:cNvPr id="14" name="文字方塊 13"/>
+          <p:cNvSpPr txBox="1"/>
+          <p:nvPr/>
+        </p:nvSpPr>
+        <p:spPr>
+          <a:xfrm>
+            <a:off x="2216422" y="5513260"/>
+            <a:ext cx="2137124" cy="523220"/>
+          </a:xfrm>
+          <a:prstGeom prst="rect">
+            <a:avLst/>
+          </a:prstGeom>
+          <a:noFill/>
+        </p:spPr>
+        <p:txBody>
+          <a:bodyPr wrap="none" rtlCol="0">
+            <a:spAutoFit/>
+          </a:bodyPr>
+          <a:lstStyle/>
+          <a:p>
+            <a:r>
+              <a:rPr lang="en-US" altLang="zh-TW" sz="1400" b="1" dirty="0" smtClean="0">
+                <a:solidFill>
+                  <a:srgbClr val="FF0000"/>
+                </a:solidFill>
+              </a:rPr>
+              <a:t>“</a:t>
+            </a:r>
+            <a:r>
+              <a:rPr lang="zh-TW" altLang="en-US" sz="1400" b="1" dirty="0" smtClean="0">
+                <a:solidFill>
+                  <a:srgbClr val="FF0000"/>
+                </a:solidFill>
+              </a:rPr>
+              <a:t>我要下單</a:t>
+            </a:r>
+            <a:r>
+              <a:rPr lang="en-US" altLang="zh-TW" sz="1400" b="1" dirty="0" smtClean="0">
+                <a:solidFill>
+                  <a:srgbClr val="FF0000"/>
+                </a:solidFill>
+              </a:rPr>
+              <a:t>”</a:t>
+            </a:r>
+            <a:r>
+              <a:rPr lang="zh-TW" altLang="en-US" sz="1400" b="1" dirty="0" smtClean="0">
+                <a:solidFill>
+                  <a:srgbClr val="FF0000"/>
+                </a:solidFill>
+              </a:rPr>
+              <a:t>下單完就出現</a:t>
+            </a:r>
+            <a:endParaRPr lang="en-US" altLang="zh-TW" sz="1400" b="1" dirty="0" smtClean="0">
+              <a:solidFill>
+                <a:srgbClr val="FF0000"/>
+              </a:solidFill>
+            </a:endParaRPr>
+          </a:p>
+          <a:p>
+            <a:r>
+              <a:rPr lang="zh-TW" altLang="en-US" sz="1400" b="1" dirty="0" smtClean="0">
+                <a:solidFill>
+                  <a:srgbClr val="FF0000"/>
+                </a:solidFill>
+              </a:rPr>
+              <a:t>無法修改刪除</a:t>
+            </a:r>
+            <a:endParaRPr lang="zh-TW" altLang="en-US" sz="1400" b="1" dirty="0">
+              <a:solidFill>
+                <a:srgbClr val="FF0000"/>
+              </a:solidFill>
+            </a:endParaRPr>
+          </a:p>
+        </p:txBody>
+      </p:sp>
+      <p:pic>
+        <p:nvPicPr>
+          <p:cNvPr id="20" name="圖片 19"/>
+          <p:cNvPicPr>
+            <a:picLocks noChangeAspect="1"/>
+          </p:cNvPicPr>
+          <p:nvPr/>
+        </p:nvPicPr>
+        <p:blipFill>
+          <a:blip r:embed="rId4">
+            <a:extLst>
+              <a:ext uri="{28A0092B-C50C-407E-A947-70E740481C1C}">
+                <a14:useLocalDpi xmlns:a14="http://schemas.microsoft.com/office/drawing/2010/main" val="0"/>
+              </a:ext>
+            </a:extLst>
+          </a:blip>
+          <a:stretch>
+            <a:fillRect/>
+          </a:stretch>
+        </p:blipFill>
+        <p:spPr>
+          <a:xfrm>
+            <a:off x="7295" y="1750827"/>
+            <a:ext cx="6858000" cy="1729315"/>
+          </a:xfrm>
+          <a:prstGeom prst="rect">
+            <a:avLst/>
+          </a:prstGeom>
+        </p:spPr>
+      </p:pic>
+      <p:sp>
+        <p:nvSpPr>
+          <p:cNvPr id="21" name="矩形 20"/>
+          <p:cNvSpPr/>
+          <p:nvPr/>
+        </p:nvSpPr>
+        <p:spPr>
+          <a:xfrm>
+            <a:off x="-10752" y="1979712"/>
+            <a:ext cx="4807903" cy="144016"/>
+          </a:xfrm>
+          <a:prstGeom prst="rect">
+            <a:avLst/>
+          </a:prstGeom>
+          <a:noFill/>
+          <a:ln>
+            <a:solidFill>
+              <a:srgbClr val="FF0000"/>
+            </a:solidFill>
+          </a:ln>
+        </p:spPr>
+        <p:style>
+          <a:lnRef idx="2">
+            <a:schemeClr val="accent1">
+              <a:shade val="50000"/>
+            </a:schemeClr>
+          </a:lnRef>
+          <a:fillRef idx="1">
+            <a:schemeClr val="accent1"/>
+          </a:fillRef>
+          <a:effectRef idx="0">
+            <a:schemeClr val="accent1"/>
+          </a:effectRef>
+          <a:fontRef idx="minor">
+            <a:schemeClr val="lt1"/>
+          </a:fontRef>
+        </p:style>
+        <p:txBody>
+          <a:bodyPr rtlCol="0" anchor="ctr"/>
+          <a:lstStyle/>
+          <a:p>
+            <a:pPr algn="ctr"/>
+            <a:endParaRPr lang="zh-TW" altLang="en-US"/>
+          </a:p>
+        </p:txBody>
+      </p:sp>
+      <p:sp>
+        <p:nvSpPr>
+          <p:cNvPr id="22" name="矩形 21"/>
+          <p:cNvSpPr/>
+          <p:nvPr/>
+        </p:nvSpPr>
+        <p:spPr>
+          <a:xfrm>
+            <a:off x="77585" y="249233"/>
+            <a:ext cx="6087719" cy="145179"/>
+          </a:xfrm>
+          <a:prstGeom prst="rect">
+            <a:avLst/>
+          </a:prstGeom>
+          <a:noFill/>
+          <a:ln>
+            <a:solidFill>
+              <a:srgbClr val="FF0000"/>
+            </a:solidFill>
+          </a:ln>
+        </p:spPr>
+        <p:style>
+          <a:lnRef idx="2">
+            <a:schemeClr val="accent1">
+              <a:shade val="50000"/>
+            </a:schemeClr>
+          </a:lnRef>
+          <a:fillRef idx="1">
+            <a:schemeClr val="accent1"/>
+          </a:fillRef>
+          <a:effectRef idx="0">
+            <a:schemeClr val="accent1"/>
+          </a:effectRef>
+          <a:fontRef idx="minor">
+            <a:schemeClr val="lt1"/>
+          </a:fontRef>
+        </p:style>
+        <p:txBody>
+          <a:bodyPr rtlCol="0" anchor="ctr"/>
+          <a:lstStyle/>
+          <a:p>
+            <a:pPr algn="ctr"/>
+            <a:endParaRPr lang="zh-TW" altLang="en-US"/>
+          </a:p>
+        </p:txBody>
+      </p:sp>
+    </p:spTree>
+    <p:extLst>
+      <p:ext uri="{BB962C8B-B14F-4D97-AF65-F5344CB8AC3E}">
+        <p14:creationId xmlns:p14="http://schemas.microsoft.com/office/powerpoint/2010/main" val="610132634"/>
+      </p:ext>
+    </p:extLst>
+  </p:cSld>
+  <p:clrMapOvr>
+    <a:masterClrMapping/>
+  </p:clrMapOvr>
+</p:sld>
+</file>
+
 <file path=ppt/slides/slide2.xml><?xml version="1.0" encoding="utf-8"?>
 <p:sld xmlns:a="http://schemas.openxmlformats.org/drawingml/2006/main" xmlns:r="http://schemas.openxmlformats.org/officeDocument/2006/relationships" xmlns:p="http://schemas.openxmlformats.org/presentationml/2006/main">
   <p:cSld>
@@ -6162,7 +6536,7 @@
           <p:cNvPr id="2" name="群組 1">
             <a:extLst>
               <a:ext uri="{FF2B5EF4-FFF2-40B4-BE49-F238E27FC236}">
-                <a16:creationId xmlns:a16="http://schemas.microsoft.com/office/drawing/2014/main" id="{D408DAFA-1B92-7C95-34F5-E72C2D69ABDF}"/>
+                <a16:creationId xmlns:a16="http://schemas.microsoft.com/office/drawing/2014/main" xmlns="" id="{D408DAFA-1B92-7C95-34F5-E72C2D69ABDF}"/>
               </a:ext>
             </a:extLst>
           </p:cNvPr>
@@ -6182,7 +6556,7 @@
             <p:cNvPr id="3" name="圖片 2">
               <a:extLst>
                 <a:ext uri="{FF2B5EF4-FFF2-40B4-BE49-F238E27FC236}">
-                  <a16:creationId xmlns:a16="http://schemas.microsoft.com/office/drawing/2014/main" id="{405B0C76-FC18-B637-B95D-1083B565A7C4}"/>
+                  <a16:creationId xmlns:a16="http://schemas.microsoft.com/office/drawing/2014/main" xmlns="" id="{405B0C76-FC18-B637-B95D-1083B565A7C4}"/>
                 </a:ext>
               </a:extLst>
             </p:cNvPr>
@@ -6218,7 +6592,7 @@
             <p:cNvPr id="10" name="文字方塊 9">
               <a:extLst>
                 <a:ext uri="{FF2B5EF4-FFF2-40B4-BE49-F238E27FC236}">
-                  <a16:creationId xmlns:a16="http://schemas.microsoft.com/office/drawing/2014/main" id="{E58CF7B8-9C81-AFF9-A43A-5459623C8D03}"/>
+                  <a16:creationId xmlns:a16="http://schemas.microsoft.com/office/drawing/2014/main" xmlns="" id="{E58CF7B8-9C81-AFF9-A43A-5459623C8D03}"/>
                 </a:ext>
               </a:extLst>
             </p:cNvPr>
@@ -6283,7 +6657,7 @@
             <p:cNvPr id="11" name="直線單箭頭接點 10">
               <a:extLst>
                 <a:ext uri="{FF2B5EF4-FFF2-40B4-BE49-F238E27FC236}">
-                  <a16:creationId xmlns:a16="http://schemas.microsoft.com/office/drawing/2014/main" id="{6BD5CEC3-2C63-DDDE-CEC7-CF4E5EAA0D4C}"/>
+                  <a16:creationId xmlns:a16="http://schemas.microsoft.com/office/drawing/2014/main" xmlns="" id="{6BD5CEC3-2C63-DDDE-CEC7-CF4E5EAA0D4C}"/>
                 </a:ext>
               </a:extLst>
             </p:cNvPr>
@@ -6325,7 +6699,7 @@
             <p:cNvPr id="15" name="直線單箭頭接點 14">
               <a:extLst>
                 <a:ext uri="{FF2B5EF4-FFF2-40B4-BE49-F238E27FC236}">
-                  <a16:creationId xmlns:a16="http://schemas.microsoft.com/office/drawing/2014/main" id="{33BEF131-D493-C05F-820D-60E25DDAED5E}"/>
+                  <a16:creationId xmlns:a16="http://schemas.microsoft.com/office/drawing/2014/main" xmlns="" id="{33BEF131-D493-C05F-820D-60E25DDAED5E}"/>
                 </a:ext>
               </a:extLst>
             </p:cNvPr>
@@ -6367,7 +6741,7 @@
             <p:cNvPr id="16" name="肘形接點 27">
               <a:extLst>
                 <a:ext uri="{FF2B5EF4-FFF2-40B4-BE49-F238E27FC236}">
-                  <a16:creationId xmlns:a16="http://schemas.microsoft.com/office/drawing/2014/main" id="{5BABC4F3-5962-7131-0584-408D91D6D616}"/>
+                  <a16:creationId xmlns:a16="http://schemas.microsoft.com/office/drawing/2014/main" xmlns="" id="{5BABC4F3-5962-7131-0584-408D91D6D616}"/>
                 </a:ext>
               </a:extLst>
             </p:cNvPr>
@@ -6414,7 +6788,7 @@
             <p:cNvPr id="17" name="直線單箭頭接點 16">
               <a:extLst>
                 <a:ext uri="{FF2B5EF4-FFF2-40B4-BE49-F238E27FC236}">
-                  <a16:creationId xmlns:a16="http://schemas.microsoft.com/office/drawing/2014/main" id="{420755E3-EB5D-0B85-859A-074843772498}"/>
+                  <a16:creationId xmlns:a16="http://schemas.microsoft.com/office/drawing/2014/main" xmlns="" id="{420755E3-EB5D-0B85-859A-074843772498}"/>
                 </a:ext>
               </a:extLst>
             </p:cNvPr>
@@ -6456,7 +6830,7 @@
             <p:cNvPr id="18" name="肘形接點 40">
               <a:extLst>
                 <a:ext uri="{FF2B5EF4-FFF2-40B4-BE49-F238E27FC236}">
-                  <a16:creationId xmlns:a16="http://schemas.microsoft.com/office/drawing/2014/main" id="{32B29F09-79AB-8DBB-1C85-6C90E1E3A5A7}"/>
+                  <a16:creationId xmlns:a16="http://schemas.microsoft.com/office/drawing/2014/main" xmlns="" id="{32B29F09-79AB-8DBB-1C85-6C90E1E3A5A7}"/>
                 </a:ext>
               </a:extLst>
             </p:cNvPr>
@@ -6502,7 +6876,7 @@
             <p:cNvPr id="19" name="直線單箭頭接點 18">
               <a:extLst>
                 <a:ext uri="{FF2B5EF4-FFF2-40B4-BE49-F238E27FC236}">
-                  <a16:creationId xmlns:a16="http://schemas.microsoft.com/office/drawing/2014/main" id="{F1B7BF54-F6C2-4C76-319E-7F06CE98D2EC}"/>
+                  <a16:creationId xmlns:a16="http://schemas.microsoft.com/office/drawing/2014/main" xmlns="" id="{F1B7BF54-F6C2-4C76-319E-7F06CE98D2EC}"/>
                 </a:ext>
               </a:extLst>
             </p:cNvPr>
@@ -6544,7 +6918,7 @@
             <p:cNvPr id="20" name="圖片 19">
               <a:extLst>
                 <a:ext uri="{FF2B5EF4-FFF2-40B4-BE49-F238E27FC236}">
-                  <a16:creationId xmlns:a16="http://schemas.microsoft.com/office/drawing/2014/main" id="{2165DD2C-0794-D907-5410-EB59DCA93881}"/>
+                  <a16:creationId xmlns:a16="http://schemas.microsoft.com/office/drawing/2014/main" xmlns="" id="{2165DD2C-0794-D907-5410-EB59DCA93881}"/>
                 </a:ext>
               </a:extLst>
             </p:cNvPr>
@@ -6580,7 +6954,7 @@
             <p:cNvPr id="21" name="直線單箭頭接點 20">
               <a:extLst>
                 <a:ext uri="{FF2B5EF4-FFF2-40B4-BE49-F238E27FC236}">
-                  <a16:creationId xmlns:a16="http://schemas.microsoft.com/office/drawing/2014/main" id="{30C38612-BB1A-6AEE-4E34-FBAC35B6CE98}"/>
+                  <a16:creationId xmlns:a16="http://schemas.microsoft.com/office/drawing/2014/main" xmlns="" id="{30C38612-BB1A-6AEE-4E34-FBAC35B6CE98}"/>
                 </a:ext>
               </a:extLst>
             </p:cNvPr>
@@ -6622,7 +6996,7 @@
             <p:cNvPr id="22" name="圖片 21">
               <a:extLst>
                 <a:ext uri="{FF2B5EF4-FFF2-40B4-BE49-F238E27FC236}">
-                  <a16:creationId xmlns:a16="http://schemas.microsoft.com/office/drawing/2014/main" id="{FA4C5856-8DB1-0BA4-18C9-3067FD345DBE}"/>
+                  <a16:creationId xmlns:a16="http://schemas.microsoft.com/office/drawing/2014/main" xmlns="" id="{FA4C5856-8DB1-0BA4-18C9-3067FD345DBE}"/>
                 </a:ext>
               </a:extLst>
             </p:cNvPr>
@@ -6658,7 +7032,7 @@
             <p:cNvPr id="23" name="圖片 22">
               <a:extLst>
                 <a:ext uri="{FF2B5EF4-FFF2-40B4-BE49-F238E27FC236}">
-                  <a16:creationId xmlns:a16="http://schemas.microsoft.com/office/drawing/2014/main" id="{EEAD33F3-15F8-3E7A-9833-0EEB66D5A639}"/>
+                  <a16:creationId xmlns:a16="http://schemas.microsoft.com/office/drawing/2014/main" xmlns="" id="{EEAD33F3-15F8-3E7A-9833-0EEB66D5A639}"/>
                 </a:ext>
               </a:extLst>
             </p:cNvPr>
@@ -6688,7 +7062,7 @@
             <p:cNvPr id="24" name="直線單箭頭接點 23">
               <a:extLst>
                 <a:ext uri="{FF2B5EF4-FFF2-40B4-BE49-F238E27FC236}">
-                  <a16:creationId xmlns:a16="http://schemas.microsoft.com/office/drawing/2014/main" id="{5CC55BE7-28FC-13C8-2E50-27EC44C26040}"/>
+                  <a16:creationId xmlns:a16="http://schemas.microsoft.com/office/drawing/2014/main" xmlns="" id="{5CC55BE7-28FC-13C8-2E50-27EC44C26040}"/>
                 </a:ext>
               </a:extLst>
             </p:cNvPr>
@@ -6732,7 +7106,7 @@
             <p:cNvPr id="25" name="圖片 24">
               <a:extLst>
                 <a:ext uri="{FF2B5EF4-FFF2-40B4-BE49-F238E27FC236}">
-                  <a16:creationId xmlns:a16="http://schemas.microsoft.com/office/drawing/2014/main" id="{3FA6DAE3-22A6-B07C-858B-9566F1D5950A}"/>
+                  <a16:creationId xmlns:a16="http://schemas.microsoft.com/office/drawing/2014/main" xmlns="" id="{3FA6DAE3-22A6-B07C-858B-9566F1D5950A}"/>
                 </a:ext>
               </a:extLst>
             </p:cNvPr>
@@ -6768,7 +7142,7 @@
             <p:cNvPr id="26" name="圖片 25">
               <a:extLst>
                 <a:ext uri="{FF2B5EF4-FFF2-40B4-BE49-F238E27FC236}">
-                  <a16:creationId xmlns:a16="http://schemas.microsoft.com/office/drawing/2014/main" id="{0955305B-C51F-E833-B0D5-F28CE57FBA88}"/>
+                  <a16:creationId xmlns:a16="http://schemas.microsoft.com/office/drawing/2014/main" xmlns="" id="{0955305B-C51F-E833-B0D5-F28CE57FBA88}"/>
                 </a:ext>
               </a:extLst>
             </p:cNvPr>
@@ -6804,7 +7178,7 @@
             <p:cNvPr id="27" name="圖片 26">
               <a:extLst>
                 <a:ext uri="{FF2B5EF4-FFF2-40B4-BE49-F238E27FC236}">
-                  <a16:creationId xmlns:a16="http://schemas.microsoft.com/office/drawing/2014/main" id="{E42FFE4B-C8FC-4FD6-26D2-CDE3B12751A2}"/>
+                  <a16:creationId xmlns:a16="http://schemas.microsoft.com/office/drawing/2014/main" xmlns="" id="{E42FFE4B-C8FC-4FD6-26D2-CDE3B12751A2}"/>
                 </a:ext>
               </a:extLst>
             </p:cNvPr>
@@ -6840,7 +7214,7 @@
             <p:cNvPr id="28" name="圖片 27">
               <a:extLst>
                 <a:ext uri="{FF2B5EF4-FFF2-40B4-BE49-F238E27FC236}">
-                  <a16:creationId xmlns:a16="http://schemas.microsoft.com/office/drawing/2014/main" id="{57C34D73-539C-6703-FDA8-04B6C2A39308}"/>
+                  <a16:creationId xmlns:a16="http://schemas.microsoft.com/office/drawing/2014/main" xmlns="" id="{57C34D73-539C-6703-FDA8-04B6C2A39308}"/>
                 </a:ext>
               </a:extLst>
             </p:cNvPr>

--- a/1-Final/新增 Microsoft PowerPoint 簡報 (5) [自動儲存].pptx
+++ b/1-Final/新增 Microsoft PowerPoint 簡報 (5) [自動儲存].pptx
@@ -307,7 +307,7 @@
           <a:p>
             <a:fld id="{5BBEAD13-0566-4C6C-97E7-55F17F24B09F}" type="datetimeFigureOut">
               <a:rPr lang="zh-TW" altLang="en-US" smtClean="0"/>
-              <a:t>2026/3/11</a:t>
+              <a:t>2026/3/21</a:t>
             </a:fld>
             <a:endParaRPr lang="zh-TW" altLang="en-US"/>
           </a:p>
@@ -470,7 +470,7 @@
           <a:p>
             <a:fld id="{5BBEAD13-0566-4C6C-97E7-55F17F24B09F}" type="datetimeFigureOut">
               <a:rPr lang="zh-TW" altLang="en-US" smtClean="0"/>
-              <a:t>2026/3/11</a:t>
+              <a:t>2026/3/21</a:t>
             </a:fld>
             <a:endParaRPr lang="zh-TW" altLang="en-US"/>
           </a:p>
@@ -643,7 +643,7 @@
           <a:p>
             <a:fld id="{5BBEAD13-0566-4C6C-97E7-55F17F24B09F}" type="datetimeFigureOut">
               <a:rPr lang="zh-TW" altLang="en-US" smtClean="0"/>
-              <a:t>2026/3/11</a:t>
+              <a:t>2026/3/21</a:t>
             </a:fld>
             <a:endParaRPr lang="zh-TW" altLang="en-US"/>
           </a:p>
@@ -806,7 +806,7 @@
           <a:p>
             <a:fld id="{5BBEAD13-0566-4C6C-97E7-55F17F24B09F}" type="datetimeFigureOut">
               <a:rPr lang="zh-TW" altLang="en-US" smtClean="0"/>
-              <a:t>2026/3/11</a:t>
+              <a:t>2026/3/21</a:t>
             </a:fld>
             <a:endParaRPr lang="zh-TW" altLang="en-US"/>
           </a:p>
@@ -1046,7 +1046,7 @@
           <a:p>
             <a:fld id="{5BBEAD13-0566-4C6C-97E7-55F17F24B09F}" type="datetimeFigureOut">
               <a:rPr lang="zh-TW" altLang="en-US" smtClean="0"/>
-              <a:t>2026/3/11</a:t>
+              <a:t>2026/3/21</a:t>
             </a:fld>
             <a:endParaRPr lang="zh-TW" altLang="en-US"/>
           </a:p>
@@ -1326,7 +1326,7 @@
           <a:p>
             <a:fld id="{5BBEAD13-0566-4C6C-97E7-55F17F24B09F}" type="datetimeFigureOut">
               <a:rPr lang="zh-TW" altLang="en-US" smtClean="0"/>
-              <a:t>2026/3/11</a:t>
+              <a:t>2026/3/21</a:t>
             </a:fld>
             <a:endParaRPr lang="zh-TW" altLang="en-US"/>
           </a:p>
@@ -1740,7 +1740,7 @@
           <a:p>
             <a:fld id="{5BBEAD13-0566-4C6C-97E7-55F17F24B09F}" type="datetimeFigureOut">
               <a:rPr lang="zh-TW" altLang="en-US" smtClean="0"/>
-              <a:t>2026/3/11</a:t>
+              <a:t>2026/3/21</a:t>
             </a:fld>
             <a:endParaRPr lang="zh-TW" altLang="en-US"/>
           </a:p>
@@ -1852,7 +1852,7 @@
           <a:p>
             <a:fld id="{5BBEAD13-0566-4C6C-97E7-55F17F24B09F}" type="datetimeFigureOut">
               <a:rPr lang="zh-TW" altLang="en-US" smtClean="0"/>
-              <a:t>2026/3/11</a:t>
+              <a:t>2026/3/21</a:t>
             </a:fld>
             <a:endParaRPr lang="zh-TW" altLang="en-US"/>
           </a:p>
@@ -1942,7 +1942,7 @@
           <a:p>
             <a:fld id="{5BBEAD13-0566-4C6C-97E7-55F17F24B09F}" type="datetimeFigureOut">
               <a:rPr lang="zh-TW" altLang="en-US" smtClean="0"/>
-              <a:t>2026/3/11</a:t>
+              <a:t>2026/3/21</a:t>
             </a:fld>
             <a:endParaRPr lang="zh-TW" altLang="en-US"/>
           </a:p>
@@ -2212,7 +2212,7 @@
           <a:p>
             <a:fld id="{5BBEAD13-0566-4C6C-97E7-55F17F24B09F}" type="datetimeFigureOut">
               <a:rPr lang="zh-TW" altLang="en-US" smtClean="0"/>
-              <a:t>2026/3/11</a:t>
+              <a:t>2026/3/21</a:t>
             </a:fld>
             <a:endParaRPr lang="zh-TW" altLang="en-US"/>
           </a:p>
@@ -2459,7 +2459,7 @@
           <a:p>
             <a:fld id="{5BBEAD13-0566-4C6C-97E7-55F17F24B09F}" type="datetimeFigureOut">
               <a:rPr lang="zh-TW" altLang="en-US" smtClean="0"/>
-              <a:t>2026/3/11</a:t>
+              <a:t>2026/3/21</a:t>
             </a:fld>
             <a:endParaRPr lang="zh-TW" altLang="en-US"/>
           </a:p>
@@ -2665,7 +2665,7 @@
           <a:p>
             <a:fld id="{5BBEAD13-0566-4C6C-97E7-55F17F24B09F}" type="datetimeFigureOut">
               <a:rPr lang="zh-TW" altLang="en-US" smtClean="0"/>
-              <a:t>2026/3/11</a:t>
+              <a:t>2026/3/21</a:t>
             </a:fld>
             <a:endParaRPr lang="zh-TW" altLang="en-US"/>
           </a:p>
@@ -3040,7 +3040,7 @@
           <p:cNvPr id="4" name="文字方塊 3">
             <a:extLst>
               <a:ext uri="{FF2B5EF4-FFF2-40B4-BE49-F238E27FC236}">
-                <a16:creationId xmlns="" xmlns:a16="http://schemas.microsoft.com/office/drawing/2014/main" id="{7FCD40F2-9077-1A99-8F71-7B84A1B2A76A}"/>
+                <a16:creationId xmlns:a16="http://schemas.microsoft.com/office/drawing/2014/main" xmlns="" id="{7FCD40F2-9077-1A99-8F71-7B84A1B2A76A}"/>
               </a:ext>
             </a:extLst>
           </p:cNvPr>
@@ -4438,28 +4438,22 @@
       </p:grpSpPr>
       <p:pic>
         <p:nvPicPr>
-          <p:cNvPr id="3" name="圖片 2"/>
+          <p:cNvPr id="2" name="圖片 1"/>
           <p:cNvPicPr>
             <a:picLocks noChangeAspect="1"/>
           </p:cNvPicPr>
           <p:nvPr/>
         </p:nvPicPr>
         <p:blipFill>
-          <a:blip r:embed="rId2">
-            <a:extLst>
-              <a:ext uri="{28A0092B-C50C-407E-A947-70E740481C1C}">
-                <a14:useLocalDpi xmlns:a14="http://schemas.microsoft.com/office/drawing/2010/main" val="0"/>
-              </a:ext>
-            </a:extLst>
-          </a:blip>
+          <a:blip r:embed="rId2"/>
           <a:stretch>
             <a:fillRect/>
           </a:stretch>
         </p:blipFill>
         <p:spPr>
           <a:xfrm>
-            <a:off x="260648" y="3564"/>
-            <a:ext cx="6192688" cy="9142251"/>
+            <a:off x="357722" y="83823"/>
+            <a:ext cx="6483138" cy="8919204"/>
           </a:xfrm>
           <a:prstGeom prst="rect">
             <a:avLst/>

--- a/1-Final/新增 Microsoft PowerPoint 簡報 (5) [自動儲存].pptx
+++ b/1-Final/新增 Microsoft PowerPoint 簡報 (5) [自動儲存].pptx
@@ -8,9 +8,7 @@
     <p:sldId id="266" r:id="rId2"/>
     <p:sldId id="267" r:id="rId3"/>
     <p:sldId id="257" r:id="rId4"/>
-    <p:sldId id="269" r:id="rId5"/>
-    <p:sldId id="271" r:id="rId6"/>
-    <p:sldId id="270" r:id="rId7"/>
+    <p:sldId id="271" r:id="rId5"/>
   </p:sldIdLst>
   <p:sldSz cx="6858000" cy="9144000" type="screen4x3"/>
   <p:notesSz cx="6858000" cy="9144000"/>
@@ -307,7 +305,7 @@
           <a:p>
             <a:fld id="{5BBEAD13-0566-4C6C-97E7-55F17F24B09F}" type="datetimeFigureOut">
               <a:rPr lang="zh-TW" altLang="en-US" smtClean="0"/>
-              <a:t>2026/3/21</a:t>
+              <a:t>2026/3/22</a:t>
             </a:fld>
             <a:endParaRPr lang="zh-TW" altLang="en-US"/>
           </a:p>
@@ -470,7 +468,7 @@
           <a:p>
             <a:fld id="{5BBEAD13-0566-4C6C-97E7-55F17F24B09F}" type="datetimeFigureOut">
               <a:rPr lang="zh-TW" altLang="en-US" smtClean="0"/>
-              <a:t>2026/3/21</a:t>
+              <a:t>2026/3/22</a:t>
             </a:fld>
             <a:endParaRPr lang="zh-TW" altLang="en-US"/>
           </a:p>
@@ -643,7 +641,7 @@
           <a:p>
             <a:fld id="{5BBEAD13-0566-4C6C-97E7-55F17F24B09F}" type="datetimeFigureOut">
               <a:rPr lang="zh-TW" altLang="en-US" smtClean="0"/>
-              <a:t>2026/3/21</a:t>
+              <a:t>2026/3/22</a:t>
             </a:fld>
             <a:endParaRPr lang="zh-TW" altLang="en-US"/>
           </a:p>
@@ -806,7 +804,7 @@
           <a:p>
             <a:fld id="{5BBEAD13-0566-4C6C-97E7-55F17F24B09F}" type="datetimeFigureOut">
               <a:rPr lang="zh-TW" altLang="en-US" smtClean="0"/>
-              <a:t>2026/3/21</a:t>
+              <a:t>2026/3/22</a:t>
             </a:fld>
             <a:endParaRPr lang="zh-TW" altLang="en-US"/>
           </a:p>
@@ -1046,7 +1044,7 @@
           <a:p>
             <a:fld id="{5BBEAD13-0566-4C6C-97E7-55F17F24B09F}" type="datetimeFigureOut">
               <a:rPr lang="zh-TW" altLang="en-US" smtClean="0"/>
-              <a:t>2026/3/21</a:t>
+              <a:t>2026/3/22</a:t>
             </a:fld>
             <a:endParaRPr lang="zh-TW" altLang="en-US"/>
           </a:p>
@@ -1326,7 +1324,7 @@
           <a:p>
             <a:fld id="{5BBEAD13-0566-4C6C-97E7-55F17F24B09F}" type="datetimeFigureOut">
               <a:rPr lang="zh-TW" altLang="en-US" smtClean="0"/>
-              <a:t>2026/3/21</a:t>
+              <a:t>2026/3/22</a:t>
             </a:fld>
             <a:endParaRPr lang="zh-TW" altLang="en-US"/>
           </a:p>
@@ -1740,7 +1738,7 @@
           <a:p>
             <a:fld id="{5BBEAD13-0566-4C6C-97E7-55F17F24B09F}" type="datetimeFigureOut">
               <a:rPr lang="zh-TW" altLang="en-US" smtClean="0"/>
-              <a:t>2026/3/21</a:t>
+              <a:t>2026/3/22</a:t>
             </a:fld>
             <a:endParaRPr lang="zh-TW" altLang="en-US"/>
           </a:p>
@@ -1852,7 +1850,7 @@
           <a:p>
             <a:fld id="{5BBEAD13-0566-4C6C-97E7-55F17F24B09F}" type="datetimeFigureOut">
               <a:rPr lang="zh-TW" altLang="en-US" smtClean="0"/>
-              <a:t>2026/3/21</a:t>
+              <a:t>2026/3/22</a:t>
             </a:fld>
             <a:endParaRPr lang="zh-TW" altLang="en-US"/>
           </a:p>
@@ -1942,7 +1940,7 @@
           <a:p>
             <a:fld id="{5BBEAD13-0566-4C6C-97E7-55F17F24B09F}" type="datetimeFigureOut">
               <a:rPr lang="zh-TW" altLang="en-US" smtClean="0"/>
-              <a:t>2026/3/21</a:t>
+              <a:t>2026/3/22</a:t>
             </a:fld>
             <a:endParaRPr lang="zh-TW" altLang="en-US"/>
           </a:p>
@@ -2212,7 +2210,7 @@
           <a:p>
             <a:fld id="{5BBEAD13-0566-4C6C-97E7-55F17F24B09F}" type="datetimeFigureOut">
               <a:rPr lang="zh-TW" altLang="en-US" smtClean="0"/>
-              <a:t>2026/3/21</a:t>
+              <a:t>2026/3/22</a:t>
             </a:fld>
             <a:endParaRPr lang="zh-TW" altLang="en-US"/>
           </a:p>
@@ -2459,7 +2457,7 @@
           <a:p>
             <a:fld id="{5BBEAD13-0566-4C6C-97E7-55F17F24B09F}" type="datetimeFigureOut">
               <a:rPr lang="zh-TW" altLang="en-US" smtClean="0"/>
-              <a:t>2026/3/21</a:t>
+              <a:t>2026/3/22</a:t>
             </a:fld>
             <a:endParaRPr lang="zh-TW" altLang="en-US"/>
           </a:p>
@@ -2665,7 +2663,7 @@
           <a:p>
             <a:fld id="{5BBEAD13-0566-4C6C-97E7-55F17F24B09F}" type="datetimeFigureOut">
               <a:rPr lang="zh-TW" altLang="en-US" smtClean="0"/>
-              <a:t>2026/3/21</a:t>
+              <a:t>2026/3/22</a:t>
             </a:fld>
             <a:endParaRPr lang="zh-TW" altLang="en-US"/>
           </a:p>
@@ -3040,7 +3038,7 @@
           <p:cNvPr id="4" name="文字方塊 3">
             <a:extLst>
               <a:ext uri="{FF2B5EF4-FFF2-40B4-BE49-F238E27FC236}">
-                <a16:creationId xmlns:a16="http://schemas.microsoft.com/office/drawing/2014/main" xmlns="" id="{7FCD40F2-9077-1A99-8F71-7B84A1B2A76A}"/>
+                <a16:creationId xmlns="" xmlns:a16="http://schemas.microsoft.com/office/drawing/2014/main" id="{7FCD40F2-9077-1A99-8F71-7B84A1B2A76A}"/>
               </a:ext>
             </a:extLst>
           </p:cNvPr>
@@ -4234,28 +4232,22 @@
       </p:sp>
       <p:pic>
         <p:nvPicPr>
-          <p:cNvPr id="14" name="圖片 13"/>
+          <p:cNvPr id="2" name="圖片 1"/>
           <p:cNvPicPr>
             <a:picLocks noChangeAspect="1"/>
           </p:cNvPicPr>
           <p:nvPr/>
         </p:nvPicPr>
         <p:blipFill>
-          <a:blip r:embed="rId2">
-            <a:extLst>
-              <a:ext uri="{28A0092B-C50C-407E-A947-70E740481C1C}">
-                <a14:useLocalDpi xmlns:a14="http://schemas.microsoft.com/office/drawing/2010/main" val="0"/>
-              </a:ext>
-            </a:extLst>
-          </a:blip>
+          <a:blip r:embed="rId2"/>
           <a:stretch>
             <a:fillRect/>
           </a:stretch>
         </p:blipFill>
         <p:spPr>
           <a:xfrm>
-            <a:off x="11017" y="273554"/>
-            <a:ext cx="6858000" cy="659519"/>
+            <a:off x="-10982" y="4572000"/>
+            <a:ext cx="6858000" cy="4519306"/>
           </a:xfrm>
           <a:prstGeom prst="rect">
             <a:avLst/>
@@ -4264,7 +4256,7 @@
       </p:pic>
       <p:pic>
         <p:nvPicPr>
-          <p:cNvPr id="48" name="圖片 47"/>
+          <p:cNvPr id="3" name="圖片 2"/>
           <p:cNvPicPr>
             <a:picLocks noChangeAspect="1"/>
           </p:cNvPicPr>
@@ -4284,8 +4276,8 @@
         </p:blipFill>
         <p:spPr>
           <a:xfrm>
-            <a:off x="-10982" y="949997"/>
-            <a:ext cx="6858000" cy="853241"/>
+            <a:off x="-10982" y="395536"/>
+            <a:ext cx="6858000" cy="491305"/>
           </a:xfrm>
           <a:prstGeom prst="rect">
             <a:avLst/>
@@ -4294,7 +4286,7 @@
       </p:pic>
       <p:pic>
         <p:nvPicPr>
-          <p:cNvPr id="52" name="圖片 51"/>
+          <p:cNvPr id="4" name="圖片 3"/>
           <p:cNvPicPr>
             <a:picLocks noChangeAspect="1"/>
           </p:cNvPicPr>
@@ -4314,8 +4306,8 @@
         </p:blipFill>
         <p:spPr>
           <a:xfrm>
-            <a:off x="11017" y="1787111"/>
-            <a:ext cx="6858000" cy="816055"/>
+            <a:off x="-10982" y="1043145"/>
+            <a:ext cx="6858000" cy="574623"/>
           </a:xfrm>
           <a:prstGeom prst="rect">
             <a:avLst/>
@@ -4324,7 +4316,7 @@
       </p:pic>
       <p:pic>
         <p:nvPicPr>
-          <p:cNvPr id="53" name="圖片 52"/>
+          <p:cNvPr id="5" name="圖片 4"/>
           <p:cNvPicPr>
             <a:picLocks noChangeAspect="1"/>
           </p:cNvPicPr>
@@ -4344,8 +4336,8 @@
         </p:blipFill>
         <p:spPr>
           <a:xfrm>
-            <a:off x="16367" y="2608098"/>
-            <a:ext cx="6858000" cy="685800"/>
+            <a:off x="-10982" y="2774539"/>
+            <a:ext cx="6858000" cy="640690"/>
           </a:xfrm>
           <a:prstGeom prst="rect">
             <a:avLst/>
@@ -4354,7 +4346,7 @@
       </p:pic>
       <p:pic>
         <p:nvPicPr>
-          <p:cNvPr id="54" name="圖片 53"/>
+          <p:cNvPr id="6" name="圖片 5"/>
           <p:cNvPicPr>
             <a:picLocks noChangeAspect="1"/>
           </p:cNvPicPr>
@@ -4374,8 +4366,8 @@
         </p:blipFill>
         <p:spPr>
           <a:xfrm>
-            <a:off x="-10982" y="3293898"/>
-            <a:ext cx="6858000" cy="1049312"/>
+            <a:off x="0" y="1813308"/>
+            <a:ext cx="6858000" cy="755939"/>
           </a:xfrm>
           <a:prstGeom prst="rect">
             <a:avLst/>
@@ -4384,22 +4376,28 @@
       </p:pic>
       <p:pic>
         <p:nvPicPr>
-          <p:cNvPr id="55" name="圖片 54"/>
+          <p:cNvPr id="7" name="圖片 6"/>
           <p:cNvPicPr>
             <a:picLocks noChangeAspect="1"/>
           </p:cNvPicPr>
           <p:nvPr/>
         </p:nvPicPr>
         <p:blipFill>
-          <a:blip r:embed="rId7"/>
+          <a:blip r:embed="rId7">
+            <a:extLst>
+              <a:ext uri="{28A0092B-C50C-407E-A947-70E740481C1C}">
+                <a14:useLocalDpi xmlns:a14="http://schemas.microsoft.com/office/drawing/2010/main" val="0"/>
+              </a:ext>
+            </a:extLst>
+          </a:blip>
           <a:stretch>
             <a:fillRect/>
           </a:stretch>
         </p:blipFill>
         <p:spPr>
           <a:xfrm>
-            <a:off x="27384" y="4376281"/>
-            <a:ext cx="6858000" cy="4767719"/>
+            <a:off x="0" y="3548201"/>
+            <a:ext cx="6858000" cy="896531"/>
           </a:xfrm>
           <a:prstGeom prst="rect">
             <a:avLst/>
@@ -4474,1308 +4472,6 @@
 </file>
 
 <file path=ppt/slides/slide4.xml><?xml version="1.0" encoding="utf-8"?>
-<p:sld xmlns:a="http://schemas.openxmlformats.org/drawingml/2006/main" xmlns:r="http://schemas.openxmlformats.org/officeDocument/2006/relationships" xmlns:p="http://schemas.openxmlformats.org/presentationml/2006/main">
-  <p:cSld>
-    <p:spTree>
-      <p:nvGrpSpPr>
-        <p:cNvPr id="1" name=""/>
-        <p:cNvGrpSpPr/>
-        <p:nvPr/>
-      </p:nvGrpSpPr>
-      <p:grpSpPr>
-        <a:xfrm>
-          <a:off x="0" y="0"/>
-          <a:ext cx="0" cy="0"/>
-          <a:chOff x="0" y="0"/>
-          <a:chExt cx="0" cy="0"/>
-        </a:xfrm>
-      </p:grpSpPr>
-      <p:pic>
-        <p:nvPicPr>
-          <p:cNvPr id="4" name="圖片 3"/>
-          <p:cNvPicPr>
-            <a:picLocks noChangeAspect="1"/>
-          </p:cNvPicPr>
-          <p:nvPr/>
-        </p:nvPicPr>
-        <p:blipFill rotWithShape="1">
-          <a:blip r:embed="rId2">
-            <a:extLst>
-              <a:ext uri="{28A0092B-C50C-407E-A947-70E740481C1C}">
-                <a14:useLocalDpi xmlns:a14="http://schemas.microsoft.com/office/drawing/2010/main" val="0"/>
-              </a:ext>
-            </a:extLst>
-          </a:blip>
-          <a:srcRect l="2312" t="46001" r="87484" b="40889"/>
-          <a:stretch/>
-        </p:blipFill>
-        <p:spPr>
-          <a:xfrm>
-            <a:off x="150224" y="635386"/>
-            <a:ext cx="594067" cy="324036"/>
-          </a:xfrm>
-          <a:prstGeom prst="rect">
-            <a:avLst/>
-          </a:prstGeom>
-        </p:spPr>
-      </p:pic>
-      <p:pic>
-        <p:nvPicPr>
-          <p:cNvPr id="5" name="圖片 4"/>
-          <p:cNvPicPr>
-            <a:picLocks noChangeAspect="1"/>
-          </p:cNvPicPr>
-          <p:nvPr/>
-        </p:nvPicPr>
-        <p:blipFill rotWithShape="1">
-          <a:blip r:embed="rId2">
-            <a:extLst>
-              <a:ext uri="{28A0092B-C50C-407E-A947-70E740481C1C}">
-                <a14:useLocalDpi xmlns:a14="http://schemas.microsoft.com/office/drawing/2010/main" val="0"/>
-              </a:ext>
-            </a:extLst>
-          </a:blip>
-          <a:srcRect l="24117" t="69920" r="67535" b="16970"/>
-          <a:stretch/>
-        </p:blipFill>
-        <p:spPr>
-          <a:xfrm>
-            <a:off x="287855" y="2768835"/>
-            <a:ext cx="486055" cy="324036"/>
-          </a:xfrm>
-          <a:prstGeom prst="rect">
-            <a:avLst/>
-          </a:prstGeom>
-        </p:spPr>
-      </p:pic>
-      <p:sp>
-        <p:nvSpPr>
-          <p:cNvPr id="7" name="文字方塊 6"/>
-          <p:cNvSpPr txBox="1"/>
-          <p:nvPr/>
-        </p:nvSpPr>
-        <p:spPr>
-          <a:xfrm>
-            <a:off x="233849" y="214243"/>
-            <a:ext cx="1571264" cy="253916"/>
-          </a:xfrm>
-          <a:prstGeom prst="rect">
-            <a:avLst/>
-          </a:prstGeom>
-          <a:noFill/>
-        </p:spPr>
-        <p:txBody>
-          <a:bodyPr wrap="none" rtlCol="0">
-            <a:spAutoFit/>
-          </a:bodyPr>
-          <a:lstStyle/>
-          <a:p>
-            <a:r>
-              <a:rPr lang="en-US" altLang="zh-TW" sz="1050" b="1" dirty="0"/>
-              <a:t>Line </a:t>
-            </a:r>
-            <a:r>
-              <a:rPr lang="zh-TW" altLang="en-US" sz="1050" b="1" dirty="0"/>
-              <a:t>選單畫面 </a:t>
-            </a:r>
-            <a:r>
-              <a:rPr lang="en-US" altLang="zh-TW" sz="1050" b="1" dirty="0"/>
-              <a:t>(4</a:t>
-            </a:r>
-            <a:r>
-              <a:rPr lang="zh-TW" altLang="en-US" sz="1050" b="1" dirty="0"/>
-              <a:t>個按鈕</a:t>
-            </a:r>
-            <a:r>
-              <a:rPr lang="en-US" altLang="zh-TW" sz="1050" b="1" dirty="0"/>
-              <a:t>)</a:t>
-            </a:r>
-            <a:endParaRPr lang="zh-TW" altLang="en-US" sz="1050" b="1" dirty="0"/>
-          </a:p>
-        </p:txBody>
-      </p:sp>
-      <p:pic>
-        <p:nvPicPr>
-          <p:cNvPr id="10" name="圖片 9"/>
-          <p:cNvPicPr>
-            <a:picLocks noChangeAspect="1"/>
-          </p:cNvPicPr>
-          <p:nvPr/>
-        </p:nvPicPr>
-        <p:blipFill rotWithShape="1">
-          <a:blip r:embed="rId2">
-            <a:extLst>
-              <a:ext uri="{28A0092B-C50C-407E-A947-70E740481C1C}">
-                <a14:useLocalDpi xmlns:a14="http://schemas.microsoft.com/office/drawing/2010/main" val="0"/>
-              </a:ext>
-            </a:extLst>
-          </a:blip>
-          <a:srcRect l="12169" t="44371" r="77627" b="42519"/>
-          <a:stretch/>
-        </p:blipFill>
-        <p:spPr>
-          <a:xfrm>
-            <a:off x="179843" y="1267608"/>
-            <a:ext cx="594066" cy="324036"/>
-          </a:xfrm>
-          <a:prstGeom prst="rect">
-            <a:avLst/>
-          </a:prstGeom>
-        </p:spPr>
-      </p:pic>
-      <p:pic>
-        <p:nvPicPr>
-          <p:cNvPr id="11" name="圖片 10"/>
-          <p:cNvPicPr>
-            <a:picLocks noChangeAspect="1"/>
-          </p:cNvPicPr>
-          <p:nvPr/>
-        </p:nvPicPr>
-        <p:blipFill rotWithShape="1">
-          <a:blip r:embed="rId2">
-            <a:extLst>
-              <a:ext uri="{28A0092B-C50C-407E-A947-70E740481C1C}">
-                <a14:useLocalDpi xmlns:a14="http://schemas.microsoft.com/office/drawing/2010/main" val="0"/>
-              </a:ext>
-            </a:extLst>
-          </a:blip>
-          <a:srcRect l="21945" t="43815" r="66923" b="40890"/>
-          <a:stretch/>
-        </p:blipFill>
-        <p:spPr>
-          <a:xfrm>
-            <a:off x="172000" y="1972028"/>
-            <a:ext cx="648072" cy="378042"/>
-          </a:xfrm>
-          <a:prstGeom prst="rect">
-            <a:avLst/>
-          </a:prstGeom>
-        </p:spPr>
-      </p:pic>
-      <p:cxnSp>
-        <p:nvCxnSpPr>
-          <p:cNvPr id="15" name="直線單箭頭接點 14"/>
-          <p:cNvCxnSpPr/>
-          <p:nvPr/>
-        </p:nvCxnSpPr>
-        <p:spPr>
-          <a:xfrm>
-            <a:off x="820072" y="1514056"/>
-            <a:ext cx="275258" cy="0"/>
-          </a:xfrm>
-          <a:prstGeom prst="straightConnector1">
-            <a:avLst/>
-          </a:prstGeom>
-          <a:ln>
-            <a:tailEnd type="triangle"/>
-          </a:ln>
-        </p:spPr>
-        <p:style>
-          <a:lnRef idx="1">
-            <a:schemeClr val="accent1"/>
-          </a:lnRef>
-          <a:fillRef idx="0">
-            <a:schemeClr val="accent1"/>
-          </a:fillRef>
-          <a:effectRef idx="0">
-            <a:schemeClr val="accent1"/>
-          </a:effectRef>
-          <a:fontRef idx="minor">
-            <a:schemeClr val="tx1"/>
-          </a:fontRef>
-        </p:style>
-      </p:cxnSp>
-      <p:cxnSp>
-        <p:nvCxnSpPr>
-          <p:cNvPr id="21" name="直線單箭頭接點 20"/>
-          <p:cNvCxnSpPr/>
-          <p:nvPr/>
-        </p:nvCxnSpPr>
-        <p:spPr>
-          <a:xfrm>
-            <a:off x="820072" y="811978"/>
-            <a:ext cx="347081" cy="0"/>
-          </a:xfrm>
-          <a:prstGeom prst="straightConnector1">
-            <a:avLst/>
-          </a:prstGeom>
-          <a:ln>
-            <a:tailEnd type="triangle"/>
-          </a:ln>
-        </p:spPr>
-        <p:style>
-          <a:lnRef idx="1">
-            <a:schemeClr val="accent1"/>
-          </a:lnRef>
-          <a:fillRef idx="0">
-            <a:schemeClr val="accent1"/>
-          </a:fillRef>
-          <a:effectRef idx="0">
-            <a:schemeClr val="accent1"/>
-          </a:effectRef>
-          <a:fontRef idx="minor">
-            <a:schemeClr val="tx1"/>
-          </a:fontRef>
-        </p:style>
-      </p:cxnSp>
-      <p:cxnSp>
-        <p:nvCxnSpPr>
-          <p:cNvPr id="22" name="直線單箭頭接點 21"/>
-          <p:cNvCxnSpPr/>
-          <p:nvPr/>
-        </p:nvCxnSpPr>
-        <p:spPr>
-          <a:xfrm>
-            <a:off x="820072" y="2142427"/>
-            <a:ext cx="275258" cy="0"/>
-          </a:xfrm>
-          <a:prstGeom prst="straightConnector1">
-            <a:avLst/>
-          </a:prstGeom>
-          <a:ln>
-            <a:tailEnd type="triangle"/>
-          </a:ln>
-        </p:spPr>
-        <p:style>
-          <a:lnRef idx="1">
-            <a:schemeClr val="accent1"/>
-          </a:lnRef>
-          <a:fillRef idx="0">
-            <a:schemeClr val="accent1"/>
-          </a:fillRef>
-          <a:effectRef idx="0">
-            <a:schemeClr val="accent1"/>
-          </a:effectRef>
-          <a:fontRef idx="minor">
-            <a:schemeClr val="tx1"/>
-          </a:fontRef>
-        </p:style>
-      </p:cxnSp>
-      <p:cxnSp>
-        <p:nvCxnSpPr>
-          <p:cNvPr id="23" name="直線單箭頭接點 22"/>
-          <p:cNvCxnSpPr/>
-          <p:nvPr/>
-        </p:nvCxnSpPr>
-        <p:spPr>
-          <a:xfrm>
-            <a:off x="820072" y="2930853"/>
-            <a:ext cx="275258" cy="0"/>
-          </a:xfrm>
-          <a:prstGeom prst="straightConnector1">
-            <a:avLst/>
-          </a:prstGeom>
-          <a:ln>
-            <a:tailEnd type="triangle"/>
-          </a:ln>
-        </p:spPr>
-        <p:style>
-          <a:lnRef idx="1">
-            <a:schemeClr val="accent1"/>
-          </a:lnRef>
-          <a:fillRef idx="0">
-            <a:schemeClr val="accent1"/>
-          </a:fillRef>
-          <a:effectRef idx="0">
-            <a:schemeClr val="accent1"/>
-          </a:effectRef>
-          <a:fontRef idx="minor">
-            <a:schemeClr val="tx1"/>
-          </a:fontRef>
-        </p:style>
-      </p:cxnSp>
-      <p:sp>
-        <p:nvSpPr>
-          <p:cNvPr id="24" name="矩形 23"/>
-          <p:cNvSpPr/>
-          <p:nvPr/>
-        </p:nvSpPr>
-        <p:spPr>
-          <a:xfrm>
-            <a:off x="379451" y="2567138"/>
-            <a:ext cx="2624007" cy="392415"/>
-          </a:xfrm>
-          <a:prstGeom prst="rect">
-            <a:avLst/>
-          </a:prstGeom>
-        </p:spPr>
-        <p:txBody>
-          <a:bodyPr wrap="square">
-            <a:spAutoFit/>
-          </a:bodyPr>
-          <a:lstStyle/>
-          <a:p>
-            <a:r>
-              <a:rPr lang="zh-TW" altLang="zh-TW" sz="975" b="1" kern="100" dirty="0">
-                <a:solidFill>
-                  <a:srgbClr val="538135"/>
-                </a:solidFill>
-                <a:latin typeface="Segoe UI Symbol" panose="020B0502040204020203" pitchFamily="34" charset="0"/>
-                <a:cs typeface="Segoe UI Symbol" panose="020B0502040204020203" pitchFamily="34" charset="0"/>
-              </a:rPr>
-              <a:t>管理員入口選單（第一層）</a:t>
-            </a:r>
-            <a:r>
-              <a:rPr lang="en-US" altLang="zh-TW" sz="975" b="1" kern="100" dirty="0">
-                <a:solidFill>
-                  <a:srgbClr val="538135"/>
-                </a:solidFill>
-                <a:latin typeface="Segoe UI Symbol" panose="020B0502040204020203" pitchFamily="34" charset="0"/>
-                <a:cs typeface="Segoe UI Symbol" panose="020B0502040204020203" pitchFamily="34" charset="0"/>
-              </a:rPr>
-              <a:t>&lt;*</a:t>
-            </a:r>
-            <a:r>
-              <a:rPr lang="zh-TW" altLang="en-US" sz="975" b="1" kern="100" dirty="0">
-                <a:solidFill>
-                  <a:srgbClr val="538135"/>
-                </a:solidFill>
-                <a:latin typeface="Segoe UI Symbol" panose="020B0502040204020203" pitchFamily="34" charset="0"/>
-                <a:cs typeface="Segoe UI Symbol" panose="020B0502040204020203" pitchFamily="34" charset="0"/>
-              </a:rPr>
-              <a:t>買家不能進入</a:t>
-            </a:r>
-            <a:r>
-              <a:rPr lang="en-US" altLang="zh-TW" sz="975" b="1" kern="100" dirty="0">
-                <a:solidFill>
-                  <a:srgbClr val="538135"/>
-                </a:solidFill>
-                <a:latin typeface="Segoe UI Symbol" panose="020B0502040204020203" pitchFamily="34" charset="0"/>
-                <a:cs typeface="Segoe UI Symbol" panose="020B0502040204020203" pitchFamily="34" charset="0"/>
-              </a:rPr>
-              <a:t>&gt;</a:t>
-            </a:r>
-            <a:endParaRPr lang="zh-TW" altLang="zh-TW" sz="900" kern="100" dirty="0">
-              <a:latin typeface="Calibri" panose="020F0502020204030204" pitchFamily="34" charset="0"/>
-              <a:cs typeface="Times New Roman" panose="02020603050405020304" pitchFamily="18" charset="0"/>
-            </a:endParaRPr>
-          </a:p>
-        </p:txBody>
-      </p:sp>
-      <p:cxnSp>
-        <p:nvCxnSpPr>
-          <p:cNvPr id="26" name="直線單箭頭接點 25"/>
-          <p:cNvCxnSpPr/>
-          <p:nvPr/>
-        </p:nvCxnSpPr>
-        <p:spPr>
-          <a:xfrm>
-            <a:off x="2277469" y="2930853"/>
-            <a:ext cx="648072" cy="0"/>
-          </a:xfrm>
-          <a:prstGeom prst="straightConnector1">
-            <a:avLst/>
-          </a:prstGeom>
-          <a:ln>
-            <a:tailEnd type="triangle"/>
-          </a:ln>
-        </p:spPr>
-        <p:style>
-          <a:lnRef idx="1">
-            <a:schemeClr val="accent1"/>
-          </a:lnRef>
-          <a:fillRef idx="0">
-            <a:schemeClr val="accent1"/>
-          </a:fillRef>
-          <a:effectRef idx="0">
-            <a:schemeClr val="accent1"/>
-          </a:effectRef>
-          <a:fontRef idx="minor">
-            <a:schemeClr val="tx1"/>
-          </a:fontRef>
-        </p:style>
-      </p:cxnSp>
-      <p:pic>
-        <p:nvPicPr>
-          <p:cNvPr id="28" name="圖片 27"/>
-          <p:cNvPicPr>
-            <a:picLocks noChangeAspect="1"/>
-          </p:cNvPicPr>
-          <p:nvPr/>
-        </p:nvPicPr>
-        <p:blipFill>
-          <a:blip r:embed="rId3"/>
-          <a:stretch>
-            <a:fillRect/>
-          </a:stretch>
-        </p:blipFill>
-        <p:spPr>
-          <a:xfrm>
-            <a:off x="1189196" y="2800511"/>
-            <a:ext cx="1088273" cy="1141301"/>
-          </a:xfrm>
-          <a:prstGeom prst="rect">
-            <a:avLst/>
-          </a:prstGeom>
-        </p:spPr>
-      </p:pic>
-      <p:cxnSp>
-        <p:nvCxnSpPr>
-          <p:cNvPr id="30" name="直線單箭頭接點 29"/>
-          <p:cNvCxnSpPr/>
-          <p:nvPr/>
-        </p:nvCxnSpPr>
-        <p:spPr>
-          <a:xfrm>
-            <a:off x="3903642" y="2864206"/>
-            <a:ext cx="1080120" cy="0"/>
-          </a:xfrm>
-          <a:prstGeom prst="straightConnector1">
-            <a:avLst/>
-          </a:prstGeom>
-          <a:ln>
-            <a:tailEnd type="triangle"/>
-          </a:ln>
-        </p:spPr>
-        <p:style>
-          <a:lnRef idx="1">
-            <a:schemeClr val="accent1"/>
-          </a:lnRef>
-          <a:fillRef idx="0">
-            <a:schemeClr val="accent1"/>
-          </a:fillRef>
-          <a:effectRef idx="0">
-            <a:schemeClr val="accent1"/>
-          </a:effectRef>
-          <a:fontRef idx="minor">
-            <a:schemeClr val="tx1"/>
-          </a:fontRef>
-        </p:style>
-      </p:cxnSp>
-      <p:pic>
-        <p:nvPicPr>
-          <p:cNvPr id="35" name="圖片 34"/>
-          <p:cNvPicPr>
-            <a:picLocks noChangeAspect="1"/>
-          </p:cNvPicPr>
-          <p:nvPr/>
-        </p:nvPicPr>
-        <p:blipFill>
-          <a:blip r:embed="rId4"/>
-          <a:stretch>
-            <a:fillRect/>
-          </a:stretch>
-        </p:blipFill>
-        <p:spPr>
-          <a:xfrm>
-            <a:off x="5101096" y="2094406"/>
-            <a:ext cx="1545470" cy="1348857"/>
-          </a:xfrm>
-          <a:prstGeom prst="rect">
-            <a:avLst/>
-          </a:prstGeom>
-        </p:spPr>
-      </p:pic>
-      <p:pic>
-        <p:nvPicPr>
-          <p:cNvPr id="41" name="圖片 40"/>
-          <p:cNvPicPr>
-            <a:picLocks noChangeAspect="1"/>
-          </p:cNvPicPr>
-          <p:nvPr/>
-        </p:nvPicPr>
-        <p:blipFill>
-          <a:blip r:embed="rId5"/>
-          <a:stretch>
-            <a:fillRect/>
-          </a:stretch>
-        </p:blipFill>
-        <p:spPr>
-          <a:xfrm>
-            <a:off x="2929741" y="2700504"/>
-            <a:ext cx="1138527" cy="662998"/>
-          </a:xfrm>
-          <a:prstGeom prst="rect">
-            <a:avLst/>
-          </a:prstGeom>
-        </p:spPr>
-      </p:pic>
-      <p:pic>
-        <p:nvPicPr>
-          <p:cNvPr id="42" name="圖片 41"/>
-          <p:cNvPicPr>
-            <a:picLocks noChangeAspect="1"/>
-          </p:cNvPicPr>
-          <p:nvPr/>
-        </p:nvPicPr>
-        <p:blipFill>
-          <a:blip r:embed="rId6"/>
-          <a:stretch>
-            <a:fillRect/>
-          </a:stretch>
-        </p:blipFill>
-        <p:spPr>
-          <a:xfrm>
-            <a:off x="3368298" y="3404295"/>
-            <a:ext cx="1911262" cy="662998"/>
-          </a:xfrm>
-          <a:prstGeom prst="rect">
-            <a:avLst/>
-          </a:prstGeom>
-        </p:spPr>
-      </p:pic>
-      <p:cxnSp>
-        <p:nvCxnSpPr>
-          <p:cNvPr id="44" name="肘形接點 43"/>
-          <p:cNvCxnSpPr/>
-          <p:nvPr/>
-        </p:nvCxnSpPr>
-        <p:spPr>
-          <a:xfrm>
-            <a:off x="2277469" y="3110641"/>
-            <a:ext cx="1061571" cy="616571"/>
-          </a:xfrm>
-          <a:prstGeom prst="bentConnector3">
-            <a:avLst>
-              <a:gd name="adj1" fmla="val 55653"/>
-            </a:avLst>
-          </a:prstGeom>
-          <a:ln>
-            <a:tailEnd type="triangle"/>
-          </a:ln>
-        </p:spPr>
-        <p:style>
-          <a:lnRef idx="1">
-            <a:schemeClr val="accent1"/>
-          </a:lnRef>
-          <a:fillRef idx="0">
-            <a:schemeClr val="accent1"/>
-          </a:fillRef>
-          <a:effectRef idx="0">
-            <a:schemeClr val="accent1"/>
-          </a:effectRef>
-          <a:fontRef idx="minor">
-            <a:schemeClr val="tx1"/>
-          </a:fontRef>
-        </p:style>
-      </p:cxnSp>
-      <p:pic>
-        <p:nvPicPr>
-          <p:cNvPr id="48" name="圖片 47"/>
-          <p:cNvPicPr>
-            <a:picLocks noChangeAspect="1"/>
-          </p:cNvPicPr>
-          <p:nvPr/>
-        </p:nvPicPr>
-        <p:blipFill>
-          <a:blip r:embed="rId7"/>
-          <a:stretch>
-            <a:fillRect/>
-          </a:stretch>
-        </p:blipFill>
-        <p:spPr>
-          <a:xfrm>
-            <a:off x="5124205" y="3425667"/>
-            <a:ext cx="1586621" cy="251482"/>
-          </a:xfrm>
-          <a:prstGeom prst="rect">
-            <a:avLst/>
-          </a:prstGeom>
-        </p:spPr>
-      </p:pic>
-      <p:cxnSp>
-        <p:nvCxnSpPr>
-          <p:cNvPr id="53" name="直線單箭頭接點 52"/>
-          <p:cNvCxnSpPr/>
-          <p:nvPr/>
-        </p:nvCxnSpPr>
-        <p:spPr>
-          <a:xfrm>
-            <a:off x="4748821" y="3534804"/>
-            <a:ext cx="352275" cy="0"/>
-          </a:xfrm>
-          <a:prstGeom prst="straightConnector1">
-            <a:avLst/>
-          </a:prstGeom>
-          <a:ln>
-            <a:tailEnd type="triangle"/>
-          </a:ln>
-        </p:spPr>
-        <p:style>
-          <a:lnRef idx="1">
-            <a:schemeClr val="accent1"/>
-          </a:lnRef>
-          <a:fillRef idx="0">
-            <a:schemeClr val="accent1"/>
-          </a:fillRef>
-          <a:effectRef idx="0">
-            <a:schemeClr val="accent1"/>
-          </a:effectRef>
-          <a:fontRef idx="minor">
-            <a:schemeClr val="tx1"/>
-          </a:fontRef>
-        </p:style>
-      </p:cxnSp>
-      <p:pic>
-        <p:nvPicPr>
-          <p:cNvPr id="56" name="圖片 55"/>
-          <p:cNvPicPr>
-            <a:picLocks noChangeAspect="1"/>
-          </p:cNvPicPr>
-          <p:nvPr/>
-        </p:nvPicPr>
-        <p:blipFill>
-          <a:blip r:embed="rId8"/>
-          <a:stretch>
-            <a:fillRect/>
-          </a:stretch>
-        </p:blipFill>
-        <p:spPr>
-          <a:xfrm>
-            <a:off x="5465752" y="3818356"/>
-            <a:ext cx="1412870" cy="246910"/>
-          </a:xfrm>
-          <a:prstGeom prst="rect">
-            <a:avLst/>
-          </a:prstGeom>
-        </p:spPr>
-      </p:pic>
-      <p:cxnSp>
-        <p:nvCxnSpPr>
-          <p:cNvPr id="57" name="直線單箭頭接點 56"/>
-          <p:cNvCxnSpPr/>
-          <p:nvPr/>
-        </p:nvCxnSpPr>
-        <p:spPr>
-          <a:xfrm>
-            <a:off x="5231419" y="3924610"/>
-            <a:ext cx="275258" cy="0"/>
-          </a:xfrm>
-          <a:prstGeom prst="straightConnector1">
-            <a:avLst/>
-          </a:prstGeom>
-          <a:ln>
-            <a:tailEnd type="triangle"/>
-          </a:ln>
-        </p:spPr>
-        <p:style>
-          <a:lnRef idx="1">
-            <a:schemeClr val="accent1"/>
-          </a:lnRef>
-          <a:fillRef idx="0">
-            <a:schemeClr val="accent1"/>
-          </a:fillRef>
-          <a:effectRef idx="0">
-            <a:schemeClr val="accent1"/>
-          </a:effectRef>
-          <a:fontRef idx="minor">
-            <a:schemeClr val="tx1"/>
-          </a:fontRef>
-        </p:style>
-      </p:cxnSp>
-      <p:cxnSp>
-        <p:nvCxnSpPr>
-          <p:cNvPr id="58" name="肘形接點 57"/>
-          <p:cNvCxnSpPr/>
-          <p:nvPr/>
-        </p:nvCxnSpPr>
-        <p:spPr>
-          <a:xfrm>
-            <a:off x="2213631" y="3285565"/>
-            <a:ext cx="1956197" cy="1035341"/>
-          </a:xfrm>
-          <a:prstGeom prst="bentConnector3">
-            <a:avLst>
-              <a:gd name="adj1" fmla="val 30718"/>
-            </a:avLst>
-          </a:prstGeom>
-          <a:ln>
-            <a:tailEnd type="triangle"/>
-          </a:ln>
-        </p:spPr>
-        <p:style>
-          <a:lnRef idx="1">
-            <a:schemeClr val="accent1"/>
-          </a:lnRef>
-          <a:fillRef idx="0">
-            <a:schemeClr val="accent1"/>
-          </a:fillRef>
-          <a:effectRef idx="0">
-            <a:schemeClr val="accent1"/>
-          </a:effectRef>
-          <a:fontRef idx="minor">
-            <a:schemeClr val="tx1"/>
-          </a:fontRef>
-        </p:style>
-      </p:cxnSp>
-      <p:pic>
-        <p:nvPicPr>
-          <p:cNvPr id="63" name="圖片 62"/>
-          <p:cNvPicPr>
-            <a:picLocks noChangeAspect="1"/>
-          </p:cNvPicPr>
-          <p:nvPr/>
-        </p:nvPicPr>
-        <p:blipFill>
-          <a:blip r:embed="rId9"/>
-          <a:stretch>
-            <a:fillRect/>
-          </a:stretch>
-        </p:blipFill>
-        <p:spPr>
-          <a:xfrm>
-            <a:off x="4259038" y="4046174"/>
-            <a:ext cx="1449449" cy="525826"/>
-          </a:xfrm>
-          <a:prstGeom prst="rect">
-            <a:avLst/>
-          </a:prstGeom>
-        </p:spPr>
-      </p:pic>
-      <p:pic>
-        <p:nvPicPr>
-          <p:cNvPr id="67" name="圖片 66"/>
-          <p:cNvPicPr>
-            <a:picLocks noChangeAspect="1"/>
-          </p:cNvPicPr>
-          <p:nvPr/>
-        </p:nvPicPr>
-        <p:blipFill>
-          <a:blip r:embed="rId10"/>
-          <a:stretch>
-            <a:fillRect/>
-          </a:stretch>
-        </p:blipFill>
-        <p:spPr>
-          <a:xfrm>
-            <a:off x="1149163" y="469001"/>
-            <a:ext cx="1937882" cy="874348"/>
-          </a:xfrm>
-          <a:prstGeom prst="rect">
-            <a:avLst/>
-          </a:prstGeom>
-        </p:spPr>
-      </p:pic>
-      <p:pic>
-        <p:nvPicPr>
-          <p:cNvPr id="68" name="圖片 67"/>
-          <p:cNvPicPr>
-            <a:picLocks noChangeAspect="1"/>
-          </p:cNvPicPr>
-          <p:nvPr/>
-        </p:nvPicPr>
-        <p:blipFill>
-          <a:blip r:embed="rId11"/>
-          <a:stretch>
-            <a:fillRect/>
-          </a:stretch>
-        </p:blipFill>
-        <p:spPr>
-          <a:xfrm>
-            <a:off x="1189196" y="1384142"/>
-            <a:ext cx="1024434" cy="386888"/>
-          </a:xfrm>
-          <a:prstGeom prst="rect">
-            <a:avLst/>
-          </a:prstGeom>
-        </p:spPr>
-      </p:pic>
-      <p:pic>
-        <p:nvPicPr>
-          <p:cNvPr id="69" name="圖片 68"/>
-          <p:cNvPicPr>
-            <a:picLocks noChangeAspect="1"/>
-          </p:cNvPicPr>
-          <p:nvPr/>
-        </p:nvPicPr>
-        <p:blipFill>
-          <a:blip r:embed="rId12"/>
-          <a:stretch>
-            <a:fillRect/>
-          </a:stretch>
-        </p:blipFill>
-        <p:spPr>
-          <a:xfrm>
-            <a:off x="1167152" y="1847669"/>
-            <a:ext cx="1000967" cy="644240"/>
-          </a:xfrm>
-          <a:prstGeom prst="rect">
-            <a:avLst/>
-          </a:prstGeom>
-        </p:spPr>
-      </p:pic>
-      <p:pic>
-        <p:nvPicPr>
-          <p:cNvPr id="70" name="圖片 69"/>
-          <p:cNvPicPr>
-            <a:picLocks noChangeAspect="1"/>
-          </p:cNvPicPr>
-          <p:nvPr/>
-        </p:nvPicPr>
-        <p:blipFill>
-          <a:blip r:embed="rId13"/>
-          <a:stretch>
-            <a:fillRect/>
-          </a:stretch>
-        </p:blipFill>
-        <p:spPr>
-          <a:xfrm>
-            <a:off x="4253104" y="4628851"/>
-            <a:ext cx="2025572" cy="393226"/>
-          </a:xfrm>
-          <a:prstGeom prst="rect">
-            <a:avLst/>
-          </a:prstGeom>
-        </p:spPr>
-      </p:pic>
-      <p:cxnSp>
-        <p:nvCxnSpPr>
-          <p:cNvPr id="71" name="肘形接點 70"/>
-          <p:cNvCxnSpPr>
-            <a:endCxn id="70" idx="1"/>
-          </p:cNvCxnSpPr>
-          <p:nvPr/>
-        </p:nvCxnSpPr>
-        <p:spPr>
-          <a:xfrm>
-            <a:off x="1937030" y="3449269"/>
-            <a:ext cx="2316074" cy="1376195"/>
-          </a:xfrm>
-          <a:prstGeom prst="bentConnector3">
-            <a:avLst>
-              <a:gd name="adj1" fmla="val 33344"/>
-            </a:avLst>
-          </a:prstGeom>
-          <a:ln>
-            <a:tailEnd type="triangle"/>
-          </a:ln>
-        </p:spPr>
-        <p:style>
-          <a:lnRef idx="1">
-            <a:schemeClr val="accent1"/>
-          </a:lnRef>
-          <a:fillRef idx="0">
-            <a:schemeClr val="accent1"/>
-          </a:fillRef>
-          <a:effectRef idx="0">
-            <a:schemeClr val="accent1"/>
-          </a:effectRef>
-          <a:fontRef idx="minor">
-            <a:schemeClr val="tx1"/>
-          </a:fontRef>
-        </p:style>
-      </p:cxnSp>
-      <p:pic>
-        <p:nvPicPr>
-          <p:cNvPr id="79" name="圖片 78"/>
-          <p:cNvPicPr>
-            <a:picLocks noChangeAspect="1"/>
-          </p:cNvPicPr>
-          <p:nvPr/>
-        </p:nvPicPr>
-        <p:blipFill>
-          <a:blip r:embed="rId14"/>
-          <a:stretch>
-            <a:fillRect/>
-          </a:stretch>
-        </p:blipFill>
-        <p:spPr>
-          <a:xfrm>
-            <a:off x="379450" y="4000477"/>
-            <a:ext cx="2057579" cy="1216258"/>
-          </a:xfrm>
-          <a:prstGeom prst="rect">
-            <a:avLst/>
-          </a:prstGeom>
-        </p:spPr>
-      </p:pic>
-      <p:cxnSp>
-        <p:nvCxnSpPr>
-          <p:cNvPr id="81" name="肘形接點 80"/>
-          <p:cNvCxnSpPr/>
-          <p:nvPr/>
-        </p:nvCxnSpPr>
-        <p:spPr>
-          <a:xfrm rot="5400000">
-            <a:off x="856246" y="3688096"/>
-            <a:ext cx="434738" cy="276601"/>
-          </a:xfrm>
-          <a:prstGeom prst="bentConnector3">
-            <a:avLst>
-              <a:gd name="adj1" fmla="val 703"/>
-            </a:avLst>
-          </a:prstGeom>
-          <a:ln>
-            <a:solidFill>
-              <a:srgbClr val="FF0000"/>
-            </a:solidFill>
-            <a:tailEnd type="triangle"/>
-          </a:ln>
-        </p:spPr>
-        <p:style>
-          <a:lnRef idx="1">
-            <a:schemeClr val="accent1"/>
-          </a:lnRef>
-          <a:fillRef idx="0">
-            <a:schemeClr val="accent1"/>
-          </a:fillRef>
-          <a:effectRef idx="0">
-            <a:schemeClr val="accent1"/>
-          </a:effectRef>
-          <a:fontRef idx="minor">
-            <a:schemeClr val="tx1"/>
-          </a:fontRef>
-        </p:style>
-      </p:cxnSp>
-      <p:sp>
-        <p:nvSpPr>
-          <p:cNvPr id="85" name="右大括弧 84"/>
-          <p:cNvSpPr/>
-          <p:nvPr/>
-        </p:nvSpPr>
-        <p:spPr>
-          <a:xfrm>
-            <a:off x="3095067" y="797404"/>
-            <a:ext cx="322521" cy="1372385"/>
-          </a:xfrm>
-          <a:prstGeom prst="rightBrace">
-            <a:avLst/>
-          </a:prstGeom>
-          <a:ln>
-            <a:solidFill>
-              <a:schemeClr val="tx1"/>
-            </a:solidFill>
-          </a:ln>
-        </p:spPr>
-        <p:style>
-          <a:lnRef idx="1">
-            <a:schemeClr val="accent1"/>
-          </a:lnRef>
-          <a:fillRef idx="0">
-            <a:schemeClr val="accent1"/>
-          </a:fillRef>
-          <a:effectRef idx="0">
-            <a:schemeClr val="accent1"/>
-          </a:effectRef>
-          <a:fontRef idx="minor">
-            <a:schemeClr val="tx1"/>
-          </a:fontRef>
-        </p:style>
-        <p:txBody>
-          <a:bodyPr rtlCol="0" anchor="ctr"/>
-          <a:lstStyle/>
-          <a:p>
-            <a:pPr algn="ctr"/>
-            <a:endParaRPr lang="zh-TW" altLang="en-US" sz="1350" b="1" dirty="0"/>
-          </a:p>
-        </p:txBody>
-      </p:sp>
-      <p:pic>
-        <p:nvPicPr>
-          <p:cNvPr id="87" name="圖片 86"/>
-          <p:cNvPicPr>
-            <a:picLocks noChangeAspect="1"/>
-          </p:cNvPicPr>
-          <p:nvPr/>
-        </p:nvPicPr>
-        <p:blipFill>
-          <a:blip r:embed="rId15"/>
-          <a:stretch>
-            <a:fillRect/>
-          </a:stretch>
-        </p:blipFill>
-        <p:spPr>
-          <a:xfrm>
-            <a:off x="1978337" y="3818356"/>
-            <a:ext cx="727011" cy="246910"/>
-          </a:xfrm>
-          <a:prstGeom prst="rect">
-            <a:avLst/>
-          </a:prstGeom>
-        </p:spPr>
-      </p:pic>
-      <p:cxnSp>
-        <p:nvCxnSpPr>
-          <p:cNvPr id="89" name="肘形接點 88"/>
-          <p:cNvCxnSpPr/>
-          <p:nvPr/>
-        </p:nvCxnSpPr>
-        <p:spPr>
-          <a:xfrm>
-            <a:off x="1834131" y="3854296"/>
-            <a:ext cx="193932" cy="94446"/>
-          </a:xfrm>
-          <a:prstGeom prst="bentConnector3">
-            <a:avLst>
-              <a:gd name="adj1" fmla="val -26"/>
-            </a:avLst>
-          </a:prstGeom>
-          <a:ln>
-            <a:tailEnd type="triangle"/>
-          </a:ln>
-        </p:spPr>
-        <p:style>
-          <a:lnRef idx="1">
-            <a:schemeClr val="accent1"/>
-          </a:lnRef>
-          <a:fillRef idx="0">
-            <a:schemeClr val="accent1"/>
-          </a:fillRef>
-          <a:effectRef idx="0">
-            <a:schemeClr val="accent1"/>
-          </a:effectRef>
-          <a:fontRef idx="minor">
-            <a:schemeClr val="tx1"/>
-          </a:fontRef>
-        </p:style>
-      </p:cxnSp>
-      <p:sp>
-        <p:nvSpPr>
-          <p:cNvPr id="94" name="矩形 93"/>
-          <p:cNvSpPr/>
-          <p:nvPr/>
-        </p:nvSpPr>
-        <p:spPr>
-          <a:xfrm>
-            <a:off x="3481471" y="1384142"/>
-            <a:ext cx="944489" cy="242374"/>
-          </a:xfrm>
-          <a:prstGeom prst="rect">
-            <a:avLst/>
-          </a:prstGeom>
-        </p:spPr>
-        <p:txBody>
-          <a:bodyPr wrap="none">
-            <a:spAutoFit/>
-          </a:bodyPr>
-          <a:lstStyle/>
-          <a:p>
-            <a:r>
-              <a:rPr lang="zh-TW" altLang="zh-TW" sz="975" b="1" dirty="0">
-                <a:solidFill>
-                  <a:srgbClr val="538135"/>
-                </a:solidFill>
-                <a:latin typeface="Calibri" panose="020F0502020204030204" pitchFamily="34" charset="0"/>
-                <a:cs typeface="Times New Roman" panose="02020603050405020304" pitchFamily="18" charset="0"/>
-              </a:rPr>
-              <a:t>買家</a:t>
-            </a:r>
-            <a:r>
-              <a:rPr lang="en-US" altLang="zh-TW" sz="975" b="1" dirty="0">
-                <a:solidFill>
-                  <a:srgbClr val="538135"/>
-                </a:solidFill>
-                <a:latin typeface="Calibri" panose="020F0502020204030204" pitchFamily="34" charset="0"/>
-                <a:cs typeface="Times New Roman" panose="02020603050405020304" pitchFamily="18" charset="0"/>
-              </a:rPr>
-              <a:t> LIFF </a:t>
-            </a:r>
-            <a:r>
-              <a:rPr lang="zh-TW" altLang="zh-TW" sz="975" b="1" dirty="0">
-                <a:solidFill>
-                  <a:srgbClr val="538135"/>
-                </a:solidFill>
-                <a:latin typeface="Calibri" panose="020F0502020204030204" pitchFamily="34" charset="0"/>
-                <a:cs typeface="Times New Roman" panose="02020603050405020304" pitchFamily="18" charset="0"/>
-              </a:rPr>
-              <a:t>頁</a:t>
-            </a:r>
-            <a:r>
-              <a:rPr lang="zh-TW" altLang="en-US" sz="975" b="1" dirty="0">
-                <a:solidFill>
-                  <a:srgbClr val="538135"/>
-                </a:solidFill>
-                <a:latin typeface="Calibri" panose="020F0502020204030204" pitchFamily="34" charset="0"/>
-                <a:cs typeface="Times New Roman" panose="02020603050405020304" pitchFamily="18" charset="0"/>
-              </a:rPr>
-              <a:t>面</a:t>
-            </a:r>
-            <a:endParaRPr lang="zh-TW" altLang="en-US" sz="1350" dirty="0"/>
-          </a:p>
-        </p:txBody>
-      </p:sp>
-      <p:pic>
-        <p:nvPicPr>
-          <p:cNvPr id="96" name="圖片 95"/>
-          <p:cNvPicPr>
-            <a:picLocks noChangeAspect="1"/>
-          </p:cNvPicPr>
-          <p:nvPr/>
-        </p:nvPicPr>
-        <p:blipFill>
-          <a:blip r:embed="rId16"/>
-          <a:stretch>
-            <a:fillRect/>
-          </a:stretch>
-        </p:blipFill>
-        <p:spPr>
-          <a:xfrm>
-            <a:off x="115567" y="870645"/>
-            <a:ext cx="845969" cy="263552"/>
-          </a:xfrm>
-          <a:prstGeom prst="rect">
-            <a:avLst/>
-          </a:prstGeom>
-        </p:spPr>
-      </p:pic>
-      <p:pic>
-        <p:nvPicPr>
-          <p:cNvPr id="97" name="圖片 96"/>
-          <p:cNvPicPr>
-            <a:picLocks noChangeAspect="1"/>
-          </p:cNvPicPr>
-          <p:nvPr/>
-        </p:nvPicPr>
-        <p:blipFill>
-          <a:blip r:embed="rId17"/>
-          <a:stretch>
-            <a:fillRect/>
-          </a:stretch>
-        </p:blipFill>
-        <p:spPr>
-          <a:xfrm>
-            <a:off x="73171" y="1540205"/>
-            <a:ext cx="1087142" cy="232344"/>
-          </a:xfrm>
-          <a:prstGeom prst="rect">
-            <a:avLst/>
-          </a:prstGeom>
-        </p:spPr>
-      </p:pic>
-      <p:pic>
-        <p:nvPicPr>
-          <p:cNvPr id="98" name="圖片 97"/>
-          <p:cNvPicPr>
-            <a:picLocks noChangeAspect="1"/>
-          </p:cNvPicPr>
-          <p:nvPr/>
-        </p:nvPicPr>
-        <p:blipFill>
-          <a:blip r:embed="rId18"/>
-          <a:stretch>
-            <a:fillRect/>
-          </a:stretch>
-        </p:blipFill>
-        <p:spPr>
-          <a:xfrm>
-            <a:off x="44522" y="2275350"/>
-            <a:ext cx="1184388" cy="256842"/>
-          </a:xfrm>
-          <a:prstGeom prst="rect">
-            <a:avLst/>
-          </a:prstGeom>
-        </p:spPr>
-      </p:pic>
-      <p:pic>
-        <p:nvPicPr>
-          <p:cNvPr id="99" name="圖片 98"/>
-          <p:cNvPicPr>
-            <a:picLocks noChangeAspect="1"/>
-          </p:cNvPicPr>
-          <p:nvPr/>
-        </p:nvPicPr>
-        <p:blipFill>
-          <a:blip r:embed="rId19"/>
-          <a:stretch>
-            <a:fillRect/>
-          </a:stretch>
-        </p:blipFill>
-        <p:spPr>
-          <a:xfrm>
-            <a:off x="5022" y="3016287"/>
-            <a:ext cx="1280077" cy="230414"/>
-          </a:xfrm>
-          <a:prstGeom prst="rect">
-            <a:avLst/>
-          </a:prstGeom>
-        </p:spPr>
-      </p:pic>
-      <p:pic>
-        <p:nvPicPr>
-          <p:cNvPr id="100" name="圖片 99"/>
-          <p:cNvPicPr>
-            <a:picLocks noChangeAspect="1"/>
-          </p:cNvPicPr>
-          <p:nvPr/>
-        </p:nvPicPr>
-        <p:blipFill>
-          <a:blip r:embed="rId20"/>
-          <a:stretch>
-            <a:fillRect/>
-          </a:stretch>
-        </p:blipFill>
-        <p:spPr>
-          <a:xfrm>
-            <a:off x="4169828" y="179971"/>
-            <a:ext cx="2523539" cy="1191672"/>
-          </a:xfrm>
-          <a:prstGeom prst="rect">
-            <a:avLst/>
-          </a:prstGeom>
-        </p:spPr>
-      </p:pic>
-      <p:sp>
-        <p:nvSpPr>
-          <p:cNvPr id="2" name="文字方塊 1"/>
-          <p:cNvSpPr txBox="1"/>
-          <p:nvPr/>
-        </p:nvSpPr>
-        <p:spPr>
-          <a:xfrm>
-            <a:off x="1207311" y="1668866"/>
-            <a:ext cx="1986441" cy="230832"/>
-          </a:xfrm>
-          <a:prstGeom prst="rect">
-            <a:avLst/>
-          </a:prstGeom>
-          <a:noFill/>
-        </p:spPr>
-        <p:txBody>
-          <a:bodyPr wrap="none" rtlCol="0">
-            <a:spAutoFit/>
-          </a:bodyPr>
-          <a:lstStyle/>
-          <a:p>
-            <a:r>
-              <a:rPr lang="zh-TW" altLang="en-US" sz="900" b="1" dirty="0"/>
-              <a:t>刪除訂單</a:t>
-            </a:r>
-            <a:r>
-              <a:rPr lang="en-US" altLang="zh-TW" sz="900" b="1" dirty="0">
-                <a:solidFill>
-                  <a:srgbClr val="FF0000"/>
-                </a:solidFill>
-              </a:rPr>
-              <a:t>(</a:t>
-            </a:r>
-            <a:r>
-              <a:rPr lang="zh-TW" altLang="en-US" sz="900" b="1" dirty="0">
-                <a:solidFill>
-                  <a:srgbClr val="FF0000"/>
-                </a:solidFill>
-              </a:rPr>
-              <a:t>當管理員按結單後則無效</a:t>
-            </a:r>
-            <a:r>
-              <a:rPr lang="en-US" altLang="zh-TW" sz="900" b="1" dirty="0">
-                <a:solidFill>
-                  <a:srgbClr val="FF0000"/>
-                </a:solidFill>
-              </a:rPr>
-              <a:t>)</a:t>
-            </a:r>
-            <a:endParaRPr lang="zh-TW" altLang="en-US" sz="900" b="1" dirty="0">
-              <a:solidFill>
-                <a:srgbClr val="FF0000"/>
-              </a:solidFill>
-            </a:endParaRPr>
-          </a:p>
-        </p:txBody>
-      </p:sp>
-    </p:spTree>
-    <p:extLst>
-      <p:ext uri="{BB962C8B-B14F-4D97-AF65-F5344CB8AC3E}">
-        <p14:creationId xmlns:p14="http://schemas.microsoft.com/office/powerpoint/2010/main" val="4127542347"/>
-      </p:ext>
-    </p:extLst>
-  </p:cSld>
-  <p:clrMapOvr>
-    <a:masterClrMapping/>
-  </p:clrMapOvr>
-</p:sld>
-</file>
-
-<file path=ppt/slides/slide5.xml><?xml version="1.0" encoding="utf-8"?>
 <p:sld xmlns:a="http://schemas.openxmlformats.org/drawingml/2006/main" xmlns:r="http://schemas.openxmlformats.org/officeDocument/2006/relationships" xmlns:p="http://schemas.openxmlformats.org/presentationml/2006/main">
   <p:cSld>
     <p:spTree>
@@ -6397,379 +5093,6 @@
 </p:sld>
 </file>
 
-<file path=ppt/slides/slide6.xml><?xml version="1.0" encoding="utf-8"?>
-<p:sld xmlns:a="http://schemas.openxmlformats.org/drawingml/2006/main" xmlns:r="http://schemas.openxmlformats.org/officeDocument/2006/relationships" xmlns:p="http://schemas.openxmlformats.org/presentationml/2006/main">
-  <p:cSld>
-    <p:spTree>
-      <p:nvGrpSpPr>
-        <p:cNvPr id="1" name=""/>
-        <p:cNvGrpSpPr/>
-        <p:nvPr/>
-      </p:nvGrpSpPr>
-      <p:grpSpPr>
-        <a:xfrm>
-          <a:off x="0" y="0"/>
-          <a:ext cx="0" cy="0"/>
-          <a:chOff x="0" y="0"/>
-          <a:chExt cx="0" cy="0"/>
-        </a:xfrm>
-      </p:grpSpPr>
-      <p:pic>
-        <p:nvPicPr>
-          <p:cNvPr id="5" name="圖片 4"/>
-          <p:cNvPicPr>
-            <a:picLocks noChangeAspect="1"/>
-          </p:cNvPicPr>
-          <p:nvPr/>
-        </p:nvPicPr>
-        <p:blipFill>
-          <a:blip r:embed="rId2" cstate="print">
-            <a:extLst>
-              <a:ext uri="{28A0092B-C50C-407E-A947-70E740481C1C}">
-                <a14:useLocalDpi xmlns:a14="http://schemas.microsoft.com/office/drawing/2010/main" val="0"/>
-              </a:ext>
-            </a:extLst>
-          </a:blip>
-          <a:stretch>
-            <a:fillRect/>
-          </a:stretch>
-        </p:blipFill>
-        <p:spPr>
-          <a:xfrm>
-            <a:off x="77585" y="3548150"/>
-            <a:ext cx="1623223" cy="3126729"/>
-          </a:xfrm>
-          <a:prstGeom prst="rect">
-            <a:avLst/>
-          </a:prstGeom>
-        </p:spPr>
-      </p:pic>
-      <p:pic>
-        <p:nvPicPr>
-          <p:cNvPr id="10" name="圖片 9"/>
-          <p:cNvPicPr>
-            <a:picLocks noChangeAspect="1"/>
-          </p:cNvPicPr>
-          <p:nvPr/>
-        </p:nvPicPr>
-        <p:blipFill>
-          <a:blip r:embed="rId3">
-            <a:extLst>
-              <a:ext uri="{28A0092B-C50C-407E-A947-70E740481C1C}">
-                <a14:useLocalDpi xmlns:a14="http://schemas.microsoft.com/office/drawing/2010/main" val="0"/>
-              </a:ext>
-            </a:extLst>
-          </a:blip>
-          <a:stretch>
-            <a:fillRect/>
-          </a:stretch>
-        </p:blipFill>
-        <p:spPr>
-          <a:xfrm>
-            <a:off x="0" y="26863"/>
-            <a:ext cx="6858000" cy="1655956"/>
-          </a:xfrm>
-          <a:prstGeom prst="rect">
-            <a:avLst/>
-          </a:prstGeom>
-        </p:spPr>
-      </p:pic>
-      <p:sp>
-        <p:nvSpPr>
-          <p:cNvPr id="11" name="矩形 10"/>
-          <p:cNvSpPr/>
-          <p:nvPr/>
-        </p:nvSpPr>
-        <p:spPr>
-          <a:xfrm>
-            <a:off x="692696" y="5580112"/>
-            <a:ext cx="1008112" cy="194758"/>
-          </a:xfrm>
-          <a:prstGeom prst="rect">
-            <a:avLst/>
-          </a:prstGeom>
-          <a:noFill/>
-          <a:ln>
-            <a:solidFill>
-              <a:srgbClr val="FF0000"/>
-            </a:solidFill>
-          </a:ln>
-        </p:spPr>
-        <p:style>
-          <a:lnRef idx="2">
-            <a:schemeClr val="accent1">
-              <a:shade val="50000"/>
-            </a:schemeClr>
-          </a:lnRef>
-          <a:fillRef idx="1">
-            <a:schemeClr val="accent1"/>
-          </a:fillRef>
-          <a:effectRef idx="0">
-            <a:schemeClr val="accent1"/>
-          </a:effectRef>
-          <a:fontRef idx="minor">
-            <a:schemeClr val="lt1"/>
-          </a:fontRef>
-        </p:style>
-        <p:txBody>
-          <a:bodyPr rtlCol="0" anchor="ctr"/>
-          <a:lstStyle/>
-          <a:p>
-            <a:pPr algn="ctr"/>
-            <a:endParaRPr lang="zh-TW" altLang="en-US"/>
-          </a:p>
-        </p:txBody>
-      </p:sp>
-      <p:cxnSp>
-        <p:nvCxnSpPr>
-          <p:cNvPr id="13" name="直線單箭頭接點 12"/>
-          <p:cNvCxnSpPr>
-            <a:endCxn id="11" idx="3"/>
-          </p:cNvCxnSpPr>
-          <p:nvPr/>
-        </p:nvCxnSpPr>
-        <p:spPr>
-          <a:xfrm flipH="1" flipV="1">
-            <a:off x="1700808" y="5677491"/>
-            <a:ext cx="576064" cy="25371"/>
-          </a:xfrm>
-          <a:prstGeom prst="straightConnector1">
-            <a:avLst/>
-          </a:prstGeom>
-          <a:ln>
-            <a:solidFill>
-              <a:srgbClr val="FF0000"/>
-            </a:solidFill>
-            <a:tailEnd type="triangle"/>
-          </a:ln>
-        </p:spPr>
-        <p:style>
-          <a:lnRef idx="1">
-            <a:schemeClr val="accent1"/>
-          </a:lnRef>
-          <a:fillRef idx="0">
-            <a:schemeClr val="accent1"/>
-          </a:fillRef>
-          <a:effectRef idx="0">
-            <a:schemeClr val="accent1"/>
-          </a:effectRef>
-          <a:fontRef idx="minor">
-            <a:schemeClr val="tx1"/>
-          </a:fontRef>
-        </p:style>
-      </p:cxnSp>
-      <p:sp>
-        <p:nvSpPr>
-          <p:cNvPr id="14" name="文字方塊 13"/>
-          <p:cNvSpPr txBox="1"/>
-          <p:nvPr/>
-        </p:nvSpPr>
-        <p:spPr>
-          <a:xfrm>
-            <a:off x="2216422" y="5513260"/>
-            <a:ext cx="2137124" cy="523220"/>
-          </a:xfrm>
-          <a:prstGeom prst="rect">
-            <a:avLst/>
-          </a:prstGeom>
-          <a:noFill/>
-        </p:spPr>
-        <p:txBody>
-          <a:bodyPr wrap="none" rtlCol="0">
-            <a:spAutoFit/>
-          </a:bodyPr>
-          <a:lstStyle/>
-          <a:p>
-            <a:r>
-              <a:rPr lang="en-US" altLang="zh-TW" sz="1400" b="1" dirty="0" smtClean="0">
-                <a:solidFill>
-                  <a:srgbClr val="FF0000"/>
-                </a:solidFill>
-              </a:rPr>
-              <a:t>“</a:t>
-            </a:r>
-            <a:r>
-              <a:rPr lang="zh-TW" altLang="en-US" sz="1400" b="1" dirty="0" smtClean="0">
-                <a:solidFill>
-                  <a:srgbClr val="FF0000"/>
-                </a:solidFill>
-              </a:rPr>
-              <a:t>我要下單</a:t>
-            </a:r>
-            <a:r>
-              <a:rPr lang="en-US" altLang="zh-TW" sz="1400" b="1" dirty="0" smtClean="0">
-                <a:solidFill>
-                  <a:srgbClr val="FF0000"/>
-                </a:solidFill>
-              </a:rPr>
-              <a:t>”</a:t>
-            </a:r>
-            <a:r>
-              <a:rPr lang="zh-TW" altLang="en-US" sz="1400" b="1" dirty="0" smtClean="0">
-                <a:solidFill>
-                  <a:srgbClr val="FF0000"/>
-                </a:solidFill>
-              </a:rPr>
-              <a:t>下單完就出現</a:t>
-            </a:r>
-            <a:endParaRPr lang="en-US" altLang="zh-TW" sz="1400" b="1" dirty="0" smtClean="0">
-              <a:solidFill>
-                <a:srgbClr val="FF0000"/>
-              </a:solidFill>
-            </a:endParaRPr>
-          </a:p>
-          <a:p>
-            <a:r>
-              <a:rPr lang="zh-TW" altLang="en-US" sz="1400" b="1" dirty="0" smtClean="0">
-                <a:solidFill>
-                  <a:srgbClr val="FF0000"/>
-                </a:solidFill>
-              </a:rPr>
-              <a:t>無法修改刪除</a:t>
-            </a:r>
-            <a:endParaRPr lang="zh-TW" altLang="en-US" sz="1400" b="1" dirty="0">
-              <a:solidFill>
-                <a:srgbClr val="FF0000"/>
-              </a:solidFill>
-            </a:endParaRPr>
-          </a:p>
-        </p:txBody>
-      </p:sp>
-      <p:pic>
-        <p:nvPicPr>
-          <p:cNvPr id="20" name="圖片 19"/>
-          <p:cNvPicPr>
-            <a:picLocks noChangeAspect="1"/>
-          </p:cNvPicPr>
-          <p:nvPr/>
-        </p:nvPicPr>
-        <p:blipFill>
-          <a:blip r:embed="rId4">
-            <a:extLst>
-              <a:ext uri="{28A0092B-C50C-407E-A947-70E740481C1C}">
-                <a14:useLocalDpi xmlns:a14="http://schemas.microsoft.com/office/drawing/2010/main" val="0"/>
-              </a:ext>
-            </a:extLst>
-          </a:blip>
-          <a:stretch>
-            <a:fillRect/>
-          </a:stretch>
-        </p:blipFill>
-        <p:spPr>
-          <a:xfrm>
-            <a:off x="7295" y="1750827"/>
-            <a:ext cx="6858000" cy="1729315"/>
-          </a:xfrm>
-          <a:prstGeom prst="rect">
-            <a:avLst/>
-          </a:prstGeom>
-        </p:spPr>
-      </p:pic>
-      <p:sp>
-        <p:nvSpPr>
-          <p:cNvPr id="21" name="矩形 20"/>
-          <p:cNvSpPr/>
-          <p:nvPr/>
-        </p:nvSpPr>
-        <p:spPr>
-          <a:xfrm>
-            <a:off x="-10752" y="1979712"/>
-            <a:ext cx="4807903" cy="144016"/>
-          </a:xfrm>
-          <a:prstGeom prst="rect">
-            <a:avLst/>
-          </a:prstGeom>
-          <a:noFill/>
-          <a:ln>
-            <a:solidFill>
-              <a:srgbClr val="FF0000"/>
-            </a:solidFill>
-          </a:ln>
-        </p:spPr>
-        <p:style>
-          <a:lnRef idx="2">
-            <a:schemeClr val="accent1">
-              <a:shade val="50000"/>
-            </a:schemeClr>
-          </a:lnRef>
-          <a:fillRef idx="1">
-            <a:schemeClr val="accent1"/>
-          </a:fillRef>
-          <a:effectRef idx="0">
-            <a:schemeClr val="accent1"/>
-          </a:effectRef>
-          <a:fontRef idx="minor">
-            <a:schemeClr val="lt1"/>
-          </a:fontRef>
-        </p:style>
-        <p:txBody>
-          <a:bodyPr rtlCol="0" anchor="ctr"/>
-          <a:lstStyle/>
-          <a:p>
-            <a:pPr algn="ctr"/>
-            <a:endParaRPr lang="zh-TW" altLang="en-US"/>
-          </a:p>
-        </p:txBody>
-      </p:sp>
-      <p:sp>
-        <p:nvSpPr>
-          <p:cNvPr id="22" name="矩形 21"/>
-          <p:cNvSpPr/>
-          <p:nvPr/>
-        </p:nvSpPr>
-        <p:spPr>
-          <a:xfrm>
-            <a:off x="77585" y="249233"/>
-            <a:ext cx="6087719" cy="145179"/>
-          </a:xfrm>
-          <a:prstGeom prst="rect">
-            <a:avLst/>
-          </a:prstGeom>
-          <a:noFill/>
-          <a:ln>
-            <a:solidFill>
-              <a:srgbClr val="FF0000"/>
-            </a:solidFill>
-          </a:ln>
-        </p:spPr>
-        <p:style>
-          <a:lnRef idx="2">
-            <a:schemeClr val="accent1">
-              <a:shade val="50000"/>
-            </a:schemeClr>
-          </a:lnRef>
-          <a:fillRef idx="1">
-            <a:schemeClr val="accent1"/>
-          </a:fillRef>
-          <a:effectRef idx="0">
-            <a:schemeClr val="accent1"/>
-          </a:effectRef>
-          <a:fontRef idx="minor">
-            <a:schemeClr val="lt1"/>
-          </a:fontRef>
-        </p:style>
-        <p:txBody>
-          <a:bodyPr rtlCol="0" anchor="ctr"/>
-          <a:lstStyle/>
-          <a:p>
-            <a:pPr algn="ctr"/>
-            <a:endParaRPr lang="zh-TW" altLang="en-US"/>
-          </a:p>
-        </p:txBody>
-      </p:sp>
-    </p:spTree>
-    <p:extLst>
-      <p:ext uri="{BB962C8B-B14F-4D97-AF65-F5344CB8AC3E}">
-        <p14:creationId xmlns:p14="http://schemas.microsoft.com/office/powerpoint/2010/main" val="610132634"/>
-      </p:ext>
-    </p:extLst>
-  </p:cSld>
-  <p:clrMapOvr>
-    <a:masterClrMapping/>
-  </p:clrMapOvr>
-</p:sld>
-</file>
-
 <file path=ppt/theme/theme1.xml><?xml version="1.0" encoding="utf-8"?>
 <a:theme xmlns:a="http://schemas.openxmlformats.org/drawingml/2006/main" name="Office 佈景主題">
   <a:themeElements>
